--- a/FINAL-PRESENTATION.pptx
+++ b/FINAL-PRESENTATION.pptx
@@ -5732,7 +5732,7 @@
                 </a:solidFill>
                 <a:latin typeface="Arial"/>
               </a:rPr>
-              <a:t>Agilish</a:t>
+              <a:t>AGILE-ish</a:t>
             </a:r>
           </a:p>
         </p:txBody>
@@ -5816,7 +5816,7 @@
                 </a:solidFill>
                 <a:latin typeface="Arial"/>
               </a:rPr>
-              <a:t>shreya  ·  sathwik  ·  Rameez</a:t>
+              <a:t>Shreya  ·  Sathwik  ·  Rameez</a:t>
             </a:r>
           </a:p>
         </p:txBody>
@@ -8203,7 +8203,7 @@
                 </a:solidFill>
                 <a:latin typeface="Arial"/>
               </a:rPr>
-              <a:t>Agilish  ·  Transaction Monitoring &amp; Alerts</a:t>
+              <a:t>AGILE-ish  ·  Transaction Monitoring &amp; Alerts</a:t>
             </a:r>
           </a:p>
         </p:txBody>
@@ -11316,7 +11316,7 @@
                 </a:solidFill>
                 <a:latin typeface="Arial"/>
               </a:rPr>
-              <a:t>Agilish  ·  Transaction Monitoring &amp; Alerts</a:t>
+              <a:t>AGILE-ish  ·  Transaction Monitoring &amp; Alerts</a:t>
             </a:r>
           </a:p>
         </p:txBody>
@@ -11418,7 +11418,7 @@
                 </a:solidFill>
                 <a:latin typeface="Arial"/>
               </a:rPr>
-              <a:t>DETECTION &amp; LIFECYCLE</a:t>
+              <a:t>EVIDENCE</a:t>
             </a:r>
           </a:p>
         </p:txBody>
@@ -11460,7 +11460,7 @@
                 </a:solidFill>
                 <a:latin typeface="Arial"/>
               </a:rPr>
-              <a:t>Four rules, five states, one audit trail</a:t>
+              <a:t>We pushed it until it hurt, then found out why</a:t>
             </a:r>
           </a:p>
         </p:txBody>
@@ -11546,67 +11546,25 @@
                 </a:solidFill>
                 <a:latin typeface="Arial"/>
               </a:rPr>
-              <a:t>Adding a rule type means adding one class. The engine and the Rule interface never change.</a:t>
-            </a:r>
-          </a:p>
-        </p:txBody>
-      </p:sp>
-      <p:sp>
-        <p:nvSpPr>
-          <p:cNvPr id="6" name="TextBox 5"/>
-          <p:cNvSpPr txBox="1"/>
-          <p:nvPr/>
-        </p:nvSpPr>
-        <p:spPr>
-          <a:xfrm>
-            <a:off x="548640" y="1755648"/>
-            <a:ext cx="5394960" cy="237744"/>
-          </a:xfrm>
-          <a:prstGeom prst="rect">
-            <a:avLst/>
-          </a:prstGeom>
-          <a:noFill/>
-        </p:spPr>
-        <p:txBody>
-          <a:bodyPr wrap="square" lIns="0" rIns="0" tIns="0" bIns="0">
-            <a:spAutoFit/>
-          </a:bodyPr>
-          <a:lstStyle/>
-          <a:p>
-            <a:pPr algn="l">
-              <a:spcBef>
-                <a:spcPts val="0"/>
-              </a:spcBef>
-              <a:spcAft>
-                <a:spcPts val="0"/>
-              </a:spcAft>
-            </a:pPr>
-            <a:r>
-              <a:rPr sz="1500" b="1">
-                <a:solidFill>
-                  <a:srgbClr val="730014"/>
-                </a:solidFill>
-                <a:latin typeface="Arial"/>
-              </a:rPr>
-              <a:t>The rule set</a:t>
-            </a:r>
-          </a:p>
-        </p:txBody>
-      </p:sp>
-      <p:sp>
-        <p:nvSpPr>
-          <p:cNvPr id="7" name="Rounded Rectangle 6"/>
+              <a:t>k6 from a Windows client against the Linux app VM — JVM and MySQL sharing roughly 2 vCPU and 3.7 GiB.</a:t>
+            </a:r>
+          </a:p>
+        </p:txBody>
+      </p:sp>
+      <p:sp>
+        <p:nvSpPr>
+          <p:cNvPr id="6" name="Rounded Rectangle 5"/>
           <p:cNvSpPr/>
           <p:nvPr/>
         </p:nvSpPr>
         <p:spPr>
           <a:xfrm>
-            <a:off x="548640" y="2121408"/>
-            <a:ext cx="2606040" cy="1060704"/>
+            <a:off x="548640" y="1700784"/>
+            <a:ext cx="3539642" cy="1298448"/>
           </a:xfrm>
           <a:prstGeom prst="roundRect">
             <a:avLst>
-              <a:gd name="adj" fmla="val 5172"/>
+              <a:gd name="adj" fmla="val 4225"/>
             </a:avLst>
           </a:prstGeom>
           <a:solidFill>
@@ -11643,14 +11601,58 @@
       </p:sp>
       <p:sp>
         <p:nvSpPr>
+          <p:cNvPr id="7" name="Rectangle 6"/>
+          <p:cNvSpPr/>
+          <p:nvPr/>
+        </p:nvSpPr>
+        <p:spPr>
+          <a:xfrm>
+            <a:off x="548640" y="1700784"/>
+            <a:ext cx="3539642" cy="45720"/>
+          </a:xfrm>
+          <a:prstGeom prst="rect">
+            <a:avLst/>
+          </a:prstGeom>
+          <a:solidFill>
+            <a:srgbClr val="1B7A3D"/>
+          </a:solidFill>
+          <a:ln>
+            <a:noFill/>
+          </a:ln>
+          <a:effectLst/>
+        </p:spPr>
+        <p:style>
+          <a:lnRef idx="1">
+            <a:schemeClr val="accent1"/>
+          </a:lnRef>
+          <a:fillRef idx="3">
+            <a:schemeClr val="accent1"/>
+          </a:fillRef>
+          <a:effectRef idx="2">
+            <a:schemeClr val="accent1"/>
+          </a:effectRef>
+          <a:fontRef idx="minor">
+            <a:schemeClr val="lt1"/>
+          </a:fontRef>
+        </p:style>
+        <p:txBody>
+          <a:bodyPr rtlCol="0" anchor="ctr"/>
+          <a:lstStyle/>
+          <a:p>
+            <a:pPr algn="ctr"/>
+          </a:p>
+        </p:txBody>
+      </p:sp>
+      <p:sp>
+        <p:nvSpPr>
           <p:cNvPr id="8" name="TextBox 7"/>
           <p:cNvSpPr txBox="1"/>
           <p:nvPr/>
         </p:nvSpPr>
         <p:spPr>
           <a:xfrm>
-            <a:off x="713232" y="2249424"/>
-            <a:ext cx="2276856" cy="219456"/>
+            <a:off x="768096" y="1865376"/>
+            <a:ext cx="3173882" cy="182880"/>
           </a:xfrm>
           <a:prstGeom prst="rect">
             <a:avLst/>
@@ -11672,13 +11674,13 @@
               </a:spcAft>
             </a:pPr>
             <a:r>
-              <a:rPr sz="1200" b="1">
-                <a:solidFill>
-                  <a:srgbClr val="14181D"/>
+              <a:rPr sz="850" b="1" spc="120">
+                <a:solidFill>
+                  <a:srgbClr val="7C8695"/>
                 </a:solidFill>
                 <a:latin typeface="Arial"/>
               </a:rPr>
-              <a:t>Amount Threshold</a:t>
+              <a:t>PASS 1  ·  WRITE RAMP</a:t>
             </a:r>
           </a:p>
         </p:txBody>
@@ -11691,8 +11693,8 @@
         </p:nvSpPr>
         <p:spPr>
           <a:xfrm>
-            <a:off x="713232" y="2496312"/>
-            <a:ext cx="2313432" cy="384048"/>
+            <a:off x="768096" y="2084831"/>
+            <a:ext cx="1371600" cy="457200"/>
           </a:xfrm>
           <a:prstGeom prst="rect">
             <a:avLst/>
@@ -11706,9 +11708,6 @@
           <a:lstStyle/>
           <a:p>
             <a:pPr algn="l">
-              <a:lnSpc>
-                <a:spcPct val="120000"/>
-              </a:lnSpc>
               <a:spcBef>
                 <a:spcPts val="0"/>
               </a:spcBef>
@@ -11717,13 +11716,13 @@
               </a:spcAft>
             </a:pPr>
             <a:r>
-              <a:rPr sz="950" b="0">
-                <a:solidFill>
-                  <a:srgbClr val="7C8695"/>
+              <a:rPr sz="3000" b="1">
+                <a:solidFill>
+                  <a:srgbClr val="14181D"/>
                 </a:solidFill>
                 <a:latin typeface="Arial"/>
               </a:rPr>
-              <a:t>Single transaction above a ceiling</a:t>
+              <a:t>234</a:t>
             </a:r>
           </a:p>
         </p:txBody>
@@ -11736,8 +11735,8 @@
         </p:nvSpPr>
         <p:spPr>
           <a:xfrm>
-            <a:off x="713232" y="2898648"/>
-            <a:ext cx="1463040" cy="201168"/>
+            <a:off x="1783080" y="2286000"/>
+            <a:ext cx="1463040" cy="219456"/>
           </a:xfrm>
           <a:prstGeom prst="rect">
             <a:avLst/>
@@ -11759,13 +11758,13 @@
               </a:spcAft>
             </a:pPr>
             <a:r>
-              <a:rPr sz="1050" b="1">
-                <a:solidFill>
-                  <a:srgbClr val="C41E3A"/>
+              <a:rPr sz="1050" b="0">
+                <a:solidFill>
+                  <a:srgbClr val="7C8695"/>
                 </a:solidFill>
                 <a:latin typeface="Arial"/>
               </a:rPr>
-              <a:t>&gt; 10,000</a:t>
+              <a:t>requests/sec</a:t>
             </a:r>
           </a:p>
         </p:txBody>
@@ -11778,8 +11777,8 @@
         </p:nvSpPr>
         <p:spPr>
           <a:xfrm>
-            <a:off x="2194560" y="2898648"/>
-            <a:ext cx="795528" cy="201168"/>
+            <a:off x="768096" y="2651760"/>
+            <a:ext cx="3173882" cy="219456"/>
           </a:xfrm>
           <a:prstGeom prst="rect">
             <a:avLst/>
@@ -11792,7 +11791,7 @@
           </a:bodyPr>
           <a:lstStyle/>
           <a:p>
-            <a:pPr algn="r">
+            <a:pPr algn="l">
               <a:spcBef>
                 <a:spcPts val="0"/>
               </a:spcBef>
@@ -11801,13 +11800,13 @@
               </a:spcAft>
             </a:pPr>
             <a:r>
-              <a:rPr sz="850" b="1">
-                <a:solidFill>
-                  <a:srgbClr val="7C8695"/>
+              <a:rPr sz="950" b="0">
+                <a:solidFill>
+                  <a:srgbClr val="39414C"/>
                 </a:solidFill>
                 <a:latin typeface="Arial"/>
               </a:rPr>
-              <a:t>MEDIUM</a:t>
+              <a:t>200 VUs  ·  p95 763 ms  ·  0% failed</a:t>
             </a:r>
           </a:p>
         </p:txBody>
@@ -11820,12 +11819,12 @@
         </p:nvSpPr>
         <p:spPr>
           <a:xfrm>
-            <a:off x="3383280" y="2121408"/>
-            <a:ext cx="2606040" cy="1060704"/>
+            <a:off x="4326026" y="1700784"/>
+            <a:ext cx="3539642" cy="1298448"/>
           </a:xfrm>
           <a:prstGeom prst="roundRect">
             <a:avLst>
-              <a:gd name="adj" fmla="val 5172"/>
+              <a:gd name="adj" fmla="val 4225"/>
             </a:avLst>
           </a:prstGeom>
           <a:solidFill>
@@ -11862,14 +11861,58 @@
       </p:sp>
       <p:sp>
         <p:nvSpPr>
-          <p:cNvPr id="13" name="TextBox 12"/>
+          <p:cNvPr id="13" name="Rectangle 12"/>
+          <p:cNvSpPr/>
+          <p:nvPr/>
+        </p:nvSpPr>
+        <p:spPr>
+          <a:xfrm>
+            <a:off x="4326026" y="1700784"/>
+            <a:ext cx="3539642" cy="45720"/>
+          </a:xfrm>
+          <a:prstGeom prst="rect">
+            <a:avLst/>
+          </a:prstGeom>
+          <a:solidFill>
+            <a:srgbClr val="1B7A3D"/>
+          </a:solidFill>
+          <a:ln>
+            <a:noFill/>
+          </a:ln>
+          <a:effectLst/>
+        </p:spPr>
+        <p:style>
+          <a:lnRef idx="1">
+            <a:schemeClr val="accent1"/>
+          </a:lnRef>
+          <a:fillRef idx="3">
+            <a:schemeClr val="accent1"/>
+          </a:fillRef>
+          <a:effectRef idx="2">
+            <a:schemeClr val="accent1"/>
+          </a:effectRef>
+          <a:fontRef idx="minor">
+            <a:schemeClr val="lt1"/>
+          </a:fontRef>
+        </p:style>
+        <p:txBody>
+          <a:bodyPr rtlCol="0" anchor="ctr"/>
+          <a:lstStyle/>
+          <a:p>
+            <a:pPr algn="ctr"/>
+          </a:p>
+        </p:txBody>
+      </p:sp>
+      <p:sp>
+        <p:nvSpPr>
+          <p:cNvPr id="14" name="TextBox 13"/>
           <p:cNvSpPr txBox="1"/>
           <p:nvPr/>
         </p:nvSpPr>
         <p:spPr>
           <a:xfrm>
-            <a:off x="3547872" y="2249424"/>
-            <a:ext cx="2276856" cy="219456"/>
+            <a:off x="4545482" y="1865376"/>
+            <a:ext cx="3173882" cy="182880"/>
           </a:xfrm>
           <a:prstGeom prst="rect">
             <a:avLst/>
@@ -11891,27 +11934,27 @@
               </a:spcAft>
             </a:pPr>
             <a:r>
-              <a:rPr sz="1200" b="1">
-                <a:solidFill>
-                  <a:srgbClr val="14181D"/>
+              <a:rPr sz="850" b="1" spc="120">
+                <a:solidFill>
+                  <a:srgbClr val="7C8695"/>
                 </a:solidFill>
                 <a:latin typeface="Arial"/>
               </a:rPr>
-              <a:t>Velocity</a:t>
-            </a:r>
-          </a:p>
-        </p:txBody>
-      </p:sp>
-      <p:sp>
-        <p:nvSpPr>
-          <p:cNvPr id="14" name="TextBox 13"/>
+              <a:t>PASS 2  ·  MIXED 80/20</a:t>
+            </a:r>
+          </a:p>
+        </p:txBody>
+      </p:sp>
+      <p:sp>
+        <p:nvSpPr>
+          <p:cNvPr id="15" name="TextBox 14"/>
           <p:cNvSpPr txBox="1"/>
           <p:nvPr/>
         </p:nvSpPr>
         <p:spPr>
           <a:xfrm>
-            <a:off x="3547872" y="2496312"/>
-            <a:ext cx="2313432" cy="384048"/>
+            <a:off x="4545482" y="2084831"/>
+            <a:ext cx="1371600" cy="457200"/>
           </a:xfrm>
           <a:prstGeom prst="rect">
             <a:avLst/>
@@ -11925,9 +11968,6 @@
           <a:lstStyle/>
           <a:p>
             <a:pPr algn="l">
-              <a:lnSpc>
-                <a:spcPct val="120000"/>
-              </a:lnSpc>
               <a:spcBef>
                 <a:spcPts val="0"/>
               </a:spcBef>
@@ -11936,27 +11976,27 @@
               </a:spcAft>
             </a:pPr>
             <a:r>
-              <a:rPr sz="950" b="0">
-                <a:solidFill>
-                  <a:srgbClr val="7C8695"/>
+              <a:rPr sz="3000" b="1">
+                <a:solidFill>
+                  <a:srgbClr val="14181D"/>
                 </a:solidFill>
                 <a:latin typeface="Arial"/>
               </a:rPr>
-              <a:t>Too many transactions in a rolling window</a:t>
-            </a:r>
-          </a:p>
-        </p:txBody>
-      </p:sp>
-      <p:sp>
-        <p:nvSpPr>
-          <p:cNvPr id="15" name="TextBox 14"/>
+              <a:t>242</a:t>
+            </a:r>
+          </a:p>
+        </p:txBody>
+      </p:sp>
+      <p:sp>
+        <p:nvSpPr>
+          <p:cNvPr id="16" name="TextBox 15"/>
           <p:cNvSpPr txBox="1"/>
           <p:nvPr/>
         </p:nvSpPr>
         <p:spPr>
           <a:xfrm>
-            <a:off x="3547872" y="2898648"/>
-            <a:ext cx="1463040" cy="201168"/>
+            <a:off x="5560466" y="2286000"/>
+            <a:ext cx="1463040" cy="219456"/>
           </a:xfrm>
           <a:prstGeom prst="rect">
             <a:avLst/>
@@ -11978,27 +12018,27 @@
               </a:spcAft>
             </a:pPr>
             <a:r>
-              <a:rPr sz="1050" b="1">
-                <a:solidFill>
-                  <a:srgbClr val="C41E3A"/>
+              <a:rPr sz="1050" b="0">
+                <a:solidFill>
+                  <a:srgbClr val="7C8695"/>
                 </a:solidFill>
                 <a:latin typeface="Arial"/>
               </a:rPr>
-              <a:t>&gt; 5 in 10 min</a:t>
-            </a:r>
-          </a:p>
-        </p:txBody>
-      </p:sp>
-      <p:sp>
-        <p:nvSpPr>
-          <p:cNvPr id="16" name="TextBox 15"/>
+              <a:t>requests/sec</a:t>
+            </a:r>
+          </a:p>
+        </p:txBody>
+      </p:sp>
+      <p:sp>
+        <p:nvSpPr>
+          <p:cNvPr id="17" name="TextBox 16"/>
           <p:cNvSpPr txBox="1"/>
           <p:nvPr/>
         </p:nvSpPr>
         <p:spPr>
           <a:xfrm>
-            <a:off x="5029200" y="2898648"/>
-            <a:ext cx="795528" cy="201168"/>
+            <a:off x="4545482" y="2651760"/>
+            <a:ext cx="3173882" cy="219456"/>
           </a:xfrm>
           <a:prstGeom prst="rect">
             <a:avLst/>
@@ -12011,7 +12051,7 @@
           </a:bodyPr>
           <a:lstStyle/>
           <a:p>
-            <a:pPr algn="r">
+            <a:pPr algn="l">
               <a:spcBef>
                 <a:spcPts val="0"/>
               </a:spcBef>
@@ -12020,31 +12060,31 @@
               </a:spcAft>
             </a:pPr>
             <a:r>
-              <a:rPr sz="850" b="1">
-                <a:solidFill>
-                  <a:srgbClr val="7C8695"/>
+              <a:rPr sz="950" b="0">
+                <a:solidFill>
+                  <a:srgbClr val="39414C"/>
                 </a:solidFill>
                 <a:latin typeface="Arial"/>
               </a:rPr>
-              <a:t>LOW</a:t>
-            </a:r>
-          </a:p>
-        </p:txBody>
-      </p:sp>
-      <p:sp>
-        <p:nvSpPr>
-          <p:cNvPr id="17" name="Rounded Rectangle 16"/>
+              <a:t>150 VUs  ·  p95 623 ms  ·  0% failed</a:t>
+            </a:r>
+          </a:p>
+        </p:txBody>
+      </p:sp>
+      <p:sp>
+        <p:nvSpPr>
+          <p:cNvPr id="18" name="Rounded Rectangle 17"/>
           <p:cNvSpPr/>
           <p:nvPr/>
         </p:nvSpPr>
         <p:spPr>
           <a:xfrm>
-            <a:off x="548640" y="3310128"/>
-            <a:ext cx="2606040" cy="1060704"/>
+            <a:off x="8103412" y="1700784"/>
+            <a:ext cx="3539642" cy="1298448"/>
           </a:xfrm>
           <a:prstGeom prst="roundRect">
             <a:avLst>
-              <a:gd name="adj" fmla="val 5172"/>
+              <a:gd name="adj" fmla="val 4225"/>
             </a:avLst>
           </a:prstGeom>
           <a:solidFill>
@@ -12081,14 +12121,58 @@
       </p:sp>
       <p:sp>
         <p:nvSpPr>
-          <p:cNvPr id="18" name="TextBox 17"/>
+          <p:cNvPr id="19" name="Rectangle 18"/>
+          <p:cNvSpPr/>
+          <p:nvPr/>
+        </p:nvSpPr>
+        <p:spPr>
+          <a:xfrm>
+            <a:off x="8103412" y="1700784"/>
+            <a:ext cx="3539642" cy="45720"/>
+          </a:xfrm>
+          <a:prstGeom prst="rect">
+            <a:avLst/>
+          </a:prstGeom>
+          <a:solidFill>
+            <a:srgbClr val="B0590A"/>
+          </a:solidFill>
+          <a:ln>
+            <a:noFill/>
+          </a:ln>
+          <a:effectLst/>
+        </p:spPr>
+        <p:style>
+          <a:lnRef idx="1">
+            <a:schemeClr val="accent1"/>
+          </a:lnRef>
+          <a:fillRef idx="3">
+            <a:schemeClr val="accent1"/>
+          </a:fillRef>
+          <a:effectRef idx="2">
+            <a:schemeClr val="accent1"/>
+          </a:effectRef>
+          <a:fontRef idx="minor">
+            <a:schemeClr val="lt1"/>
+          </a:fontRef>
+        </p:style>
+        <p:txBody>
+          <a:bodyPr rtlCol="0" anchor="ctr"/>
+          <a:lstStyle/>
+          <a:p>
+            <a:pPr algn="ctr"/>
+          </a:p>
+        </p:txBody>
+      </p:sp>
+      <p:sp>
+        <p:nvSpPr>
+          <p:cNvPr id="20" name="TextBox 19"/>
           <p:cNvSpPr txBox="1"/>
           <p:nvPr/>
         </p:nvSpPr>
         <p:spPr>
           <a:xfrm>
-            <a:off x="713232" y="3438144"/>
-            <a:ext cx="2276856" cy="219456"/>
+            <a:off x="8322868" y="1865376"/>
+            <a:ext cx="3173882" cy="182880"/>
           </a:xfrm>
           <a:prstGeom prst="rect">
             <a:avLst/>
@@ -12110,27 +12194,27 @@
               </a:spcAft>
             </a:pPr>
             <a:r>
-              <a:rPr sz="1200" b="1">
-                <a:solidFill>
-                  <a:srgbClr val="14181D"/>
+              <a:rPr sz="850" b="1" spc="120">
+                <a:solidFill>
+                  <a:srgbClr val="7C8695"/>
                 </a:solidFill>
                 <a:latin typeface="Arial"/>
               </a:rPr>
-              <a:t>New Payee</a:t>
-            </a:r>
-          </a:p>
-        </p:txBody>
-      </p:sp>
-      <p:sp>
-        <p:nvSpPr>
-          <p:cNvPr id="19" name="TextBox 18"/>
+              <a:t>PASS 3  ·  10-MINUTE SOAK</a:t>
+            </a:r>
+          </a:p>
+        </p:txBody>
+      </p:sp>
+      <p:sp>
+        <p:nvSpPr>
+          <p:cNvPr id="21" name="TextBox 20"/>
           <p:cNvSpPr txBox="1"/>
           <p:nvPr/>
         </p:nvSpPr>
         <p:spPr>
           <a:xfrm>
-            <a:off x="713232" y="3685032"/>
-            <a:ext cx="2313432" cy="384048"/>
+            <a:off x="8322868" y="2084831"/>
+            <a:ext cx="1371600" cy="457200"/>
           </a:xfrm>
           <a:prstGeom prst="rect">
             <a:avLst/>
@@ -12144,9 +12228,6 @@
           <a:lstStyle/>
           <a:p>
             <a:pPr algn="l">
-              <a:lnSpc>
-                <a:spcPct val="120000"/>
-              </a:lnSpc>
               <a:spcBef>
                 <a:spcPts val="0"/>
               </a:spcBef>
@@ -12155,27 +12236,27 @@
               </a:spcAft>
             </a:pPr>
             <a:r>
-              <a:rPr sz="950" b="0">
-                <a:solidFill>
-                  <a:srgbClr val="7C8695"/>
+              <a:rPr sz="3000" b="1">
+                <a:solidFill>
+                  <a:srgbClr val="14181D"/>
                 </a:solidFill>
                 <a:latin typeface="Arial"/>
               </a:rPr>
-              <a:t>First time this account pays this payee</a:t>
-            </a:r>
-          </a:p>
-        </p:txBody>
-      </p:sp>
-      <p:sp>
-        <p:nvSpPr>
-          <p:cNvPr id="20" name="TextBox 19"/>
+              <a:t>214</a:t>
+            </a:r>
+          </a:p>
+        </p:txBody>
+      </p:sp>
+      <p:sp>
+        <p:nvSpPr>
+          <p:cNvPr id="22" name="TextBox 21"/>
           <p:cNvSpPr txBox="1"/>
           <p:nvPr/>
         </p:nvSpPr>
         <p:spPr>
           <a:xfrm>
-            <a:off x="713232" y="4087368"/>
-            <a:ext cx="1463040" cy="201168"/>
+            <a:off x="9337852" y="2286000"/>
+            <a:ext cx="1463040" cy="219456"/>
           </a:xfrm>
           <a:prstGeom prst="rect">
             <a:avLst/>
@@ -12197,27 +12278,27 @@
               </a:spcAft>
             </a:pPr>
             <a:r>
-              <a:rPr sz="1050" b="1">
-                <a:solidFill>
-                  <a:srgbClr val="C41E3A"/>
+              <a:rPr sz="1050" b="0">
+                <a:solidFill>
+                  <a:srgbClr val="7C8695"/>
                 </a:solidFill>
                 <a:latin typeface="Arial"/>
               </a:rPr>
-              <a:t>0 prior rows</a:t>
-            </a:r>
-          </a:p>
-        </p:txBody>
-      </p:sp>
-      <p:sp>
-        <p:nvSpPr>
-          <p:cNvPr id="21" name="TextBox 20"/>
+              <a:t>requests/sec</a:t>
+            </a:r>
+          </a:p>
+        </p:txBody>
+      </p:sp>
+      <p:sp>
+        <p:nvSpPr>
+          <p:cNvPr id="23" name="TextBox 22"/>
           <p:cNvSpPr txBox="1"/>
           <p:nvPr/>
         </p:nvSpPr>
         <p:spPr>
           <a:xfrm>
-            <a:off x="2194560" y="4087368"/>
-            <a:ext cx="795528" cy="201168"/>
+            <a:off x="8322868" y="2651760"/>
+            <a:ext cx="3173882" cy="219456"/>
           </a:xfrm>
           <a:prstGeom prst="rect">
             <a:avLst/>
@@ -12230,7 +12311,7 @@
           </a:bodyPr>
           <a:lstStyle/>
           <a:p>
-            <a:pPr algn="r">
+            <a:pPr algn="l">
               <a:spcBef>
                 <a:spcPts val="0"/>
               </a:spcBef>
@@ -12239,31 +12320,1144 @@
               </a:spcAft>
             </a:pPr>
             <a:r>
-              <a:rPr sz="850" b="1">
-                <a:solidFill>
-                  <a:srgbClr val="7C8695"/>
+              <a:rPr sz="950" b="0">
+                <a:solidFill>
+                  <a:srgbClr val="39414C"/>
                 </a:solidFill>
                 <a:latin typeface="Arial"/>
               </a:rPr>
-              <a:t>LOW</a:t>
-            </a:r>
-          </a:p>
-        </p:txBody>
-      </p:sp>
-      <p:sp>
-        <p:nvSpPr>
-          <p:cNvPr id="22" name="Rounded Rectangle 21"/>
+              <a:t>140 VUs  ·  p95 1.13 s  ·  0.09% failed</a:t>
+            </a:r>
+          </a:p>
+        </p:txBody>
+      </p:sp>
+      <p:sp>
+        <p:nvSpPr>
+          <p:cNvPr id="24" name="TextBox 23"/>
+          <p:cNvSpPr txBox="1"/>
+          <p:nvPr/>
+        </p:nvSpPr>
+        <p:spPr>
+          <a:xfrm>
+            <a:off x="548640" y="3218688"/>
+            <a:ext cx="4023360" cy="201168"/>
+          </a:xfrm>
+          <a:prstGeom prst="rect">
+            <a:avLst/>
+          </a:prstGeom>
+          <a:noFill/>
+        </p:spPr>
+        <p:txBody>
+          <a:bodyPr wrap="square" lIns="0" rIns="0" tIns="0" bIns="0">
+            <a:spAutoFit/>
+          </a:bodyPr>
+          <a:lstStyle/>
+          <a:p>
+            <a:pPr algn="l">
+              <a:spcBef>
+                <a:spcPts val="0"/>
+              </a:spcBef>
+              <a:spcAft>
+                <a:spcPts val="0"/>
+              </a:spcAft>
+            </a:pPr>
+            <a:r>
+              <a:rPr sz="900" b="1" spc="130">
+                <a:solidFill>
+                  <a:srgbClr val="C41E3A"/>
+                </a:solidFill>
+                <a:latin typeface="Arial"/>
+              </a:rPr>
+              <a:t>p95 LATENCY BY PASS  (ms)</a:t>
+            </a:r>
+          </a:p>
+        </p:txBody>
+      </p:sp>
+      <p:sp>
+        <p:nvSpPr>
+          <p:cNvPr id="25" name="Rectangle 24"/>
           <p:cNvSpPr/>
           <p:nvPr/>
         </p:nvSpPr>
         <p:spPr>
           <a:xfrm>
-            <a:off x="3383280" y="3310128"/>
-            <a:ext cx="2606040" cy="1060704"/>
+            <a:off x="640080" y="4197050"/>
+            <a:ext cx="868680" cy="941877"/>
+          </a:xfrm>
+          <a:prstGeom prst="rect">
+            <a:avLst/>
+          </a:prstGeom>
+          <a:solidFill>
+            <a:srgbClr val="730014"/>
+          </a:solidFill>
+          <a:ln>
+            <a:noFill/>
+          </a:ln>
+          <a:effectLst/>
+        </p:spPr>
+        <p:style>
+          <a:lnRef idx="1">
+            <a:schemeClr val="accent1"/>
+          </a:lnRef>
+          <a:fillRef idx="3">
+            <a:schemeClr val="accent1"/>
+          </a:fillRef>
+          <a:effectRef idx="2">
+            <a:schemeClr val="accent1"/>
+          </a:effectRef>
+          <a:fontRef idx="minor">
+            <a:schemeClr val="lt1"/>
+          </a:fontRef>
+        </p:style>
+        <p:txBody>
+          <a:bodyPr rtlCol="0" anchor="ctr"/>
+          <a:lstStyle/>
+          <a:p>
+            <a:pPr algn="ctr"/>
+          </a:p>
+        </p:txBody>
+      </p:sp>
+      <p:sp>
+        <p:nvSpPr>
+          <p:cNvPr id="26" name="TextBox 25"/>
+          <p:cNvSpPr txBox="1"/>
+          <p:nvPr/>
+        </p:nvSpPr>
+        <p:spPr>
+          <a:xfrm>
+            <a:off x="457199" y="3959306"/>
+            <a:ext cx="1234440" cy="201168"/>
+          </a:xfrm>
+          <a:prstGeom prst="rect">
+            <a:avLst/>
+          </a:prstGeom>
+          <a:noFill/>
+        </p:spPr>
+        <p:txBody>
+          <a:bodyPr wrap="square" lIns="0" rIns="0" tIns="0" bIns="0">
+            <a:spAutoFit/>
+          </a:bodyPr>
+          <a:lstStyle/>
+          <a:p>
+            <a:pPr algn="ctr">
+              <a:spcBef>
+                <a:spcPts val="0"/>
+              </a:spcBef>
+              <a:spcAft>
+                <a:spcPts val="0"/>
+              </a:spcAft>
+            </a:pPr>
+            <a:r>
+              <a:rPr sz="1000" b="1">
+                <a:solidFill>
+                  <a:srgbClr val="14181D"/>
+                </a:solidFill>
+                <a:latin typeface="Arial"/>
+              </a:rPr>
+              <a:t>763</a:t>
+            </a:r>
+          </a:p>
+        </p:txBody>
+      </p:sp>
+      <p:sp>
+        <p:nvSpPr>
+          <p:cNvPr id="27" name="TextBox 26"/>
+          <p:cNvSpPr txBox="1"/>
+          <p:nvPr/>
+        </p:nvSpPr>
+        <p:spPr>
+          <a:xfrm>
+            <a:off x="457199" y="5202936"/>
+            <a:ext cx="1234440" cy="182880"/>
+          </a:xfrm>
+          <a:prstGeom prst="rect">
+            <a:avLst/>
+          </a:prstGeom>
+          <a:noFill/>
+        </p:spPr>
+        <p:txBody>
+          <a:bodyPr wrap="square" lIns="0" rIns="0" tIns="0" bIns="0">
+            <a:spAutoFit/>
+          </a:bodyPr>
+          <a:lstStyle/>
+          <a:p>
+            <a:pPr algn="ctr">
+              <a:spcBef>
+                <a:spcPts val="0"/>
+              </a:spcBef>
+              <a:spcAft>
+                <a:spcPts val="0"/>
+              </a:spcAft>
+            </a:pPr>
+            <a:r>
+              <a:rPr sz="900" b="0">
+                <a:solidFill>
+                  <a:srgbClr val="7C8695"/>
+                </a:solidFill>
+                <a:latin typeface="Arial"/>
+              </a:rPr>
+              <a:t>Pass 1</a:t>
+            </a:r>
+          </a:p>
+        </p:txBody>
+      </p:sp>
+      <p:sp>
+        <p:nvSpPr>
+          <p:cNvPr id="28" name="Rectangle 27"/>
+          <p:cNvSpPr/>
+          <p:nvPr/>
+        </p:nvSpPr>
+        <p:spPr>
+          <a:xfrm>
+            <a:off x="1938528" y="4369871"/>
+            <a:ext cx="868680" cy="769056"/>
+          </a:xfrm>
+          <a:prstGeom prst="rect">
+            <a:avLst/>
+          </a:prstGeom>
+          <a:solidFill>
+            <a:srgbClr val="730014"/>
+          </a:solidFill>
+          <a:ln>
+            <a:noFill/>
+          </a:ln>
+          <a:effectLst/>
+        </p:spPr>
+        <p:style>
+          <a:lnRef idx="1">
+            <a:schemeClr val="accent1"/>
+          </a:lnRef>
+          <a:fillRef idx="3">
+            <a:schemeClr val="accent1"/>
+          </a:fillRef>
+          <a:effectRef idx="2">
+            <a:schemeClr val="accent1"/>
+          </a:effectRef>
+          <a:fontRef idx="minor">
+            <a:schemeClr val="lt1"/>
+          </a:fontRef>
+        </p:style>
+        <p:txBody>
+          <a:bodyPr rtlCol="0" anchor="ctr"/>
+          <a:lstStyle/>
+          <a:p>
+            <a:pPr algn="ctr"/>
+          </a:p>
+        </p:txBody>
+      </p:sp>
+      <p:sp>
+        <p:nvSpPr>
+          <p:cNvPr id="29" name="TextBox 28"/>
+          <p:cNvSpPr txBox="1"/>
+          <p:nvPr/>
+        </p:nvSpPr>
+        <p:spPr>
+          <a:xfrm>
+            <a:off x="1755648" y="4132127"/>
+            <a:ext cx="1234440" cy="201168"/>
+          </a:xfrm>
+          <a:prstGeom prst="rect">
+            <a:avLst/>
+          </a:prstGeom>
+          <a:noFill/>
+        </p:spPr>
+        <p:txBody>
+          <a:bodyPr wrap="square" lIns="0" rIns="0" tIns="0" bIns="0">
+            <a:spAutoFit/>
+          </a:bodyPr>
+          <a:lstStyle/>
+          <a:p>
+            <a:pPr algn="ctr">
+              <a:spcBef>
+                <a:spcPts val="0"/>
+              </a:spcBef>
+              <a:spcAft>
+                <a:spcPts val="0"/>
+              </a:spcAft>
+            </a:pPr>
+            <a:r>
+              <a:rPr sz="1000" b="1">
+                <a:solidFill>
+                  <a:srgbClr val="14181D"/>
+                </a:solidFill>
+                <a:latin typeface="Arial"/>
+              </a:rPr>
+              <a:t>623</a:t>
+            </a:r>
+          </a:p>
+        </p:txBody>
+      </p:sp>
+      <p:sp>
+        <p:nvSpPr>
+          <p:cNvPr id="30" name="TextBox 29"/>
+          <p:cNvSpPr txBox="1"/>
+          <p:nvPr/>
+        </p:nvSpPr>
+        <p:spPr>
+          <a:xfrm>
+            <a:off x="1755648" y="5202936"/>
+            <a:ext cx="1234440" cy="182880"/>
+          </a:xfrm>
+          <a:prstGeom prst="rect">
+            <a:avLst/>
+          </a:prstGeom>
+          <a:noFill/>
+        </p:spPr>
+        <p:txBody>
+          <a:bodyPr wrap="square" lIns="0" rIns="0" tIns="0" bIns="0">
+            <a:spAutoFit/>
+          </a:bodyPr>
+          <a:lstStyle/>
+          <a:p>
+            <a:pPr algn="ctr">
+              <a:spcBef>
+                <a:spcPts val="0"/>
+              </a:spcBef>
+              <a:spcAft>
+                <a:spcPts val="0"/>
+              </a:spcAft>
+            </a:pPr>
+            <a:r>
+              <a:rPr sz="900" b="0">
+                <a:solidFill>
+                  <a:srgbClr val="7C8695"/>
+                </a:solidFill>
+                <a:latin typeface="Arial"/>
+              </a:rPr>
+              <a:t>Pass 2</a:t>
+            </a:r>
+          </a:p>
+        </p:txBody>
+      </p:sp>
+      <p:sp>
+        <p:nvSpPr>
+          <p:cNvPr id="31" name="Rectangle 30"/>
+          <p:cNvSpPr/>
+          <p:nvPr/>
+        </p:nvSpPr>
+        <p:spPr>
+          <a:xfrm>
+            <a:off x="3236976" y="3744010"/>
+            <a:ext cx="868680" cy="1394917"/>
+          </a:xfrm>
+          <a:prstGeom prst="rect">
+            <a:avLst/>
+          </a:prstGeom>
+          <a:solidFill>
+            <a:srgbClr val="B0590A"/>
+          </a:solidFill>
+          <a:ln>
+            <a:noFill/>
+          </a:ln>
+          <a:effectLst/>
+        </p:spPr>
+        <p:style>
+          <a:lnRef idx="1">
+            <a:schemeClr val="accent1"/>
+          </a:lnRef>
+          <a:fillRef idx="3">
+            <a:schemeClr val="accent1"/>
+          </a:fillRef>
+          <a:effectRef idx="2">
+            <a:schemeClr val="accent1"/>
+          </a:effectRef>
+          <a:fontRef idx="minor">
+            <a:schemeClr val="lt1"/>
+          </a:fontRef>
+        </p:style>
+        <p:txBody>
+          <a:bodyPr rtlCol="0" anchor="ctr"/>
+          <a:lstStyle/>
+          <a:p>
+            <a:pPr algn="ctr"/>
+          </a:p>
+        </p:txBody>
+      </p:sp>
+      <p:sp>
+        <p:nvSpPr>
+          <p:cNvPr id="32" name="TextBox 31"/>
+          <p:cNvSpPr txBox="1"/>
+          <p:nvPr/>
+        </p:nvSpPr>
+        <p:spPr>
+          <a:xfrm>
+            <a:off x="3054096" y="3506266"/>
+            <a:ext cx="1234440" cy="201168"/>
+          </a:xfrm>
+          <a:prstGeom prst="rect">
+            <a:avLst/>
+          </a:prstGeom>
+          <a:noFill/>
+        </p:spPr>
+        <p:txBody>
+          <a:bodyPr wrap="square" lIns="0" rIns="0" tIns="0" bIns="0">
+            <a:spAutoFit/>
+          </a:bodyPr>
+          <a:lstStyle/>
+          <a:p>
+            <a:pPr algn="ctr">
+              <a:spcBef>
+                <a:spcPts val="0"/>
+              </a:spcBef>
+              <a:spcAft>
+                <a:spcPts val="0"/>
+              </a:spcAft>
+            </a:pPr>
+            <a:r>
+              <a:rPr sz="1000" b="1">
+                <a:solidFill>
+                  <a:srgbClr val="14181D"/>
+                </a:solidFill>
+                <a:latin typeface="Arial"/>
+              </a:rPr>
+              <a:t>1,130</a:t>
+            </a:r>
+          </a:p>
+        </p:txBody>
+      </p:sp>
+      <p:sp>
+        <p:nvSpPr>
+          <p:cNvPr id="33" name="TextBox 32"/>
+          <p:cNvSpPr txBox="1"/>
+          <p:nvPr/>
+        </p:nvSpPr>
+        <p:spPr>
+          <a:xfrm>
+            <a:off x="3054096" y="5202936"/>
+            <a:ext cx="1234440" cy="182880"/>
+          </a:xfrm>
+          <a:prstGeom prst="rect">
+            <a:avLst/>
+          </a:prstGeom>
+          <a:noFill/>
+        </p:spPr>
+        <p:txBody>
+          <a:bodyPr wrap="square" lIns="0" rIns="0" tIns="0" bIns="0">
+            <a:spAutoFit/>
+          </a:bodyPr>
+          <a:lstStyle/>
+          <a:p>
+            <a:pPr algn="ctr">
+              <a:spcBef>
+                <a:spcPts val="0"/>
+              </a:spcBef>
+              <a:spcAft>
+                <a:spcPts val="0"/>
+              </a:spcAft>
+            </a:pPr>
+            <a:r>
+              <a:rPr sz="900" b="0">
+                <a:solidFill>
+                  <a:srgbClr val="7C8695"/>
+                </a:solidFill>
+                <a:latin typeface="Arial"/>
+              </a:rPr>
+              <a:t>Pass 3</a:t>
+            </a:r>
+          </a:p>
+        </p:txBody>
+      </p:sp>
+      <p:sp>
+        <p:nvSpPr>
+          <p:cNvPr id="34" name="Rectangle 33"/>
+          <p:cNvSpPr/>
+          <p:nvPr/>
+        </p:nvSpPr>
+        <p:spPr>
+          <a:xfrm>
+            <a:off x="548640" y="5138928"/>
+            <a:ext cx="3977639" cy="10972"/>
+          </a:xfrm>
+          <a:prstGeom prst="rect">
+            <a:avLst/>
+          </a:prstGeom>
+          <a:solidFill>
+            <a:srgbClr val="D9DEE4"/>
+          </a:solidFill>
+          <a:ln>
+            <a:noFill/>
+          </a:ln>
+          <a:effectLst/>
+        </p:spPr>
+        <p:style>
+          <a:lnRef idx="1">
+            <a:schemeClr val="accent1"/>
+          </a:lnRef>
+          <a:fillRef idx="3">
+            <a:schemeClr val="accent1"/>
+          </a:fillRef>
+          <a:effectRef idx="2">
+            <a:schemeClr val="accent1"/>
+          </a:effectRef>
+          <a:fontRef idx="minor">
+            <a:schemeClr val="lt1"/>
+          </a:fontRef>
+        </p:style>
+        <p:txBody>
+          <a:bodyPr rtlCol="0" anchor="ctr"/>
+          <a:lstStyle/>
+          <a:p>
+            <a:pPr algn="ctr"/>
+          </a:p>
+        </p:txBody>
+      </p:sp>
+      <p:sp>
+        <p:nvSpPr>
+          <p:cNvPr id="35" name="TextBox 34"/>
+          <p:cNvSpPr txBox="1"/>
+          <p:nvPr/>
+        </p:nvSpPr>
+        <p:spPr>
+          <a:xfrm>
+            <a:off x="4800600" y="3218688"/>
+            <a:ext cx="3749039" cy="201168"/>
+          </a:xfrm>
+          <a:prstGeom prst="rect">
+            <a:avLst/>
+          </a:prstGeom>
+          <a:noFill/>
+        </p:spPr>
+        <p:txBody>
+          <a:bodyPr wrap="square" lIns="0" rIns="0" tIns="0" bIns="0">
+            <a:spAutoFit/>
+          </a:bodyPr>
+          <a:lstStyle/>
+          <a:p>
+            <a:pPr algn="l">
+              <a:spcBef>
+                <a:spcPts val="0"/>
+              </a:spcBef>
+              <a:spcAft>
+                <a:spcPts val="0"/>
+              </a:spcAft>
+            </a:pPr>
+            <a:r>
+              <a:rPr sz="900" b="1" spc="130">
+                <a:solidFill>
+                  <a:srgbClr val="C41E3A"/>
+                </a:solidFill>
+                <a:latin typeface="Arial"/>
+              </a:rPr>
+              <a:t>rule.evaluate MEAN  (ms)</a:t>
+            </a:r>
+          </a:p>
+        </p:txBody>
+      </p:sp>
+      <p:sp>
+        <p:nvSpPr>
+          <p:cNvPr id="36" name="Rectangle 35"/>
+          <p:cNvSpPr/>
+          <p:nvPr/>
+        </p:nvSpPr>
+        <p:spPr>
+          <a:xfrm>
+            <a:off x="4892040" y="4535815"/>
+            <a:ext cx="621792" cy="603112"/>
+          </a:xfrm>
+          <a:prstGeom prst="rect">
+            <a:avLst/>
+          </a:prstGeom>
+          <a:solidFill>
+            <a:srgbClr val="C41E3A"/>
+          </a:solidFill>
+          <a:ln>
+            <a:noFill/>
+          </a:ln>
+          <a:effectLst/>
+        </p:spPr>
+        <p:style>
+          <a:lnRef idx="1">
+            <a:schemeClr val="accent1"/>
+          </a:lnRef>
+          <a:fillRef idx="3">
+            <a:schemeClr val="accent1"/>
+          </a:fillRef>
+          <a:effectRef idx="2">
+            <a:schemeClr val="accent1"/>
+          </a:effectRef>
+          <a:fontRef idx="minor">
+            <a:schemeClr val="lt1"/>
+          </a:fontRef>
+        </p:style>
+        <p:txBody>
+          <a:bodyPr rtlCol="0" anchor="ctr"/>
+          <a:lstStyle/>
+          <a:p>
+            <a:pPr algn="ctr"/>
+          </a:p>
+        </p:txBody>
+      </p:sp>
+      <p:sp>
+        <p:nvSpPr>
+          <p:cNvPr id="37" name="TextBox 36"/>
+          <p:cNvSpPr txBox="1"/>
+          <p:nvPr/>
+        </p:nvSpPr>
+        <p:spPr>
+          <a:xfrm>
+            <a:off x="4745736" y="4298071"/>
+            <a:ext cx="914400" cy="201168"/>
+          </a:xfrm>
+          <a:prstGeom prst="rect">
+            <a:avLst/>
+          </a:prstGeom>
+          <a:noFill/>
+        </p:spPr>
+        <p:txBody>
+          <a:bodyPr wrap="square" lIns="0" rIns="0" tIns="0" bIns="0">
+            <a:spAutoFit/>
+          </a:bodyPr>
+          <a:lstStyle/>
+          <a:p>
+            <a:pPr algn="ctr">
+              <a:spcBef>
+                <a:spcPts val="0"/>
+              </a:spcBef>
+              <a:spcAft>
+                <a:spcPts val="0"/>
+              </a:spcAft>
+            </a:pPr>
+            <a:r>
+              <a:rPr sz="1000" b="1">
+                <a:solidFill>
+                  <a:srgbClr val="14181D"/>
+                </a:solidFill>
+                <a:latin typeface="Arial"/>
+              </a:rPr>
+              <a:t>57</a:t>
+            </a:r>
+          </a:p>
+        </p:txBody>
+      </p:sp>
+      <p:sp>
+        <p:nvSpPr>
+          <p:cNvPr id="38" name="TextBox 37"/>
+          <p:cNvSpPr txBox="1"/>
+          <p:nvPr/>
+        </p:nvSpPr>
+        <p:spPr>
+          <a:xfrm>
+            <a:off x="4745736" y="5202936"/>
+            <a:ext cx="914400" cy="182880"/>
+          </a:xfrm>
+          <a:prstGeom prst="rect">
+            <a:avLst/>
+          </a:prstGeom>
+          <a:noFill/>
+        </p:spPr>
+        <p:txBody>
+          <a:bodyPr wrap="square" lIns="0" rIns="0" tIns="0" bIns="0">
+            <a:spAutoFit/>
+          </a:bodyPr>
+          <a:lstStyle/>
+          <a:p>
+            <a:pPr algn="ctr">
+              <a:spcBef>
+                <a:spcPts val="0"/>
+              </a:spcBef>
+              <a:spcAft>
+                <a:spcPts val="0"/>
+              </a:spcAft>
+            </a:pPr>
+            <a:r>
+              <a:rPr sz="850" b="0">
+                <a:solidFill>
+                  <a:srgbClr val="7C8695"/>
+                </a:solidFill>
+                <a:latin typeface="Arial"/>
+              </a:rPr>
+              <a:t>after P1</a:t>
+            </a:r>
+          </a:p>
+        </p:txBody>
+      </p:sp>
+      <p:sp>
+        <p:nvSpPr>
+          <p:cNvPr id="39" name="Rectangle 38"/>
+          <p:cNvSpPr/>
+          <p:nvPr/>
+        </p:nvSpPr>
+        <p:spPr>
+          <a:xfrm>
+            <a:off x="5824727" y="4578139"/>
+            <a:ext cx="621792" cy="560788"/>
+          </a:xfrm>
+          <a:prstGeom prst="rect">
+            <a:avLst/>
+          </a:prstGeom>
+          <a:solidFill>
+            <a:srgbClr val="C41E3A"/>
+          </a:solidFill>
+          <a:ln>
+            <a:noFill/>
+          </a:ln>
+          <a:effectLst/>
+        </p:spPr>
+        <p:style>
+          <a:lnRef idx="1">
+            <a:schemeClr val="accent1"/>
+          </a:lnRef>
+          <a:fillRef idx="3">
+            <a:schemeClr val="accent1"/>
+          </a:fillRef>
+          <a:effectRef idx="2">
+            <a:schemeClr val="accent1"/>
+          </a:effectRef>
+          <a:fontRef idx="minor">
+            <a:schemeClr val="lt1"/>
+          </a:fontRef>
+        </p:style>
+        <p:txBody>
+          <a:bodyPr rtlCol="0" anchor="ctr"/>
+          <a:lstStyle/>
+          <a:p>
+            <a:pPr algn="ctr"/>
+          </a:p>
+        </p:txBody>
+      </p:sp>
+      <p:sp>
+        <p:nvSpPr>
+          <p:cNvPr id="40" name="TextBox 39"/>
+          <p:cNvSpPr txBox="1"/>
+          <p:nvPr/>
+        </p:nvSpPr>
+        <p:spPr>
+          <a:xfrm>
+            <a:off x="5678423" y="4340395"/>
+            <a:ext cx="914400" cy="201168"/>
+          </a:xfrm>
+          <a:prstGeom prst="rect">
+            <a:avLst/>
+          </a:prstGeom>
+          <a:noFill/>
+        </p:spPr>
+        <p:txBody>
+          <a:bodyPr wrap="square" lIns="0" rIns="0" tIns="0" bIns="0">
+            <a:spAutoFit/>
+          </a:bodyPr>
+          <a:lstStyle/>
+          <a:p>
+            <a:pPr algn="ctr">
+              <a:spcBef>
+                <a:spcPts val="0"/>
+              </a:spcBef>
+              <a:spcAft>
+                <a:spcPts val="0"/>
+              </a:spcAft>
+            </a:pPr>
+            <a:r>
+              <a:rPr sz="1000" b="1">
+                <a:solidFill>
+                  <a:srgbClr val="14181D"/>
+                </a:solidFill>
+                <a:latin typeface="Arial"/>
+              </a:rPr>
+              <a:t>53</a:t>
+            </a:r>
+          </a:p>
+        </p:txBody>
+      </p:sp>
+      <p:sp>
+        <p:nvSpPr>
+          <p:cNvPr id="41" name="TextBox 40"/>
+          <p:cNvSpPr txBox="1"/>
+          <p:nvPr/>
+        </p:nvSpPr>
+        <p:spPr>
+          <a:xfrm>
+            <a:off x="5678423" y="5202936"/>
+            <a:ext cx="914400" cy="182880"/>
+          </a:xfrm>
+          <a:prstGeom prst="rect">
+            <a:avLst/>
+          </a:prstGeom>
+          <a:noFill/>
+        </p:spPr>
+        <p:txBody>
+          <a:bodyPr wrap="square" lIns="0" rIns="0" tIns="0" bIns="0">
+            <a:spAutoFit/>
+          </a:bodyPr>
+          <a:lstStyle/>
+          <a:p>
+            <a:pPr algn="ctr">
+              <a:spcBef>
+                <a:spcPts val="0"/>
+              </a:spcBef>
+              <a:spcAft>
+                <a:spcPts val="0"/>
+              </a:spcAft>
+            </a:pPr>
+            <a:r>
+              <a:rPr sz="850" b="0">
+                <a:solidFill>
+                  <a:srgbClr val="7C8695"/>
+                </a:solidFill>
+                <a:latin typeface="Arial"/>
+              </a:rPr>
+              <a:t>after P2</a:t>
+            </a:r>
+          </a:p>
+        </p:txBody>
+      </p:sp>
+      <p:sp>
+        <p:nvSpPr>
+          <p:cNvPr id="42" name="Rectangle 41"/>
+          <p:cNvSpPr/>
+          <p:nvPr/>
+        </p:nvSpPr>
+        <p:spPr>
+          <a:xfrm>
+            <a:off x="6757416" y="4176064"/>
+            <a:ext cx="621792" cy="962863"/>
+          </a:xfrm>
+          <a:prstGeom prst="rect">
+            <a:avLst/>
+          </a:prstGeom>
+          <a:solidFill>
+            <a:srgbClr val="B0590A"/>
+          </a:solidFill>
+          <a:ln>
+            <a:noFill/>
+          </a:ln>
+          <a:effectLst/>
+        </p:spPr>
+        <p:style>
+          <a:lnRef idx="1">
+            <a:schemeClr val="accent1"/>
+          </a:lnRef>
+          <a:fillRef idx="3">
+            <a:schemeClr val="accent1"/>
+          </a:fillRef>
+          <a:effectRef idx="2">
+            <a:schemeClr val="accent1"/>
+          </a:effectRef>
+          <a:fontRef idx="minor">
+            <a:schemeClr val="lt1"/>
+          </a:fontRef>
+        </p:style>
+        <p:txBody>
+          <a:bodyPr rtlCol="0" anchor="ctr"/>
+          <a:lstStyle/>
+          <a:p>
+            <a:pPr algn="ctr"/>
+          </a:p>
+        </p:txBody>
+      </p:sp>
+      <p:sp>
+        <p:nvSpPr>
+          <p:cNvPr id="43" name="TextBox 42"/>
+          <p:cNvSpPr txBox="1"/>
+          <p:nvPr/>
+        </p:nvSpPr>
+        <p:spPr>
+          <a:xfrm>
+            <a:off x="6611112" y="3938320"/>
+            <a:ext cx="914400" cy="201168"/>
+          </a:xfrm>
+          <a:prstGeom prst="rect">
+            <a:avLst/>
+          </a:prstGeom>
+          <a:noFill/>
+        </p:spPr>
+        <p:txBody>
+          <a:bodyPr wrap="square" lIns="0" rIns="0" tIns="0" bIns="0">
+            <a:spAutoFit/>
+          </a:bodyPr>
+          <a:lstStyle/>
+          <a:p>
+            <a:pPr algn="ctr">
+              <a:spcBef>
+                <a:spcPts val="0"/>
+              </a:spcBef>
+              <a:spcAft>
+                <a:spcPts val="0"/>
+              </a:spcAft>
+            </a:pPr>
+            <a:r>
+              <a:rPr sz="1000" b="1">
+                <a:solidFill>
+                  <a:srgbClr val="14181D"/>
+                </a:solidFill>
+                <a:latin typeface="Arial"/>
+              </a:rPr>
+              <a:t>91</a:t>
+            </a:r>
+          </a:p>
+        </p:txBody>
+      </p:sp>
+      <p:sp>
+        <p:nvSpPr>
+          <p:cNvPr id="44" name="TextBox 43"/>
+          <p:cNvSpPr txBox="1"/>
+          <p:nvPr/>
+        </p:nvSpPr>
+        <p:spPr>
+          <a:xfrm>
+            <a:off x="6611112" y="5202936"/>
+            <a:ext cx="914400" cy="182880"/>
+          </a:xfrm>
+          <a:prstGeom prst="rect">
+            <a:avLst/>
+          </a:prstGeom>
+          <a:noFill/>
+        </p:spPr>
+        <p:txBody>
+          <a:bodyPr wrap="square" lIns="0" rIns="0" tIns="0" bIns="0">
+            <a:spAutoFit/>
+          </a:bodyPr>
+          <a:lstStyle/>
+          <a:p>
+            <a:pPr algn="ctr">
+              <a:spcBef>
+                <a:spcPts val="0"/>
+              </a:spcBef>
+              <a:spcAft>
+                <a:spcPts val="0"/>
+              </a:spcAft>
+            </a:pPr>
+            <a:r>
+              <a:rPr sz="850" b="0">
+                <a:solidFill>
+                  <a:srgbClr val="7C8695"/>
+                </a:solidFill>
+                <a:latin typeface="Arial"/>
+              </a:rPr>
+              <a:t>mid soak</a:t>
+            </a:r>
+          </a:p>
+        </p:txBody>
+      </p:sp>
+      <p:sp>
+        <p:nvSpPr>
+          <p:cNvPr id="45" name="Rectangle 44"/>
+          <p:cNvSpPr/>
+          <p:nvPr/>
+        </p:nvSpPr>
+        <p:spPr>
+          <a:xfrm>
+            <a:off x="7690104" y="3805732"/>
+            <a:ext cx="621792" cy="1333195"/>
+          </a:xfrm>
+          <a:prstGeom prst="rect">
+            <a:avLst/>
+          </a:prstGeom>
+          <a:solidFill>
+            <a:srgbClr val="B0590A"/>
+          </a:solidFill>
+          <a:ln>
+            <a:noFill/>
+          </a:ln>
+          <a:effectLst/>
+        </p:spPr>
+        <p:style>
+          <a:lnRef idx="1">
+            <a:schemeClr val="accent1"/>
+          </a:lnRef>
+          <a:fillRef idx="3">
+            <a:schemeClr val="accent1"/>
+          </a:fillRef>
+          <a:effectRef idx="2">
+            <a:schemeClr val="accent1"/>
+          </a:effectRef>
+          <a:fontRef idx="minor">
+            <a:schemeClr val="lt1"/>
+          </a:fontRef>
+        </p:style>
+        <p:txBody>
+          <a:bodyPr rtlCol="0" anchor="ctr"/>
+          <a:lstStyle/>
+          <a:p>
+            <a:pPr algn="ctr"/>
+          </a:p>
+        </p:txBody>
+      </p:sp>
+      <p:sp>
+        <p:nvSpPr>
+          <p:cNvPr id="46" name="TextBox 45"/>
+          <p:cNvSpPr txBox="1"/>
+          <p:nvPr/>
+        </p:nvSpPr>
+        <p:spPr>
+          <a:xfrm>
+            <a:off x="7543800" y="3567988"/>
+            <a:ext cx="914400" cy="201168"/>
+          </a:xfrm>
+          <a:prstGeom prst="rect">
+            <a:avLst/>
+          </a:prstGeom>
+          <a:noFill/>
+        </p:spPr>
+        <p:txBody>
+          <a:bodyPr wrap="square" lIns="0" rIns="0" tIns="0" bIns="0">
+            <a:spAutoFit/>
+          </a:bodyPr>
+          <a:lstStyle/>
+          <a:p>
+            <a:pPr algn="ctr">
+              <a:spcBef>
+                <a:spcPts val="0"/>
+              </a:spcBef>
+              <a:spcAft>
+                <a:spcPts val="0"/>
+              </a:spcAft>
+            </a:pPr>
+            <a:r>
+              <a:rPr sz="1000" b="1">
+                <a:solidFill>
+                  <a:srgbClr val="14181D"/>
+                </a:solidFill>
+                <a:latin typeface="Arial"/>
+              </a:rPr>
+              <a:t>126</a:t>
+            </a:r>
+          </a:p>
+        </p:txBody>
+      </p:sp>
+      <p:sp>
+        <p:nvSpPr>
+          <p:cNvPr id="47" name="TextBox 46"/>
+          <p:cNvSpPr txBox="1"/>
+          <p:nvPr/>
+        </p:nvSpPr>
+        <p:spPr>
+          <a:xfrm>
+            <a:off x="7543800" y="5202936"/>
+            <a:ext cx="914400" cy="182880"/>
+          </a:xfrm>
+          <a:prstGeom prst="rect">
+            <a:avLst/>
+          </a:prstGeom>
+          <a:noFill/>
+        </p:spPr>
+        <p:txBody>
+          <a:bodyPr wrap="square" lIns="0" rIns="0" tIns="0" bIns="0">
+            <a:spAutoFit/>
+          </a:bodyPr>
+          <a:lstStyle/>
+          <a:p>
+            <a:pPr algn="ctr">
+              <a:spcBef>
+                <a:spcPts val="0"/>
+              </a:spcBef>
+              <a:spcAft>
+                <a:spcPts val="0"/>
+              </a:spcAft>
+            </a:pPr>
+            <a:r>
+              <a:rPr sz="850" b="0">
+                <a:solidFill>
+                  <a:srgbClr val="7C8695"/>
+                </a:solidFill>
+                <a:latin typeface="Arial"/>
+              </a:rPr>
+              <a:t>end soak</a:t>
+            </a:r>
+          </a:p>
+        </p:txBody>
+      </p:sp>
+      <p:sp>
+        <p:nvSpPr>
+          <p:cNvPr id="48" name="Rectangle 47"/>
+          <p:cNvSpPr/>
+          <p:nvPr/>
+        </p:nvSpPr>
+        <p:spPr>
+          <a:xfrm>
+            <a:off x="4800600" y="5138928"/>
+            <a:ext cx="3703320" cy="10972"/>
+          </a:xfrm>
+          <a:prstGeom prst="rect">
+            <a:avLst/>
+          </a:prstGeom>
+          <a:solidFill>
+            <a:srgbClr val="D9DEE4"/>
+          </a:solidFill>
+          <a:ln>
+            <a:noFill/>
+          </a:ln>
+          <a:effectLst/>
+        </p:spPr>
+        <p:style>
+          <a:lnRef idx="1">
+            <a:schemeClr val="accent1"/>
+          </a:lnRef>
+          <a:fillRef idx="3">
+            <a:schemeClr val="accent1"/>
+          </a:fillRef>
+          <a:effectRef idx="2">
+            <a:schemeClr val="accent1"/>
+          </a:effectRef>
+          <a:fontRef idx="minor">
+            <a:schemeClr val="lt1"/>
+          </a:fontRef>
+        </p:style>
+        <p:txBody>
+          <a:bodyPr rtlCol="0" anchor="ctr"/>
+          <a:lstStyle/>
+          <a:p>
+            <a:pPr algn="ctr"/>
+          </a:p>
+        </p:txBody>
+      </p:sp>
+      <p:sp>
+        <p:nvSpPr>
+          <p:cNvPr id="49" name="TextBox 48"/>
+          <p:cNvSpPr txBox="1"/>
+          <p:nvPr/>
+        </p:nvSpPr>
+        <p:spPr>
+          <a:xfrm>
+            <a:off x="548640" y="5522976"/>
+            <a:ext cx="7955279" cy="566928"/>
+          </a:xfrm>
+          <a:prstGeom prst="rect">
+            <a:avLst/>
+          </a:prstGeom>
+          <a:noFill/>
+        </p:spPr>
+        <p:txBody>
+          <a:bodyPr wrap="square" lIns="0" rIns="0" tIns="0" bIns="0">
+            <a:spAutoFit/>
+          </a:bodyPr>
+          <a:lstStyle/>
+          <a:p>
+            <a:pPr algn="l">
+              <a:lnSpc>
+                <a:spcPct val="124000"/>
+              </a:lnSpc>
+              <a:spcBef>
+                <a:spcPts val="0"/>
+              </a:spcBef>
+              <a:spcAft>
+                <a:spcPts val="0"/>
+              </a:spcAft>
+            </a:pPr>
+            <a:r>
+              <a:rPr sz="1050" b="0">
+                <a:solidFill>
+                  <a:srgbClr val="39414C"/>
+                </a:solidFill>
+                <a:latin typeface="Arial"/>
+              </a:rPr>
+              <a:t>On the short passes p95 sat at 600–800 ms while rule evaluation averaged 53–57 ms — so the latency was never in the rule engine. Under soak both curves climbed together, which is what CPU contention looks like, not a missing index.</a:t>
+            </a:r>
+          </a:p>
+        </p:txBody>
+      </p:sp>
+      <p:sp>
+        <p:nvSpPr>
+          <p:cNvPr id="50" name="Rounded Rectangle 49"/>
+          <p:cNvSpPr/>
+          <p:nvPr/>
+        </p:nvSpPr>
+        <p:spPr>
+          <a:xfrm>
+            <a:off x="8732520" y="3145536"/>
+            <a:ext cx="2907792" cy="2999232"/>
           </a:xfrm>
           <a:prstGeom prst="roundRect">
             <a:avLst>
-              <a:gd name="adj" fmla="val 5172"/>
+              <a:gd name="adj" fmla="val 1886"/>
             </a:avLst>
           </a:prstGeom>
           <a:solidFill>
@@ -12300,14 +13494,58 @@
       </p:sp>
       <p:sp>
         <p:nvSpPr>
-          <p:cNvPr id="23" name="TextBox 22"/>
+          <p:cNvPr id="51" name="Rectangle 50"/>
+          <p:cNvSpPr/>
+          <p:nvPr/>
+        </p:nvSpPr>
+        <p:spPr>
+          <a:xfrm>
+            <a:off x="8732520" y="3145536"/>
+            <a:ext cx="2907792" cy="45720"/>
+          </a:xfrm>
+          <a:prstGeom prst="rect">
+            <a:avLst/>
+          </a:prstGeom>
+          <a:solidFill>
+            <a:srgbClr val="730014"/>
+          </a:solidFill>
+          <a:ln>
+            <a:noFill/>
+          </a:ln>
+          <a:effectLst/>
+        </p:spPr>
+        <p:style>
+          <a:lnRef idx="1">
+            <a:schemeClr val="accent1"/>
+          </a:lnRef>
+          <a:fillRef idx="3">
+            <a:schemeClr val="accent1"/>
+          </a:fillRef>
+          <a:effectRef idx="2">
+            <a:schemeClr val="accent1"/>
+          </a:effectRef>
+          <a:fontRef idx="minor">
+            <a:schemeClr val="lt1"/>
+          </a:fontRef>
+        </p:style>
+        <p:txBody>
+          <a:bodyPr rtlCol="0" anchor="ctr"/>
+          <a:lstStyle/>
+          <a:p>
+            <a:pPr algn="ctr"/>
+          </a:p>
+        </p:txBody>
+      </p:sp>
+      <p:sp>
+        <p:nvSpPr>
+          <p:cNvPr id="52" name="TextBox 51"/>
           <p:cNvSpPr txBox="1"/>
           <p:nvPr/>
         </p:nvSpPr>
         <p:spPr>
           <a:xfrm>
-            <a:off x="3547872" y="3438144"/>
-            <a:ext cx="2276856" cy="219456"/>
+            <a:off x="8933688" y="3310128"/>
+            <a:ext cx="2560320" cy="201168"/>
           </a:xfrm>
           <a:prstGeom prst="rect">
             <a:avLst/>
@@ -12329,27 +13567,72 @@
               </a:spcAft>
             </a:pPr>
             <a:r>
-              <a:rPr sz="1200" b="1">
-                <a:solidFill>
-                  <a:srgbClr val="14181D"/>
+              <a:rPr sz="900" b="1" spc="140">
+                <a:solidFill>
+                  <a:srgbClr val="730014"/>
                 </a:solidFill>
                 <a:latin typeface="Arial"/>
               </a:rPr>
-              <a:t>Daily Limit</a:t>
-            </a:r>
-          </a:p>
-        </p:txBody>
-      </p:sp>
-      <p:sp>
-        <p:nvSpPr>
-          <p:cNvPr id="24" name="TextBox 23"/>
+              <a:t>THE BLOCKER</a:t>
+            </a:r>
+          </a:p>
+        </p:txBody>
+      </p:sp>
+      <p:sp>
+        <p:nvSpPr>
+          <p:cNvPr id="53" name="TextBox 52"/>
           <p:cNvSpPr txBox="1"/>
           <p:nvPr/>
         </p:nvSpPr>
         <p:spPr>
           <a:xfrm>
-            <a:off x="3547872" y="3685032"/>
-            <a:ext cx="2313432" cy="384048"/>
+            <a:off x="8933688" y="3529584"/>
+            <a:ext cx="2560320" cy="402336"/>
+          </a:xfrm>
+          <a:prstGeom prst="rect">
+            <a:avLst/>
+          </a:prstGeom>
+          <a:noFill/>
+        </p:spPr>
+        <p:txBody>
+          <a:bodyPr wrap="square" lIns="0" rIns="0" tIns="0" bIns="0">
+            <a:spAutoFit/>
+          </a:bodyPr>
+          <a:lstStyle/>
+          <a:p>
+            <a:pPr algn="l">
+              <a:lnSpc>
+                <a:spcPct val="116000"/>
+              </a:lnSpc>
+              <a:spcBef>
+                <a:spcPts val="0"/>
+              </a:spcBef>
+              <a:spcAft>
+                <a:spcPts val="0"/>
+              </a:spcAft>
+            </a:pPr>
+            <a:r>
+              <a:rPr sz="1250" b="1">
+                <a:solidFill>
+                  <a:srgbClr val="14181D"/>
+                </a:solidFill>
+                <a:latin typeface="Arial"/>
+              </a:rPr>
+              <a:t>Moving MySQL to its own VM</a:t>
+            </a:r>
+          </a:p>
+        </p:txBody>
+      </p:sp>
+      <p:sp>
+        <p:nvSpPr>
+          <p:cNvPr id="54" name="TextBox 53"/>
+          <p:cNvSpPr txBox="1"/>
+          <p:nvPr/>
+        </p:nvSpPr>
+        <p:spPr>
+          <a:xfrm>
+            <a:off x="8933688" y="3968496"/>
+            <a:ext cx="2578608" cy="310896"/>
           </a:xfrm>
           <a:prstGeom prst="rect">
             <a:avLst/>
@@ -12380,21 +13663,21 @@
                 </a:solidFill>
                 <a:latin typeface="Arial"/>
               </a:rPr>
-              <a:t>Cumulative debits for the calendar day</a:t>
-            </a:r>
-          </a:p>
-        </p:txBody>
-      </p:sp>
-      <p:sp>
-        <p:nvSpPr>
-          <p:cNvPr id="25" name="TextBox 24"/>
+              <a:t>The soak said co-location was the cost. The fix would not connect:</a:t>
+            </a:r>
+          </a:p>
+        </p:txBody>
+      </p:sp>
+      <p:sp>
+        <p:nvSpPr>
+          <p:cNvPr id="55" name="TextBox 54"/>
           <p:cNvSpPr txBox="1"/>
           <p:nvPr/>
         </p:nvSpPr>
         <p:spPr>
           <a:xfrm>
-            <a:off x="3547872" y="4087368"/>
-            <a:ext cx="1463040" cy="201168"/>
+            <a:off x="8933688" y="4443984"/>
+            <a:ext cx="2103120" cy="182880"/>
           </a:xfrm>
           <a:prstGeom prst="rect">
             <a:avLst/>
@@ -12416,27 +13699,27 @@
               </a:spcAft>
             </a:pPr>
             <a:r>
-              <a:rPr sz="1050" b="1">
-                <a:solidFill>
-                  <a:srgbClr val="C41E3A"/>
+              <a:rPr sz="900" b="0">
+                <a:solidFill>
+                  <a:srgbClr val="39414C"/>
                 </a:solidFill>
                 <a:latin typeface="Arial"/>
               </a:rPr>
-              <a:t>&gt; 50,000</a:t>
-            </a:r>
-          </a:p>
-        </p:txBody>
-      </p:sp>
-      <p:sp>
-        <p:nvSpPr>
-          <p:cNvPr id="26" name="TextBox 25"/>
+              <a:t>Windows → Linux</a:t>
+            </a:r>
+          </a:p>
+        </p:txBody>
+      </p:sp>
+      <p:sp>
+        <p:nvSpPr>
+          <p:cNvPr id="56" name="TextBox 55"/>
           <p:cNvSpPr txBox="1"/>
           <p:nvPr/>
         </p:nvSpPr>
         <p:spPr>
           <a:xfrm>
-            <a:off x="5029200" y="4087368"/>
-            <a:ext cx="795528" cy="201168"/>
+            <a:off x="10927080" y="4443984"/>
+            <a:ext cx="548640" cy="182880"/>
           </a:xfrm>
           <a:prstGeom prst="rect">
             <a:avLst/>
@@ -12458,27 +13741,27 @@
               </a:spcAft>
             </a:pPr>
             <a:r>
-              <a:rPr sz="850" b="1">
-                <a:solidFill>
-                  <a:srgbClr val="7C8695"/>
+              <a:rPr sz="900" b="1">
+                <a:solidFill>
+                  <a:srgbClr val="1B7A3D"/>
                 </a:solidFill>
                 <a:latin typeface="Arial"/>
               </a:rPr>
-              <a:t>MEDIUM</a:t>
-            </a:r>
-          </a:p>
-        </p:txBody>
-      </p:sp>
-      <p:sp>
-        <p:nvSpPr>
-          <p:cNvPr id="27" name="TextBox 26"/>
+              <a:t>works</a:t>
+            </a:r>
+          </a:p>
+        </p:txBody>
+      </p:sp>
+      <p:sp>
+        <p:nvSpPr>
+          <p:cNvPr id="57" name="TextBox 56"/>
           <p:cNvSpPr txBox="1"/>
           <p:nvPr/>
         </p:nvSpPr>
         <p:spPr>
           <a:xfrm>
-            <a:off x="548640" y="4590288"/>
-            <a:ext cx="5394960" cy="402336"/>
+            <a:off x="8933688" y="4681728"/>
+            <a:ext cx="2103120" cy="182880"/>
           </a:xfrm>
           <a:prstGeom prst="rect">
             <a:avLst/>
@@ -12492,9 +13775,6 @@
           <a:lstStyle/>
           <a:p>
             <a:pPr algn="l">
-              <a:lnSpc>
-                <a:spcPct val="122000"/>
-              </a:lnSpc>
               <a:spcBef>
                 <a:spcPts val="0"/>
               </a:spcBef>
@@ -12503,27 +13783,27 @@
               </a:spcAft>
             </a:pPr>
             <a:r>
-              <a:rPr sz="1050" b="0">
-                <a:solidFill>
-                  <a:srgbClr val="7C8695"/>
+              <a:rPr sz="900" b="0">
+                <a:solidFill>
+                  <a:srgbClr val="39414C"/>
                 </a:solidFill>
                 <a:latin typeface="Arial"/>
               </a:rPr>
-              <a:t>Every default lives in rule_configs and is editable from the Rules screen — no redeploy to retune a threshold.</a:t>
-            </a:r>
-          </a:p>
-        </p:txBody>
-      </p:sp>
-      <p:sp>
-        <p:nvSpPr>
-          <p:cNvPr id="28" name="TextBox 27"/>
+              <a:t>Linux A → Linux B</a:t>
+            </a:r>
+          </a:p>
+        </p:txBody>
+      </p:sp>
+      <p:sp>
+        <p:nvSpPr>
+          <p:cNvPr id="58" name="TextBox 57"/>
           <p:cNvSpPr txBox="1"/>
           <p:nvPr/>
         </p:nvSpPr>
         <p:spPr>
           <a:xfrm>
-            <a:off x="6355080" y="1755648"/>
-            <a:ext cx="5303520" cy="237744"/>
+            <a:off x="10927080" y="4681728"/>
+            <a:ext cx="548640" cy="182880"/>
           </a:xfrm>
           <a:prstGeom prst="rect">
             <a:avLst/>
@@ -12536,7 +13816,7 @@
           </a:bodyPr>
           <a:lstStyle/>
           <a:p>
-            <a:pPr algn="l">
+            <a:pPr algn="r">
               <a:spcBef>
                 <a:spcPts val="0"/>
               </a:spcBef>
@@ -12545,527 +13825,27 @@
               </a:spcAft>
             </a:pPr>
             <a:r>
-              <a:rPr sz="1500" b="1">
-                <a:solidFill>
-                  <a:srgbClr val="730014"/>
+              <a:rPr sz="900" b="1">
+                <a:solidFill>
+                  <a:srgbClr val="C41E3A"/>
                 </a:solidFill>
                 <a:latin typeface="Arial"/>
               </a:rPr>
-              <a:t>Alert lifecycle</a:t>
-            </a:r>
-          </a:p>
-        </p:txBody>
-      </p:sp>
-      <p:sp>
-        <p:nvSpPr>
-          <p:cNvPr id="29" name="Rounded Rectangle 28"/>
-          <p:cNvSpPr/>
-          <p:nvPr/>
-        </p:nvSpPr>
-        <p:spPr>
-          <a:xfrm>
-            <a:off x="6355080" y="2139696"/>
-            <a:ext cx="1184148" cy="457200"/>
-          </a:xfrm>
-          <a:prstGeom prst="roundRect">
-            <a:avLst>
-              <a:gd name="adj" fmla="val 12000"/>
-            </a:avLst>
-          </a:prstGeom>
-          <a:solidFill>
-            <a:srgbClr val="730014"/>
-          </a:solidFill>
-          <a:ln w="9525">
-            <a:solidFill>
-              <a:srgbClr val="730014"/>
-            </a:solidFill>
-          </a:ln>
-          <a:effectLst/>
-        </p:spPr>
-        <p:style>
-          <a:lnRef idx="1">
-            <a:schemeClr val="accent1"/>
-          </a:lnRef>
-          <a:fillRef idx="3">
-            <a:schemeClr val="accent1"/>
-          </a:fillRef>
-          <a:effectRef idx="2">
-            <a:schemeClr val="accent1"/>
-          </a:effectRef>
-          <a:fontRef idx="minor">
-            <a:schemeClr val="lt1"/>
-          </a:fontRef>
-        </p:style>
-        <p:txBody>
-          <a:bodyPr rtlCol="0" anchor="ctr" wrap="square" lIns="73152" rIns="73152" tIns="0" bIns="0"/>
-          <a:lstStyle/>
-          <a:p>
-            <a:pPr algn="ctr">
-              <a:spcBef>
-                <a:spcPts val="0"/>
-              </a:spcBef>
-              <a:spcAft>
-                <a:spcPts val="0"/>
-              </a:spcAft>
-            </a:pPr>
-            <a:r>
-              <a:rPr sz="850" b="1">
-                <a:solidFill>
-                  <a:srgbClr val="FFFFFF"/>
-                </a:solidFill>
-                <a:latin typeface="Arial"/>
-              </a:rPr>
-              <a:t>OPEN</a:t>
-            </a:r>
-          </a:p>
-        </p:txBody>
-      </p:sp>
-      <p:cxnSp>
-        <p:nvCxnSpPr>
-          <p:cNvPr id="30" name="Connector 29"/>
-          <p:cNvCxnSpPr/>
-          <p:nvPr/>
-        </p:nvCxnSpPr>
-        <p:spPr>
-          <a:xfrm>
-            <a:off x="7557516" y="2368296"/>
-            <a:ext cx="137160" cy="0"/>
-          </a:xfrm>
-          <a:prstGeom prst="line">
-            <a:avLst/>
-          </a:prstGeom>
-          <a:ln w="12700">
-            <a:solidFill>
-              <a:srgbClr val="7C8695"/>
-            </a:solidFill>
-            <a:tailEnd type="triangle" w="med" len="med"/>
-          </a:ln>
-        </p:spPr>
-        <p:style>
-          <a:lnRef idx="2">
-            <a:schemeClr val="accent1"/>
-          </a:lnRef>
-          <a:fillRef idx="0">
-            <a:schemeClr val="accent1"/>
-          </a:fillRef>
-          <a:effectRef idx="1">
-            <a:schemeClr val="accent1"/>
-          </a:effectRef>
-          <a:fontRef idx="minor">
-            <a:schemeClr val="tx1"/>
-          </a:fontRef>
-        </p:style>
-      </p:cxnSp>
-      <p:sp>
-        <p:nvSpPr>
-          <p:cNvPr id="31" name="Rounded Rectangle 30"/>
-          <p:cNvSpPr/>
-          <p:nvPr/>
-        </p:nvSpPr>
-        <p:spPr>
-          <a:xfrm>
-            <a:off x="7722108" y="2139696"/>
-            <a:ext cx="1184148" cy="457200"/>
-          </a:xfrm>
-          <a:prstGeom prst="roundRect">
-            <a:avLst>
-              <a:gd name="adj" fmla="val 12000"/>
-            </a:avLst>
-          </a:prstGeom>
-          <a:solidFill>
-            <a:srgbClr val="9B0F28"/>
-          </a:solidFill>
-          <a:ln w="9525">
-            <a:solidFill>
-              <a:srgbClr val="9B0F28"/>
-            </a:solidFill>
-          </a:ln>
-          <a:effectLst/>
-        </p:spPr>
-        <p:style>
-          <a:lnRef idx="1">
-            <a:schemeClr val="accent1"/>
-          </a:lnRef>
-          <a:fillRef idx="3">
-            <a:schemeClr val="accent1"/>
-          </a:fillRef>
-          <a:effectRef idx="2">
-            <a:schemeClr val="accent1"/>
-          </a:effectRef>
-          <a:fontRef idx="minor">
-            <a:schemeClr val="lt1"/>
-          </a:fontRef>
-        </p:style>
-        <p:txBody>
-          <a:bodyPr rtlCol="0" anchor="ctr" wrap="square" lIns="73152" rIns="73152" tIns="0" bIns="0"/>
-          <a:lstStyle/>
-          <a:p>
-            <a:pPr algn="ctr">
-              <a:spcBef>
-                <a:spcPts val="0"/>
-              </a:spcBef>
-              <a:spcAft>
-                <a:spcPts val="0"/>
-              </a:spcAft>
-            </a:pPr>
-            <a:r>
-              <a:rPr sz="850" b="1">
-                <a:solidFill>
-                  <a:srgbClr val="FFFFFF"/>
-                </a:solidFill>
-                <a:latin typeface="Arial"/>
-              </a:rPr>
-              <a:t>ACKNOWLEDGED</a:t>
-            </a:r>
-          </a:p>
-        </p:txBody>
-      </p:sp>
-      <p:cxnSp>
-        <p:nvCxnSpPr>
-          <p:cNvPr id="32" name="Connector 31"/>
-          <p:cNvCxnSpPr/>
-          <p:nvPr/>
-        </p:nvCxnSpPr>
-        <p:spPr>
-          <a:xfrm>
-            <a:off x="8924544" y="2368296"/>
-            <a:ext cx="137160" cy="0"/>
-          </a:xfrm>
-          <a:prstGeom prst="line">
-            <a:avLst/>
-          </a:prstGeom>
-          <a:ln w="12700">
-            <a:solidFill>
-              <a:srgbClr val="7C8695"/>
-            </a:solidFill>
-            <a:tailEnd type="triangle" w="med" len="med"/>
-          </a:ln>
-        </p:spPr>
-        <p:style>
-          <a:lnRef idx="2">
-            <a:schemeClr val="accent1"/>
-          </a:lnRef>
-          <a:fillRef idx="0">
-            <a:schemeClr val="accent1"/>
-          </a:fillRef>
-          <a:effectRef idx="1">
-            <a:schemeClr val="accent1"/>
-          </a:effectRef>
-          <a:fontRef idx="minor">
-            <a:schemeClr val="tx1"/>
-          </a:fontRef>
-        </p:style>
-      </p:cxnSp>
-      <p:sp>
-        <p:nvSpPr>
-          <p:cNvPr id="33" name="Rounded Rectangle 32"/>
-          <p:cNvSpPr/>
-          <p:nvPr/>
-        </p:nvSpPr>
-        <p:spPr>
-          <a:xfrm>
-            <a:off x="9089136" y="2139696"/>
-            <a:ext cx="1184148" cy="457200"/>
-          </a:xfrm>
-          <a:prstGeom prst="roundRect">
-            <a:avLst>
-              <a:gd name="adj" fmla="val 12000"/>
-            </a:avLst>
-          </a:prstGeom>
-          <a:solidFill>
-            <a:srgbClr val="C41E3A"/>
-          </a:solidFill>
-          <a:ln w="9525">
-            <a:solidFill>
-              <a:srgbClr val="C41E3A"/>
-            </a:solidFill>
-          </a:ln>
-          <a:effectLst/>
-        </p:spPr>
-        <p:style>
-          <a:lnRef idx="1">
-            <a:schemeClr val="accent1"/>
-          </a:lnRef>
-          <a:fillRef idx="3">
-            <a:schemeClr val="accent1"/>
-          </a:fillRef>
-          <a:effectRef idx="2">
-            <a:schemeClr val="accent1"/>
-          </a:effectRef>
-          <a:fontRef idx="minor">
-            <a:schemeClr val="lt1"/>
-          </a:fontRef>
-        </p:style>
-        <p:txBody>
-          <a:bodyPr rtlCol="0" anchor="ctr" wrap="square" lIns="73152" rIns="73152" tIns="0" bIns="0"/>
-          <a:lstStyle/>
-          <a:p>
-            <a:pPr algn="ctr">
-              <a:spcBef>
-                <a:spcPts val="0"/>
-              </a:spcBef>
-              <a:spcAft>
-                <a:spcPts val="0"/>
-              </a:spcAft>
-            </a:pPr>
-            <a:r>
-              <a:rPr sz="850" b="1">
-                <a:solidFill>
-                  <a:srgbClr val="FFFFFF"/>
-                </a:solidFill>
-                <a:latin typeface="Arial"/>
-              </a:rPr>
-              <a:t>INVESTIGATING</a:t>
-            </a:r>
-          </a:p>
-        </p:txBody>
-      </p:sp>
-      <p:cxnSp>
-        <p:nvCxnSpPr>
-          <p:cNvPr id="34" name="Connector 33"/>
-          <p:cNvCxnSpPr/>
-          <p:nvPr/>
-        </p:nvCxnSpPr>
-        <p:spPr>
-          <a:xfrm>
-            <a:off x="10291572" y="2368296"/>
-            <a:ext cx="137160" cy="0"/>
-          </a:xfrm>
-          <a:prstGeom prst="line">
-            <a:avLst/>
-          </a:prstGeom>
-          <a:ln w="12700">
-            <a:solidFill>
-              <a:srgbClr val="7C8695"/>
-            </a:solidFill>
-            <a:tailEnd type="triangle" w="med" len="med"/>
-          </a:ln>
-        </p:spPr>
-        <p:style>
-          <a:lnRef idx="2">
-            <a:schemeClr val="accent1"/>
-          </a:lnRef>
-          <a:fillRef idx="0">
-            <a:schemeClr val="accent1"/>
-          </a:fillRef>
-          <a:effectRef idx="1">
-            <a:schemeClr val="accent1"/>
-          </a:effectRef>
-          <a:fontRef idx="minor">
-            <a:schemeClr val="tx1"/>
-          </a:fontRef>
-        </p:style>
-      </p:cxnSp>
-      <p:sp>
-        <p:nvSpPr>
-          <p:cNvPr id="35" name="Rounded Rectangle 34"/>
-          <p:cNvSpPr/>
-          <p:nvPr/>
-        </p:nvSpPr>
-        <p:spPr>
-          <a:xfrm>
-            <a:off x="10456163" y="2139696"/>
-            <a:ext cx="1184148" cy="457200"/>
-          </a:xfrm>
-          <a:prstGeom prst="roundRect">
-            <a:avLst>
-              <a:gd name="adj" fmla="val 12000"/>
-            </a:avLst>
-          </a:prstGeom>
-          <a:solidFill>
-            <a:srgbClr val="1B7A3D"/>
-          </a:solidFill>
-          <a:ln w="9525">
-            <a:solidFill>
-              <a:srgbClr val="1B7A3D"/>
-            </a:solidFill>
-          </a:ln>
-          <a:effectLst/>
-        </p:spPr>
-        <p:style>
-          <a:lnRef idx="1">
-            <a:schemeClr val="accent1"/>
-          </a:lnRef>
-          <a:fillRef idx="3">
-            <a:schemeClr val="accent1"/>
-          </a:fillRef>
-          <a:effectRef idx="2">
-            <a:schemeClr val="accent1"/>
-          </a:effectRef>
-          <a:fontRef idx="minor">
-            <a:schemeClr val="lt1"/>
-          </a:fontRef>
-        </p:style>
-        <p:txBody>
-          <a:bodyPr rtlCol="0" anchor="ctr" wrap="square" lIns="73152" rIns="73152" tIns="0" bIns="0"/>
-          <a:lstStyle/>
-          <a:p>
-            <a:pPr algn="ctr">
-              <a:spcBef>
-                <a:spcPts val="0"/>
-              </a:spcBef>
-              <a:spcAft>
-                <a:spcPts val="0"/>
-              </a:spcAft>
-            </a:pPr>
-            <a:r>
-              <a:rPr sz="850" b="1">
-                <a:solidFill>
-                  <a:srgbClr val="FFFFFF"/>
-                </a:solidFill>
-                <a:latin typeface="Arial"/>
-              </a:rPr>
-              <a:t>CLOSED</a:t>
-            </a:r>
-          </a:p>
-        </p:txBody>
-      </p:sp>
-      <p:sp>
-        <p:nvSpPr>
-          <p:cNvPr id="36" name="Rounded Rectangle 35"/>
-          <p:cNvSpPr/>
-          <p:nvPr/>
-        </p:nvSpPr>
-        <p:spPr>
-          <a:xfrm>
-            <a:off x="8405622" y="3054096"/>
-            <a:ext cx="1737360" cy="457200"/>
-          </a:xfrm>
-          <a:prstGeom prst="roundRect">
-            <a:avLst>
-              <a:gd name="adj" fmla="val 12000"/>
-            </a:avLst>
-          </a:prstGeom>
-          <a:solidFill>
-            <a:srgbClr val="FFFFFF"/>
-          </a:solidFill>
-          <a:ln w="9525">
-            <a:solidFill>
-              <a:srgbClr val="B0590A"/>
-            </a:solidFill>
-          </a:ln>
-          <a:effectLst/>
-        </p:spPr>
-        <p:style>
-          <a:lnRef idx="1">
-            <a:schemeClr val="accent1"/>
-          </a:lnRef>
-          <a:fillRef idx="3">
-            <a:schemeClr val="accent1"/>
-          </a:fillRef>
-          <a:effectRef idx="2">
-            <a:schemeClr val="accent1"/>
-          </a:effectRef>
-          <a:fontRef idx="minor">
-            <a:schemeClr val="lt1"/>
-          </a:fontRef>
-        </p:style>
-        <p:txBody>
-          <a:bodyPr rtlCol="0" anchor="ctr" wrap="square" lIns="73152" rIns="73152" tIns="0" bIns="0"/>
-          <a:lstStyle/>
-          <a:p>
-            <a:pPr algn="ctr">
-              <a:spcBef>
-                <a:spcPts val="0"/>
-              </a:spcBef>
-              <a:spcAft>
-                <a:spcPts val="0"/>
-              </a:spcAft>
-            </a:pPr>
-            <a:r>
-              <a:rPr sz="850" b="1">
-                <a:solidFill>
-                  <a:srgbClr val="B0590A"/>
-                </a:solidFill>
-                <a:latin typeface="Arial"/>
-              </a:rPr>
-              <a:t>DISMISSED</a:t>
-            </a:r>
-          </a:p>
-        </p:txBody>
-      </p:sp>
-      <p:cxnSp>
-        <p:nvCxnSpPr>
-          <p:cNvPr id="37" name="Connector 36"/>
-          <p:cNvCxnSpPr/>
-          <p:nvPr/>
-        </p:nvCxnSpPr>
-        <p:spPr>
-          <a:xfrm>
-            <a:off x="8314182" y="2615184"/>
-            <a:ext cx="320040" cy="420624"/>
-          </a:xfrm>
-          <a:prstGeom prst="line">
-            <a:avLst/>
-          </a:prstGeom>
-          <a:ln w="12700">
-            <a:solidFill>
-              <a:srgbClr val="B0590A"/>
-            </a:solidFill>
-            <a:tailEnd type="triangle" w="med" len="med"/>
-          </a:ln>
-        </p:spPr>
-        <p:style>
-          <a:lnRef idx="2">
-            <a:schemeClr val="accent1"/>
-          </a:lnRef>
-          <a:fillRef idx="0">
-            <a:schemeClr val="accent1"/>
-          </a:fillRef>
-          <a:effectRef idx="1">
-            <a:schemeClr val="accent1"/>
-          </a:effectRef>
-          <a:fontRef idx="minor">
-            <a:schemeClr val="tx1"/>
-          </a:fontRef>
-        </p:style>
-      </p:cxnSp>
-      <p:cxnSp>
-        <p:nvCxnSpPr>
-          <p:cNvPr id="38" name="Connector 37"/>
-          <p:cNvCxnSpPr/>
-          <p:nvPr/>
-        </p:nvCxnSpPr>
-        <p:spPr>
-          <a:xfrm>
-            <a:off x="9681209" y="2615184"/>
-            <a:ext cx="205741" cy="420624"/>
-          </a:xfrm>
-          <a:prstGeom prst="line">
-            <a:avLst/>
-          </a:prstGeom>
-          <a:ln w="12700">
-            <a:solidFill>
-              <a:srgbClr val="B0590A"/>
-            </a:solidFill>
-            <a:tailEnd type="triangle" w="med" len="med"/>
-          </a:ln>
-        </p:spPr>
-        <p:style>
-          <a:lnRef idx="2">
-            <a:schemeClr val="accent1"/>
-          </a:lnRef>
-          <a:fillRef idx="0">
-            <a:schemeClr val="accent1"/>
-          </a:fillRef>
-          <a:effectRef idx="1">
-            <a:schemeClr val="accent1"/>
-          </a:effectRef>
-          <a:fontRef idx="minor">
-            <a:schemeClr val="tx1"/>
-          </a:fontRef>
-        </p:style>
-      </p:cxnSp>
-      <p:sp>
-        <p:nvSpPr>
-          <p:cNvPr id="39" name="TextBox 38"/>
+              <a:t>fails</a:t>
+            </a:r>
+          </a:p>
+        </p:txBody>
+      </p:sp>
+      <p:sp>
+        <p:nvSpPr>
+          <p:cNvPr id="59" name="TextBox 58"/>
           <p:cNvSpPr txBox="1"/>
           <p:nvPr/>
         </p:nvSpPr>
         <p:spPr>
           <a:xfrm>
-            <a:off x="6355080" y="3639312"/>
-            <a:ext cx="5285232" cy="402336"/>
+            <a:off x="8933688" y="4919472"/>
+            <a:ext cx="2103120" cy="182880"/>
           </a:xfrm>
           <a:prstGeom prst="rect">
             <a:avLst/>
@@ -13079,9 +13859,6 @@
           <a:lstStyle/>
           <a:p>
             <a:pPr algn="l">
-              <a:lnSpc>
-                <a:spcPct val="122000"/>
-              </a:lnSpc>
               <a:spcBef>
                 <a:spcPts val="0"/>
               </a:spcBef>
@@ -13090,119 +13867,27 @@
               </a:spcAft>
             </a:pPr>
             <a:r>
-              <a:rPr sz="1000" b="0">
-                <a:solidFill>
-                  <a:srgbClr val="7C8695"/>
+              <a:rPr sz="900" b="0">
+                <a:solidFill>
+                  <a:srgbClr val="39414C"/>
                 </a:solidFill>
                 <a:latin typeface="Arial"/>
               </a:rPr>
-              <a:t>CLOSED and DISMISSED are terminal. Anything else raises InvalidAlertTransitionException — checked in the service, not the controller.</a:t>
-            </a:r>
-          </a:p>
-        </p:txBody>
-      </p:sp>
-      <p:sp>
-        <p:nvSpPr>
-          <p:cNvPr id="40" name="Rounded Rectangle 39"/>
-          <p:cNvSpPr/>
-          <p:nvPr/>
-        </p:nvSpPr>
-        <p:spPr>
-          <a:xfrm>
-            <a:off x="6355080" y="4169663"/>
-            <a:ext cx="5285232" cy="822960"/>
-          </a:xfrm>
-          <a:prstGeom prst="roundRect">
-            <a:avLst>
-              <a:gd name="adj" fmla="val 6666"/>
-            </a:avLst>
-          </a:prstGeom>
-          <a:solidFill>
-            <a:srgbClr val="F4F6F8"/>
-          </a:solidFill>
-          <a:ln w="9525">
-            <a:solidFill>
-              <a:srgbClr val="D9DEE4"/>
-            </a:solidFill>
-          </a:ln>
-          <a:effectLst/>
-        </p:spPr>
-        <p:style>
-          <a:lnRef idx="1">
-            <a:schemeClr val="accent1"/>
-          </a:lnRef>
-          <a:fillRef idx="3">
-            <a:schemeClr val="accent1"/>
-          </a:fillRef>
-          <a:effectRef idx="2">
-            <a:schemeClr val="accent1"/>
-          </a:effectRef>
-          <a:fontRef idx="minor">
-            <a:schemeClr val="lt1"/>
-          </a:fontRef>
-        </p:style>
-        <p:txBody>
-          <a:bodyPr rtlCol="0" anchor="ctr"/>
-          <a:lstStyle/>
-          <a:p>
-            <a:pPr algn="ctr"/>
-          </a:p>
-        </p:txBody>
-      </p:sp>
-      <p:sp>
-        <p:nvSpPr>
-          <p:cNvPr id="41" name="Rectangle 40"/>
-          <p:cNvSpPr/>
-          <p:nvPr/>
-        </p:nvSpPr>
-        <p:spPr>
-          <a:xfrm>
-            <a:off x="6355080" y="4169663"/>
-            <a:ext cx="50292" cy="822960"/>
-          </a:xfrm>
-          <a:prstGeom prst="rect">
-            <a:avLst/>
-          </a:prstGeom>
-          <a:solidFill>
-            <a:srgbClr val="C41E3A"/>
-          </a:solidFill>
-          <a:ln>
-            <a:noFill/>
-          </a:ln>
-          <a:effectLst/>
-        </p:spPr>
-        <p:style>
-          <a:lnRef idx="1">
-            <a:schemeClr val="accent1"/>
-          </a:lnRef>
-          <a:fillRef idx="3">
-            <a:schemeClr val="accent1"/>
-          </a:fillRef>
-          <a:effectRef idx="2">
-            <a:schemeClr val="accent1"/>
-          </a:effectRef>
-          <a:fontRef idx="minor">
-            <a:schemeClr val="lt1"/>
-          </a:fontRef>
-        </p:style>
-        <p:txBody>
-          <a:bodyPr rtlCol="0" anchor="ctr"/>
-          <a:lstStyle/>
-          <a:p>
-            <a:pPr algn="ctr"/>
-          </a:p>
-        </p:txBody>
-      </p:sp>
-      <p:sp>
-        <p:nvSpPr>
-          <p:cNvPr id="42" name="TextBox 41"/>
+              <a:t>nc listener ← Windows</a:t>
+            </a:r>
+          </a:p>
+        </p:txBody>
+      </p:sp>
+      <p:sp>
+        <p:nvSpPr>
+          <p:cNvPr id="60" name="TextBox 59"/>
           <p:cNvSpPr txBox="1"/>
           <p:nvPr/>
         </p:nvSpPr>
         <p:spPr>
           <a:xfrm>
-            <a:off x="6565392" y="4297680"/>
-            <a:ext cx="4937760" cy="201168"/>
+            <a:off x="10927080" y="4919472"/>
+            <a:ext cx="548640" cy="182880"/>
           </a:xfrm>
           <a:prstGeom prst="rect">
             <a:avLst/>
@@ -13215,7 +13900,7 @@
           </a:bodyPr>
           <a:lstStyle/>
           <a:p>
-            <a:pPr algn="l">
+            <a:pPr algn="r">
               <a:spcBef>
                 <a:spcPts val="0"/>
               </a:spcBef>
@@ -13224,27 +13909,27 @@
               </a:spcAft>
             </a:pPr>
             <a:r>
-              <a:rPr sz="1100" b="1">
-                <a:solidFill>
-                  <a:srgbClr val="14181D"/>
+              <a:rPr sz="900" b="1">
+                <a:solidFill>
+                  <a:srgbClr val="1B7A3D"/>
                 </a:solidFill>
                 <a:latin typeface="Arial"/>
               </a:rPr>
-              <a:t>When two rules fire on one transaction</a:t>
-            </a:r>
-          </a:p>
-        </p:txBody>
-      </p:sp>
-      <p:sp>
-        <p:nvSpPr>
-          <p:cNvPr id="43" name="TextBox 42"/>
+              <a:t>works</a:t>
+            </a:r>
+          </a:p>
+        </p:txBody>
+      </p:sp>
+      <p:sp>
+        <p:nvSpPr>
+          <p:cNvPr id="61" name="TextBox 60"/>
           <p:cNvSpPr txBox="1"/>
           <p:nvPr/>
         </p:nvSpPr>
         <p:spPr>
           <a:xfrm>
-            <a:off x="6565392" y="4535424"/>
-            <a:ext cx="4937760" cy="365760"/>
+            <a:off x="8933688" y="5157216"/>
+            <a:ext cx="2103120" cy="182880"/>
           </a:xfrm>
           <a:prstGeom prst="rect">
             <a:avLst/>
@@ -13266,75 +13951,27 @@
               </a:spcAft>
             </a:pPr>
             <a:r>
-              <a:rPr sz="1000" b="0">
-                <a:solidFill>
-                  <a:srgbClr val="7C8695"/>
+              <a:rPr sz="900" b="0">
+                <a:solidFill>
+                  <a:srgbClr val="39414C"/>
                 </a:solidFill>
                 <a:latin typeface="Arial"/>
               </a:rPr>
-              <a:t>One alert, both reasons listed, severity escalated to HIGH.</a:t>
-            </a:r>
-          </a:p>
-        </p:txBody>
-      </p:sp>
-      <p:sp>
-        <p:nvSpPr>
-          <p:cNvPr id="44" name="Rounded Rectangle 43"/>
-          <p:cNvSpPr/>
-          <p:nvPr/>
-        </p:nvSpPr>
-        <p:spPr>
-          <a:xfrm>
-            <a:off x="548640" y="5230368"/>
-            <a:ext cx="11094415" cy="969264"/>
-          </a:xfrm>
-          <a:prstGeom prst="roundRect">
-            <a:avLst>
-              <a:gd name="adj" fmla="val 5660"/>
-            </a:avLst>
-          </a:prstGeom>
-          <a:solidFill>
-            <a:srgbClr val="FFFFFF"/>
-          </a:solidFill>
-          <a:ln w="9525">
-            <a:solidFill>
-              <a:srgbClr val="D9DEE4"/>
-            </a:solidFill>
-          </a:ln>
-          <a:effectLst/>
-        </p:spPr>
-        <p:style>
-          <a:lnRef idx="1">
-            <a:schemeClr val="accent1"/>
-          </a:lnRef>
-          <a:fillRef idx="3">
-            <a:schemeClr val="accent1"/>
-          </a:fillRef>
-          <a:effectRef idx="2">
-            <a:schemeClr val="accent1"/>
-          </a:effectRef>
-          <a:fontRef idx="minor">
-            <a:schemeClr val="lt1"/>
-          </a:fontRef>
-        </p:style>
-        <p:txBody>
-          <a:bodyPr rtlCol="0" anchor="ctr"/>
-          <a:lstStyle/>
-          <a:p>
-            <a:pPr algn="ctr"/>
-          </a:p>
-        </p:txBody>
-      </p:sp>
-      <p:sp>
-        <p:nvSpPr>
-          <p:cNvPr id="45" name="TextBox 44"/>
+              <a:t>nc listener ← Linux A</a:t>
+            </a:r>
+          </a:p>
+        </p:txBody>
+      </p:sp>
+      <p:sp>
+        <p:nvSpPr>
+          <p:cNvPr id="62" name="TextBox 61"/>
           <p:cNvSpPr txBox="1"/>
           <p:nvPr/>
         </p:nvSpPr>
         <p:spPr>
           <a:xfrm>
-            <a:off x="804672" y="5376672"/>
-            <a:ext cx="5486400" cy="201168"/>
+            <a:off x="10927080" y="5157216"/>
+            <a:ext cx="548640" cy="182880"/>
           </a:xfrm>
           <a:prstGeom prst="rect">
             <a:avLst/>
@@ -13347,7 +13984,7 @@
           </a:bodyPr>
           <a:lstStyle/>
           <a:p>
-            <a:pPr algn="l">
+            <a:pPr algn="r">
               <a:spcBef>
                 <a:spcPts val="0"/>
               </a:spcBef>
@@ -13356,375 +13993,27 @@
               </a:spcAft>
             </a:pPr>
             <a:r>
-              <a:rPr sz="1150" b="1">
-                <a:solidFill>
-                  <a:srgbClr val="730014"/>
+              <a:rPr sz="900" b="1">
+                <a:solidFill>
+                  <a:srgbClr val="C41E3A"/>
                 </a:solidFill>
                 <a:latin typeface="Arial"/>
               </a:rPr>
-              <a:t>How we kept it honest</a:t>
-            </a:r>
-          </a:p>
-        </p:txBody>
-      </p:sp>
-      <p:sp>
-        <p:nvSpPr>
-          <p:cNvPr id="46" name="TextBox 45"/>
-          <p:cNvSpPr txBox="1"/>
-          <p:nvPr/>
-        </p:nvSpPr>
-        <p:spPr>
-          <a:xfrm>
-            <a:off x="804672" y="5669280"/>
-            <a:ext cx="2462707" cy="182880"/>
-          </a:xfrm>
-          <a:prstGeom prst="rect">
-            <a:avLst/>
-          </a:prstGeom>
-          <a:noFill/>
-        </p:spPr>
-        <p:txBody>
-          <a:bodyPr wrap="square" lIns="0" rIns="0" tIns="0" bIns="0">
-            <a:spAutoFit/>
-          </a:bodyPr>
-          <a:lstStyle/>
-          <a:p>
-            <a:pPr algn="l">
-              <a:spcBef>
-                <a:spcPts val="0"/>
-              </a:spcBef>
-              <a:spcAft>
-                <a:spcPts val="0"/>
-              </a:spcAft>
-            </a:pPr>
-            <a:r>
-              <a:rPr sz="900" b="1" spc="120">
-                <a:solidFill>
-                  <a:srgbClr val="C41E3A"/>
-                </a:solidFill>
-                <a:latin typeface="Arial"/>
-              </a:rPr>
-              <a:t>Test first</a:t>
-            </a:r>
-          </a:p>
-        </p:txBody>
-      </p:sp>
-      <p:sp>
-        <p:nvSpPr>
-          <p:cNvPr id="47" name="TextBox 46"/>
-          <p:cNvSpPr txBox="1"/>
-          <p:nvPr/>
-        </p:nvSpPr>
-        <p:spPr>
-          <a:xfrm>
-            <a:off x="804672" y="5870448"/>
-            <a:ext cx="2444419" cy="310896"/>
-          </a:xfrm>
-          <a:prstGeom prst="rect">
-            <a:avLst/>
-          </a:prstGeom>
-          <a:noFill/>
-        </p:spPr>
-        <p:txBody>
-          <a:bodyPr wrap="square" lIns="0" rIns="0" tIns="0" bIns="0">
-            <a:spAutoFit/>
-          </a:bodyPr>
-          <a:lstStyle/>
-          <a:p>
-            <a:pPr algn="l">
-              <a:lnSpc>
-                <a:spcPct val="118000"/>
-              </a:lnSpc>
-              <a:spcBef>
-                <a:spcPts val="0"/>
-              </a:spcBef>
-              <a:spcAft>
-                <a:spcPts val="0"/>
-              </a:spcAft>
-            </a:pPr>
-            <a:r>
-              <a:rPr sz="900" b="0">
-                <a:solidFill>
-                  <a:srgbClr val="7C8695"/>
-                </a:solidFill>
-                <a:latin typeface="Arial"/>
-              </a:rPr>
-              <a:t>Failing test before every rule and every illegal transition</a:t>
-            </a:r>
-          </a:p>
-        </p:txBody>
-      </p:sp>
-      <p:sp>
-        <p:nvSpPr>
-          <p:cNvPr id="48" name="TextBox 47"/>
-          <p:cNvSpPr txBox="1"/>
-          <p:nvPr/>
-        </p:nvSpPr>
-        <p:spPr>
-          <a:xfrm>
-            <a:off x="3450259" y="5669280"/>
-            <a:ext cx="2462707" cy="182880"/>
-          </a:xfrm>
-          <a:prstGeom prst="rect">
-            <a:avLst/>
-          </a:prstGeom>
-          <a:noFill/>
-        </p:spPr>
-        <p:txBody>
-          <a:bodyPr wrap="square" lIns="0" rIns="0" tIns="0" bIns="0">
-            <a:spAutoFit/>
-          </a:bodyPr>
-          <a:lstStyle/>
-          <a:p>
-            <a:pPr algn="l">
-              <a:spcBef>
-                <a:spcPts val="0"/>
-              </a:spcBef>
-              <a:spcAft>
-                <a:spcPts val="0"/>
-              </a:spcAft>
-            </a:pPr>
-            <a:r>
-              <a:rPr sz="900" b="1" spc="120">
-                <a:solidFill>
-                  <a:srgbClr val="C41E3A"/>
-                </a:solidFill>
-                <a:latin typeface="Arial"/>
-              </a:rPr>
-              <a:t>Coverage</a:t>
-            </a:r>
-          </a:p>
-        </p:txBody>
-      </p:sp>
-      <p:sp>
-        <p:nvSpPr>
-          <p:cNvPr id="49" name="TextBox 48"/>
-          <p:cNvSpPr txBox="1"/>
-          <p:nvPr/>
-        </p:nvSpPr>
-        <p:spPr>
-          <a:xfrm>
-            <a:off x="3450259" y="5870448"/>
-            <a:ext cx="2444419" cy="310896"/>
-          </a:xfrm>
-          <a:prstGeom prst="rect">
-            <a:avLst/>
-          </a:prstGeom>
-          <a:noFill/>
-        </p:spPr>
-        <p:txBody>
-          <a:bodyPr wrap="square" lIns="0" rIns="0" tIns="0" bIns="0">
-            <a:spAutoFit/>
-          </a:bodyPr>
-          <a:lstStyle/>
-          <a:p>
-            <a:pPr algn="l">
-              <a:lnSpc>
-                <a:spcPct val="118000"/>
-              </a:lnSpc>
-              <a:spcBef>
-                <a:spcPts val="0"/>
-              </a:spcBef>
-              <a:spcAft>
-                <a:spcPts val="0"/>
-              </a:spcAft>
-            </a:pPr>
-            <a:r>
-              <a:rPr sz="900" b="0">
-                <a:solidFill>
-                  <a:srgbClr val="7C8695"/>
-                </a:solidFill>
-                <a:latin typeface="Arial"/>
-              </a:rPr>
-              <a:t>89 unit tests across 17 classes, H2 for repository tests</a:t>
-            </a:r>
-          </a:p>
-        </p:txBody>
-      </p:sp>
-      <p:sp>
-        <p:nvSpPr>
-          <p:cNvPr id="50" name="TextBox 49"/>
-          <p:cNvSpPr txBox="1"/>
-          <p:nvPr/>
-        </p:nvSpPr>
-        <p:spPr>
-          <a:xfrm>
-            <a:off x="6095847" y="5669280"/>
-            <a:ext cx="2462707" cy="182880"/>
-          </a:xfrm>
-          <a:prstGeom prst="rect">
-            <a:avLst/>
-          </a:prstGeom>
-          <a:noFill/>
-        </p:spPr>
-        <p:txBody>
-          <a:bodyPr wrap="square" lIns="0" rIns="0" tIns="0" bIns="0">
-            <a:spAutoFit/>
-          </a:bodyPr>
-          <a:lstStyle/>
-          <a:p>
-            <a:pPr algn="l">
-              <a:spcBef>
-                <a:spcPts val="0"/>
-              </a:spcBef>
-              <a:spcAft>
-                <a:spcPts val="0"/>
-              </a:spcAft>
-            </a:pPr>
-            <a:r>
-              <a:rPr sz="900" b="1" spc="120">
-                <a:solidFill>
-                  <a:srgbClr val="C41E3A"/>
-                </a:solidFill>
-                <a:latin typeface="Arial"/>
-              </a:rPr>
-              <a:t>Contract</a:t>
-            </a:r>
-          </a:p>
-        </p:txBody>
-      </p:sp>
-      <p:sp>
-        <p:nvSpPr>
-          <p:cNvPr id="51" name="TextBox 50"/>
-          <p:cNvSpPr txBox="1"/>
-          <p:nvPr/>
-        </p:nvSpPr>
-        <p:spPr>
-          <a:xfrm>
-            <a:off x="6095847" y="5870448"/>
-            <a:ext cx="2444419" cy="310896"/>
-          </a:xfrm>
-          <a:prstGeom prst="rect">
-            <a:avLst/>
-          </a:prstGeom>
-          <a:noFill/>
-        </p:spPr>
-        <p:txBody>
-          <a:bodyPr wrap="square" lIns="0" rIns="0" tIns="0" bIns="0">
-            <a:spAutoFit/>
-          </a:bodyPr>
-          <a:lstStyle/>
-          <a:p>
-            <a:pPr algn="l">
-              <a:lnSpc>
-                <a:spcPct val="118000"/>
-              </a:lnSpc>
-              <a:spcBef>
-                <a:spcPts val="0"/>
-              </a:spcBef>
-              <a:spcAft>
-                <a:spcPts val="0"/>
-              </a:spcAft>
-            </a:pPr>
-            <a:r>
-              <a:rPr sz="900" b="0">
-                <a:solidFill>
-                  <a:srgbClr val="7C8695"/>
-                </a:solidFill>
-                <a:latin typeface="Arial"/>
-              </a:rPr>
-              <a:t>OpenAPI published at /swagger-ui.html</a:t>
-            </a:r>
-          </a:p>
-        </p:txBody>
-      </p:sp>
-      <p:sp>
-        <p:nvSpPr>
-          <p:cNvPr id="52" name="TextBox 51"/>
-          <p:cNvSpPr txBox="1"/>
-          <p:nvPr/>
-        </p:nvSpPr>
-        <p:spPr>
-          <a:xfrm>
-            <a:off x="8741435" y="5669280"/>
-            <a:ext cx="2462707" cy="182880"/>
-          </a:xfrm>
-          <a:prstGeom prst="rect">
-            <a:avLst/>
-          </a:prstGeom>
-          <a:noFill/>
-        </p:spPr>
-        <p:txBody>
-          <a:bodyPr wrap="square" lIns="0" rIns="0" tIns="0" bIns="0">
-            <a:spAutoFit/>
-          </a:bodyPr>
-          <a:lstStyle/>
-          <a:p>
-            <a:pPr algn="l">
-              <a:spcBef>
-                <a:spcPts val="0"/>
-              </a:spcBef>
-              <a:spcAft>
-                <a:spcPts val="0"/>
-              </a:spcAft>
-            </a:pPr>
-            <a:r>
-              <a:rPr sz="900" b="1" spc="120">
-                <a:solidFill>
-                  <a:srgbClr val="C41E3A"/>
-                </a:solidFill>
-                <a:latin typeface="Arial"/>
-              </a:rPr>
-              <a:t>Pipeline</a:t>
-            </a:r>
-          </a:p>
-        </p:txBody>
-      </p:sp>
-      <p:sp>
-        <p:nvSpPr>
-          <p:cNvPr id="53" name="TextBox 52"/>
-          <p:cNvSpPr txBox="1"/>
-          <p:nvPr/>
-        </p:nvSpPr>
-        <p:spPr>
-          <a:xfrm>
-            <a:off x="8741435" y="5870448"/>
-            <a:ext cx="2444419" cy="310896"/>
-          </a:xfrm>
-          <a:prstGeom prst="rect">
-            <a:avLst/>
-          </a:prstGeom>
-          <a:noFill/>
-        </p:spPr>
-        <p:txBody>
-          <a:bodyPr wrap="square" lIns="0" rIns="0" tIns="0" bIns="0">
-            <a:spAutoFit/>
-          </a:bodyPr>
-          <a:lstStyle/>
-          <a:p>
-            <a:pPr algn="l">
-              <a:lnSpc>
-                <a:spcPct val="118000"/>
-              </a:lnSpc>
-              <a:spcBef>
-                <a:spcPts val="0"/>
-              </a:spcBef>
-              <a:spcAft>
-                <a:spcPts val="0"/>
-              </a:spcAft>
-            </a:pPr>
-            <a:r>
-              <a:rPr sz="900" b="0">
-                <a:solidFill>
-                  <a:srgbClr val="7C8695"/>
-                </a:solidFill>
-                <a:latin typeface="Arial"/>
-              </a:rPr>
-              <a:t>Jenkins rebuilds the whole Compose stack on push to dev</a:t>
-            </a:r>
-          </a:p>
-        </p:txBody>
-      </p:sp>
-      <p:sp>
-        <p:nvSpPr>
-          <p:cNvPr id="54" name="Rectangle 53"/>
+              <a:t>fails</a:t>
+            </a:r>
+          </a:p>
+        </p:txBody>
+      </p:sp>
+      <p:sp>
+        <p:nvSpPr>
+          <p:cNvPr id="63" name="Rectangle 62"/>
           <p:cNvSpPr/>
           <p:nvPr/>
         </p:nvSpPr>
         <p:spPr>
           <a:xfrm>
-            <a:off x="548640" y="6391656"/>
-            <a:ext cx="11094415" cy="10972"/>
+            <a:off x="8933688" y="5431536"/>
+            <a:ext cx="2542032" cy="10972"/>
           </a:xfrm>
           <a:prstGeom prst="rect">
             <a:avLst/>
@@ -13761,14 +14050,14 @@
       </p:sp>
       <p:sp>
         <p:nvSpPr>
-          <p:cNvPr id="55" name="TextBox 54"/>
+          <p:cNvPr id="64" name="TextBox 63"/>
           <p:cNvSpPr txBox="1"/>
           <p:nvPr/>
         </p:nvSpPr>
         <p:spPr>
           <a:xfrm>
-            <a:off x="548640" y="6473952"/>
-            <a:ext cx="7315200" cy="219456"/>
+            <a:off x="8933688" y="5559551"/>
+            <a:ext cx="2578608" cy="457200"/>
           </a:xfrm>
           <a:prstGeom prst="rect">
             <a:avLst/>
@@ -13782,6 +14071,9 @@
           <a:lstStyle/>
           <a:p>
             <a:pPr algn="l">
+              <a:lnSpc>
+                <a:spcPct val="120000"/>
+              </a:lnSpc>
               <a:spcBef>
                 <a:spcPts val="0"/>
               </a:spcBef>
@@ -13796,14 +14088,100 @@
                 </a:solidFill>
                 <a:latin typeface="Arial"/>
               </a:rPr>
-              <a:t>Agilish  ·  Transaction Monitoring &amp; Alerts</a:t>
-            </a:r>
-          </a:p>
-        </p:txBody>
-      </p:sp>
-      <p:sp>
-        <p:nvSpPr>
-          <p:cNvPr id="56" name="TextBox 55"/>
+              <a:t>Plain nc fails the same way, so this is a security-group or routing rule — not Spring, not Docker.</a:t>
+            </a:r>
+          </a:p>
+        </p:txBody>
+      </p:sp>
+      <p:sp>
+        <p:nvSpPr>
+          <p:cNvPr id="65" name="Rectangle 64"/>
+          <p:cNvSpPr/>
+          <p:nvPr/>
+        </p:nvSpPr>
+        <p:spPr>
+          <a:xfrm>
+            <a:off x="548640" y="6391656"/>
+            <a:ext cx="11094415" cy="10972"/>
+          </a:xfrm>
+          <a:prstGeom prst="rect">
+            <a:avLst/>
+          </a:prstGeom>
+          <a:solidFill>
+            <a:srgbClr val="D9DEE4"/>
+          </a:solidFill>
+          <a:ln>
+            <a:noFill/>
+          </a:ln>
+          <a:effectLst/>
+        </p:spPr>
+        <p:style>
+          <a:lnRef idx="1">
+            <a:schemeClr val="accent1"/>
+          </a:lnRef>
+          <a:fillRef idx="3">
+            <a:schemeClr val="accent1"/>
+          </a:fillRef>
+          <a:effectRef idx="2">
+            <a:schemeClr val="accent1"/>
+          </a:effectRef>
+          <a:fontRef idx="minor">
+            <a:schemeClr val="lt1"/>
+          </a:fontRef>
+        </p:style>
+        <p:txBody>
+          <a:bodyPr rtlCol="0" anchor="ctr"/>
+          <a:lstStyle/>
+          <a:p>
+            <a:pPr algn="ctr"/>
+          </a:p>
+        </p:txBody>
+      </p:sp>
+      <p:sp>
+        <p:nvSpPr>
+          <p:cNvPr id="66" name="TextBox 65"/>
+          <p:cNvSpPr txBox="1"/>
+          <p:nvPr/>
+        </p:nvSpPr>
+        <p:spPr>
+          <a:xfrm>
+            <a:off x="548640" y="6473952"/>
+            <a:ext cx="7315200" cy="219456"/>
+          </a:xfrm>
+          <a:prstGeom prst="rect">
+            <a:avLst/>
+          </a:prstGeom>
+          <a:noFill/>
+        </p:spPr>
+        <p:txBody>
+          <a:bodyPr wrap="square" lIns="0" rIns="0" tIns="0" bIns="0">
+            <a:spAutoFit/>
+          </a:bodyPr>
+          <a:lstStyle/>
+          <a:p>
+            <a:pPr algn="l">
+              <a:spcBef>
+                <a:spcPts val="0"/>
+              </a:spcBef>
+              <a:spcAft>
+                <a:spcPts val="0"/>
+              </a:spcAft>
+            </a:pPr>
+            <a:r>
+              <a:rPr sz="900" b="0">
+                <a:solidFill>
+                  <a:srgbClr val="7C8695"/>
+                </a:solidFill>
+                <a:latin typeface="Arial"/>
+              </a:rPr>
+              <a:t>AGILE-ish  ·  Transaction Monitoring &amp; Alerts</a:t>
+            </a:r>
+          </a:p>
+        </p:txBody>
+      </p:sp>
+      <p:sp>
+        <p:nvSpPr>
+          <p:cNvPr id="67" name="TextBox 66"/>
           <p:cNvSpPr txBox="1"/>
           <p:nvPr/>
         </p:nvSpPr>
@@ -13898,7 +14276,7 @@
                 </a:solidFill>
                 <a:latin typeface="Arial"/>
               </a:rPr>
-              <a:t>EVIDENCE</a:t>
+              <a:t>FUTURE SCOPES</a:t>
             </a:r>
           </a:p>
         </p:txBody>
@@ -13940,7 +14318,7 @@
                 </a:solidFill>
                 <a:latin typeface="Arial"/>
               </a:rPr>
-              <a:t>We pushed it until it hurt, then found out why</a:t>
+              <a:t>The seams are in place — here is what goes through them</a:t>
             </a:r>
           </a:p>
         </p:txBody>
@@ -14026,25 +14404,670 @@
                 </a:solidFill>
                 <a:latin typeface="Arial"/>
               </a:rPr>
-              <a:t>k6 from a Windows client against the Linux app VM — JVM and MySQL sharing roughly 2 vCPU and 3.7 GiB.</a:t>
-            </a:r>
-          </a:p>
-        </p:txBody>
-      </p:sp>
-      <p:sp>
-        <p:nvSpPr>
-          <p:cNvPr id="6" name="Rounded Rectangle 5"/>
+              <a:t>Every item below is a deployment change, not a rewrite. The interfaces on the architecture slide were designed for this.</a:t>
+            </a:r>
+          </a:p>
+        </p:txBody>
+      </p:sp>
+      <p:sp>
+        <p:nvSpPr>
+          <p:cNvPr id="6" name="TextBox 5"/>
+          <p:cNvSpPr txBox="1"/>
+          <p:nvPr/>
+        </p:nvSpPr>
+        <p:spPr>
+          <a:xfrm>
+            <a:off x="548640" y="1737360"/>
+            <a:ext cx="457200" cy="274320"/>
+          </a:xfrm>
+          <a:prstGeom prst="rect">
+            <a:avLst/>
+          </a:prstGeom>
+          <a:noFill/>
+        </p:spPr>
+        <p:txBody>
+          <a:bodyPr wrap="square" lIns="0" rIns="0" tIns="0" bIns="0">
+            <a:spAutoFit/>
+          </a:bodyPr>
+          <a:lstStyle/>
+          <a:p>
+            <a:pPr algn="l">
+              <a:spcBef>
+                <a:spcPts val="0"/>
+              </a:spcBef>
+              <a:spcAft>
+                <a:spcPts val="0"/>
+              </a:spcAft>
+            </a:pPr>
+            <a:r>
+              <a:rPr sz="1500" b="1">
+                <a:solidFill>
+                  <a:srgbClr val="C41E3A"/>
+                </a:solidFill>
+                <a:latin typeface="Arial"/>
+              </a:rPr>
+              <a:t>01</a:t>
+            </a:r>
+          </a:p>
+        </p:txBody>
+      </p:sp>
+      <p:sp>
+        <p:nvSpPr>
+          <p:cNvPr id="7" name="TextBox 6"/>
+          <p:cNvSpPr txBox="1"/>
+          <p:nvPr/>
+        </p:nvSpPr>
+        <p:spPr>
+          <a:xfrm>
+            <a:off x="1097280" y="1755648"/>
+            <a:ext cx="6309360" cy="219456"/>
+          </a:xfrm>
+          <a:prstGeom prst="rect">
+            <a:avLst/>
+          </a:prstGeom>
+          <a:noFill/>
+        </p:spPr>
+        <p:txBody>
+          <a:bodyPr wrap="square" lIns="0" rIns="0" tIns="0" bIns="0">
+            <a:spAutoFit/>
+          </a:bodyPr>
+          <a:lstStyle/>
+          <a:p>
+            <a:pPr algn="l">
+              <a:spcBef>
+                <a:spcPts val="0"/>
+              </a:spcBef>
+              <a:spcAft>
+                <a:spcPts val="0"/>
+              </a:spcAft>
+            </a:pPr>
+            <a:r>
+              <a:rPr sz="1250" b="1">
+                <a:solidFill>
+                  <a:srgbClr val="14181D"/>
+                </a:solidFill>
+                <a:latin typeface="Arial"/>
+              </a:rPr>
+              <a:t>MySQL on its own VM</a:t>
+            </a:r>
+          </a:p>
+        </p:txBody>
+      </p:sp>
+      <p:sp>
+        <p:nvSpPr>
+          <p:cNvPr id="8" name="TextBox 7"/>
+          <p:cNvSpPr txBox="1"/>
+          <p:nvPr/>
+        </p:nvSpPr>
+        <p:spPr>
+          <a:xfrm>
+            <a:off x="1097280" y="2011679"/>
+            <a:ext cx="6309360" cy="512064"/>
+          </a:xfrm>
+          <a:prstGeom prst="rect">
+            <a:avLst/>
+          </a:prstGeom>
+          <a:noFill/>
+        </p:spPr>
+        <p:txBody>
+          <a:bodyPr wrap="square" lIns="0" rIns="0" tIns="0" bIns="0">
+            <a:spAutoFit/>
+          </a:bodyPr>
+          <a:lstStyle/>
+          <a:p>
+            <a:pPr algn="l">
+              <a:lnSpc>
+                <a:spcPct val="124000"/>
+              </a:lnSpc>
+              <a:spcBef>
+                <a:spcPts val="0"/>
+              </a:spcBef>
+              <a:spcAft>
+                <a:spcPts val="0"/>
+              </a:spcAft>
+            </a:pPr>
+            <a:r>
+              <a:rPr sz="1050" b="0">
+                <a:solidFill>
+                  <a:srgbClr val="7C8695"/>
+                </a:solidFill>
+                <a:latin typeface="Arial"/>
+              </a:rPr>
+              <a:t>Clear the Linux-to-Linux security-group rule the soak exposed, move the database off the app box, and re-run the 140 VU soak to publish the before-and-after.</a:t>
+            </a:r>
+          </a:p>
+        </p:txBody>
+      </p:sp>
+      <p:sp>
+        <p:nvSpPr>
+          <p:cNvPr id="9" name="TextBox 8"/>
+          <p:cNvSpPr txBox="1"/>
+          <p:nvPr/>
+        </p:nvSpPr>
+        <p:spPr>
+          <a:xfrm>
+            <a:off x="548640" y="2642615"/>
+            <a:ext cx="457200" cy="274320"/>
+          </a:xfrm>
+          <a:prstGeom prst="rect">
+            <a:avLst/>
+          </a:prstGeom>
+          <a:noFill/>
+        </p:spPr>
+        <p:txBody>
+          <a:bodyPr wrap="square" lIns="0" rIns="0" tIns="0" bIns="0">
+            <a:spAutoFit/>
+          </a:bodyPr>
+          <a:lstStyle/>
+          <a:p>
+            <a:pPr algn="l">
+              <a:spcBef>
+                <a:spcPts val="0"/>
+              </a:spcBef>
+              <a:spcAft>
+                <a:spcPts val="0"/>
+              </a:spcAft>
+            </a:pPr>
+            <a:r>
+              <a:rPr sz="1500" b="1">
+                <a:solidFill>
+                  <a:srgbClr val="C41E3A"/>
+                </a:solidFill>
+                <a:latin typeface="Arial"/>
+              </a:rPr>
+              <a:t>02</a:t>
+            </a:r>
+          </a:p>
+        </p:txBody>
+      </p:sp>
+      <p:sp>
+        <p:nvSpPr>
+          <p:cNvPr id="10" name="TextBox 9"/>
+          <p:cNvSpPr txBox="1"/>
+          <p:nvPr/>
+        </p:nvSpPr>
+        <p:spPr>
+          <a:xfrm>
+            <a:off x="1097280" y="2660903"/>
+            <a:ext cx="6309360" cy="219456"/>
+          </a:xfrm>
+          <a:prstGeom prst="rect">
+            <a:avLst/>
+          </a:prstGeom>
+          <a:noFill/>
+        </p:spPr>
+        <p:txBody>
+          <a:bodyPr wrap="square" lIns="0" rIns="0" tIns="0" bIns="0">
+            <a:spAutoFit/>
+          </a:bodyPr>
+          <a:lstStyle/>
+          <a:p>
+            <a:pPr algn="l">
+              <a:spcBef>
+                <a:spcPts val="0"/>
+              </a:spcBef>
+              <a:spcAft>
+                <a:spcPts val="0"/>
+              </a:spcAft>
+            </a:pPr>
+            <a:r>
+              <a:rPr sz="1250" b="1">
+                <a:solidFill>
+                  <a:srgbClr val="14181D"/>
+                </a:solidFill>
+                <a:latin typeface="Arial"/>
+              </a:rPr>
+              <a:t>Async queue between ingest and evaluation</a:t>
+            </a:r>
+          </a:p>
+        </p:txBody>
+      </p:sp>
+      <p:sp>
+        <p:nvSpPr>
+          <p:cNvPr id="11" name="TextBox 10"/>
+          <p:cNvSpPr txBox="1"/>
+          <p:nvPr/>
+        </p:nvSpPr>
+        <p:spPr>
+          <a:xfrm>
+            <a:off x="1097280" y="2916935"/>
+            <a:ext cx="6309360" cy="512064"/>
+          </a:xfrm>
+          <a:prstGeom prst="rect">
+            <a:avLst/>
+          </a:prstGeom>
+          <a:noFill/>
+        </p:spPr>
+        <p:txBody>
+          <a:bodyPr wrap="square" lIns="0" rIns="0" tIns="0" bIns="0">
+            <a:spAutoFit/>
+          </a:bodyPr>
+          <a:lstStyle/>
+          <a:p>
+            <a:pPr algn="l">
+              <a:lnSpc>
+                <a:spcPct val="124000"/>
+              </a:lnSpc>
+              <a:spcBef>
+                <a:spcPts val="0"/>
+              </a:spcBef>
+              <a:spcAft>
+                <a:spcPts val="0"/>
+              </a:spcAft>
+            </a:pPr>
+            <a:r>
+              <a:rPr sz="1050" b="0">
+                <a:solidFill>
+                  <a:srgbClr val="7C8695"/>
+                </a:solidFill>
+                <a:latin typeface="Arial"/>
+              </a:rPr>
+              <a:t>Accept the transaction, answer 201, and evaluate from a queue — detection leaves the request path, so p95 stays flat as volume grows.</a:t>
+            </a:r>
+          </a:p>
+        </p:txBody>
+      </p:sp>
+      <p:sp>
+        <p:nvSpPr>
+          <p:cNvPr id="12" name="TextBox 11"/>
+          <p:cNvSpPr txBox="1"/>
+          <p:nvPr/>
+        </p:nvSpPr>
+        <p:spPr>
+          <a:xfrm>
+            <a:off x="548640" y="3547872"/>
+            <a:ext cx="457200" cy="274320"/>
+          </a:xfrm>
+          <a:prstGeom prst="rect">
+            <a:avLst/>
+          </a:prstGeom>
+          <a:noFill/>
+        </p:spPr>
+        <p:txBody>
+          <a:bodyPr wrap="square" lIns="0" rIns="0" tIns="0" bIns="0">
+            <a:spAutoFit/>
+          </a:bodyPr>
+          <a:lstStyle/>
+          <a:p>
+            <a:pPr algn="l">
+              <a:spcBef>
+                <a:spcPts val="0"/>
+              </a:spcBef>
+              <a:spcAft>
+                <a:spcPts val="0"/>
+              </a:spcAft>
+            </a:pPr>
+            <a:r>
+              <a:rPr sz="1500" b="1">
+                <a:solidFill>
+                  <a:srgbClr val="C41E3A"/>
+                </a:solidFill>
+                <a:latin typeface="Arial"/>
+              </a:rPr>
+              <a:t>03</a:t>
+            </a:r>
+          </a:p>
+        </p:txBody>
+      </p:sp>
+      <p:sp>
+        <p:nvSpPr>
+          <p:cNvPr id="13" name="TextBox 12"/>
+          <p:cNvSpPr txBox="1"/>
+          <p:nvPr/>
+        </p:nvSpPr>
+        <p:spPr>
+          <a:xfrm>
+            <a:off x="1097280" y="3566160"/>
+            <a:ext cx="6309360" cy="219456"/>
+          </a:xfrm>
+          <a:prstGeom prst="rect">
+            <a:avLst/>
+          </a:prstGeom>
+          <a:noFill/>
+        </p:spPr>
+        <p:txBody>
+          <a:bodyPr wrap="square" lIns="0" rIns="0" tIns="0" bIns="0">
+            <a:spAutoFit/>
+          </a:bodyPr>
+          <a:lstStyle/>
+          <a:p>
+            <a:pPr algn="l">
+              <a:spcBef>
+                <a:spcPts val="0"/>
+              </a:spcBef>
+              <a:spcAft>
+                <a:spcPts val="0"/>
+              </a:spcAft>
+            </a:pPr>
+            <a:r>
+              <a:rPr sz="1250" b="1">
+                <a:solidFill>
+                  <a:srgbClr val="14181D"/>
+                </a:solidFill>
+                <a:latin typeface="Arial"/>
+              </a:rPr>
+              <a:t>Rule engine as its own deployable</a:t>
+            </a:r>
+          </a:p>
+        </p:txBody>
+      </p:sp>
+      <p:sp>
+        <p:nvSpPr>
+          <p:cNvPr id="14" name="TextBox 13"/>
+          <p:cNvSpPr txBox="1"/>
+          <p:nvPr/>
+        </p:nvSpPr>
+        <p:spPr>
+          <a:xfrm>
+            <a:off x="1097280" y="3822191"/>
+            <a:ext cx="6309360" cy="512064"/>
+          </a:xfrm>
+          <a:prstGeom prst="rect">
+            <a:avLst/>
+          </a:prstGeom>
+          <a:noFill/>
+        </p:spPr>
+        <p:txBody>
+          <a:bodyPr wrap="square" lIns="0" rIns="0" tIns="0" bIns="0">
+            <a:spAutoFit/>
+          </a:bodyPr>
+          <a:lstStyle/>
+          <a:p>
+            <a:pPr algn="l">
+              <a:lnSpc>
+                <a:spcPct val="124000"/>
+              </a:lnSpc>
+              <a:spcBef>
+                <a:spcPts val="0"/>
+              </a:spcBef>
+              <a:spcAft>
+                <a:spcPts val="0"/>
+              </a:spcAft>
+            </a:pPr>
+            <a:r>
+              <a:rPr sz="1050" b="0">
+                <a:solidFill>
+                  <a:srgbClr val="7C8695"/>
+                </a:solidFill>
+                <a:latin typeface="Arial"/>
+              </a:rPr>
+              <a:t>The rule package already sits behind one interface. Extract it, run N workers against the queue, and scale detection independently of the API.</a:t>
+            </a:r>
+          </a:p>
+        </p:txBody>
+      </p:sp>
+      <p:sp>
+        <p:nvSpPr>
+          <p:cNvPr id="15" name="TextBox 14"/>
+          <p:cNvSpPr txBox="1"/>
+          <p:nvPr/>
+        </p:nvSpPr>
+        <p:spPr>
+          <a:xfrm>
+            <a:off x="548640" y="4453128"/>
+            <a:ext cx="457200" cy="274320"/>
+          </a:xfrm>
+          <a:prstGeom prst="rect">
+            <a:avLst/>
+          </a:prstGeom>
+          <a:noFill/>
+        </p:spPr>
+        <p:txBody>
+          <a:bodyPr wrap="square" lIns="0" rIns="0" tIns="0" bIns="0">
+            <a:spAutoFit/>
+          </a:bodyPr>
+          <a:lstStyle/>
+          <a:p>
+            <a:pPr algn="l">
+              <a:spcBef>
+                <a:spcPts val="0"/>
+              </a:spcBef>
+              <a:spcAft>
+                <a:spcPts val="0"/>
+              </a:spcAft>
+            </a:pPr>
+            <a:r>
+              <a:rPr sz="1500" b="1">
+                <a:solidFill>
+                  <a:srgbClr val="C41E3A"/>
+                </a:solidFill>
+                <a:latin typeface="Arial"/>
+              </a:rPr>
+              <a:t>04</a:t>
+            </a:r>
+          </a:p>
+        </p:txBody>
+      </p:sp>
+      <p:sp>
+        <p:nvSpPr>
+          <p:cNvPr id="16" name="TextBox 15"/>
+          <p:cNvSpPr txBox="1"/>
+          <p:nvPr/>
+        </p:nvSpPr>
+        <p:spPr>
+          <a:xfrm>
+            <a:off x="1097280" y="4471416"/>
+            <a:ext cx="6309360" cy="219456"/>
+          </a:xfrm>
+          <a:prstGeom prst="rect">
+            <a:avLst/>
+          </a:prstGeom>
+          <a:noFill/>
+        </p:spPr>
+        <p:txBody>
+          <a:bodyPr wrap="square" lIns="0" rIns="0" tIns="0" bIns="0">
+            <a:spAutoFit/>
+          </a:bodyPr>
+          <a:lstStyle/>
+          <a:p>
+            <a:pPr algn="l">
+              <a:spcBef>
+                <a:spcPts val="0"/>
+              </a:spcBef>
+              <a:spcAft>
+                <a:spcPts val="0"/>
+              </a:spcAft>
+            </a:pPr>
+            <a:r>
+              <a:rPr sz="1250" b="1">
+                <a:solidFill>
+                  <a:srgbClr val="14181D"/>
+                </a:solidFill>
+                <a:latin typeface="Arial"/>
+              </a:rPr>
+              <a:t>API keys for ingest validation</a:t>
+            </a:r>
+          </a:p>
+        </p:txBody>
+      </p:sp>
+      <p:sp>
+        <p:nvSpPr>
+          <p:cNvPr id="17" name="TextBox 16"/>
+          <p:cNvSpPr txBox="1"/>
+          <p:nvPr/>
+        </p:nvSpPr>
+        <p:spPr>
+          <a:xfrm>
+            <a:off x="1097280" y="4727448"/>
+            <a:ext cx="6309360" cy="512064"/>
+          </a:xfrm>
+          <a:prstGeom prst="rect">
+            <a:avLst/>
+          </a:prstGeom>
+          <a:noFill/>
+        </p:spPr>
+        <p:txBody>
+          <a:bodyPr wrap="square" lIns="0" rIns="0" tIns="0" bIns="0">
+            <a:spAutoFit/>
+          </a:bodyPr>
+          <a:lstStyle/>
+          <a:p>
+            <a:pPr algn="l">
+              <a:lnSpc>
+                <a:spcPct val="124000"/>
+              </a:lnSpc>
+              <a:spcBef>
+                <a:spcPts val="0"/>
+              </a:spcBef>
+              <a:spcAft>
+                <a:spcPts val="0"/>
+              </a:spcAft>
+            </a:pPr>
+            <a:r>
+              <a:rPr sz="1050" b="0">
+                <a:solidFill>
+                  <a:srgbClr val="7C8695"/>
+                </a:solidFill>
+                <a:latin typeface="Arial"/>
+              </a:rPr>
+              <a:t>Issue a key per bank and merchant feed so /api/v1/transactions authenticates its callers — soft tenancy gets a hard edge.</a:t>
+            </a:r>
+          </a:p>
+        </p:txBody>
+      </p:sp>
+      <p:sp>
+        <p:nvSpPr>
+          <p:cNvPr id="18" name="TextBox 17"/>
+          <p:cNvSpPr txBox="1"/>
+          <p:nvPr/>
+        </p:nvSpPr>
+        <p:spPr>
+          <a:xfrm>
+            <a:off x="548640" y="5358384"/>
+            <a:ext cx="457200" cy="274320"/>
+          </a:xfrm>
+          <a:prstGeom prst="rect">
+            <a:avLst/>
+          </a:prstGeom>
+          <a:noFill/>
+        </p:spPr>
+        <p:txBody>
+          <a:bodyPr wrap="square" lIns="0" rIns="0" tIns="0" bIns="0">
+            <a:spAutoFit/>
+          </a:bodyPr>
+          <a:lstStyle/>
+          <a:p>
+            <a:pPr algn="l">
+              <a:spcBef>
+                <a:spcPts val="0"/>
+              </a:spcBef>
+              <a:spcAft>
+                <a:spcPts val="0"/>
+              </a:spcAft>
+            </a:pPr>
+            <a:r>
+              <a:rPr sz="1500" b="1">
+                <a:solidFill>
+                  <a:srgbClr val="C41E3A"/>
+                </a:solidFill>
+                <a:latin typeface="Arial"/>
+              </a:rPr>
+              <a:t>05</a:t>
+            </a:r>
+          </a:p>
+        </p:txBody>
+      </p:sp>
+      <p:sp>
+        <p:nvSpPr>
+          <p:cNvPr id="19" name="TextBox 18"/>
+          <p:cNvSpPr txBox="1"/>
+          <p:nvPr/>
+        </p:nvSpPr>
+        <p:spPr>
+          <a:xfrm>
+            <a:off x="1097280" y="5376672"/>
+            <a:ext cx="6309360" cy="219456"/>
+          </a:xfrm>
+          <a:prstGeom prst="rect">
+            <a:avLst/>
+          </a:prstGeom>
+          <a:noFill/>
+        </p:spPr>
+        <p:txBody>
+          <a:bodyPr wrap="square" lIns="0" rIns="0" tIns="0" bIns="0">
+            <a:spAutoFit/>
+          </a:bodyPr>
+          <a:lstStyle/>
+          <a:p>
+            <a:pPr algn="l">
+              <a:spcBef>
+                <a:spcPts val="0"/>
+              </a:spcBef>
+              <a:spcAft>
+                <a:spcPts val="0"/>
+              </a:spcAft>
+            </a:pPr>
+            <a:r>
+              <a:rPr sz="1250" b="1">
+                <a:solidFill>
+                  <a:srgbClr val="14181D"/>
+                </a:solidFill>
+                <a:latin typeface="Arial"/>
+              </a:rPr>
+              <a:t>Hardening for real money</a:t>
+            </a:r>
+          </a:p>
+        </p:txBody>
+      </p:sp>
+      <p:sp>
+        <p:nvSpPr>
+          <p:cNvPr id="20" name="TextBox 19"/>
+          <p:cNvSpPr txBox="1"/>
+          <p:nvPr/>
+        </p:nvSpPr>
+        <p:spPr>
+          <a:xfrm>
+            <a:off x="1097280" y="5632704"/>
+            <a:ext cx="6309360" cy="512064"/>
+          </a:xfrm>
+          <a:prstGeom prst="rect">
+            <a:avLst/>
+          </a:prstGeom>
+          <a:noFill/>
+        </p:spPr>
+        <p:txBody>
+          <a:bodyPr wrap="square" lIns="0" rIns="0" tIns="0" bIns="0">
+            <a:spAutoFit/>
+          </a:bodyPr>
+          <a:lstStyle/>
+          <a:p>
+            <a:pPr algn="l">
+              <a:lnSpc>
+                <a:spcPct val="124000"/>
+              </a:lnSpc>
+              <a:spcBef>
+                <a:spcPts val="0"/>
+              </a:spcBef>
+              <a:spcAft>
+                <a:spcPts val="0"/>
+              </a:spcAft>
+            </a:pPr>
+            <a:r>
+              <a:rPr sz="1050" b="0">
+                <a:solidFill>
+                  <a:srgbClr val="7C8695"/>
+                </a:solidFill>
+                <a:latin typeface="Arial"/>
+              </a:rPr>
+              <a:t>TLS end to end, masking of account and payee fields in the UI, and credentials out of source into a secrets manager.</a:t>
+            </a:r>
+          </a:p>
+        </p:txBody>
+      </p:sp>
+      <p:sp>
+        <p:nvSpPr>
+          <p:cNvPr id="21" name="Rounded Rectangle 20"/>
           <p:cNvSpPr/>
           <p:nvPr/>
         </p:nvSpPr>
         <p:spPr>
           <a:xfrm>
-            <a:off x="548640" y="1700784"/>
-            <a:ext cx="3539642" cy="1298448"/>
+            <a:off x="7635240" y="1737360"/>
+            <a:ext cx="4005072" cy="4315968"/>
           </a:xfrm>
           <a:prstGeom prst="roundRect">
             <a:avLst>
-              <a:gd name="adj" fmla="val 4225"/>
+              <a:gd name="adj" fmla="val 1369"/>
             </a:avLst>
           </a:prstGeom>
           <a:solidFill>
@@ -14081,58 +15104,14 @@
       </p:sp>
       <p:sp>
         <p:nvSpPr>
-          <p:cNvPr id="7" name="Rectangle 6"/>
-          <p:cNvSpPr/>
-          <p:nvPr/>
-        </p:nvSpPr>
-        <p:spPr>
-          <a:xfrm>
-            <a:off x="548640" y="1700784"/>
-            <a:ext cx="3539642" cy="45720"/>
-          </a:xfrm>
-          <a:prstGeom prst="rect">
-            <a:avLst/>
-          </a:prstGeom>
-          <a:solidFill>
-            <a:srgbClr val="1B7A3D"/>
-          </a:solidFill>
-          <a:ln>
-            <a:noFill/>
-          </a:ln>
-          <a:effectLst/>
-        </p:spPr>
-        <p:style>
-          <a:lnRef idx="1">
-            <a:schemeClr val="accent1"/>
-          </a:lnRef>
-          <a:fillRef idx="3">
-            <a:schemeClr val="accent1"/>
-          </a:fillRef>
-          <a:effectRef idx="2">
-            <a:schemeClr val="accent1"/>
-          </a:effectRef>
-          <a:fontRef idx="minor">
-            <a:schemeClr val="lt1"/>
-          </a:fontRef>
-        </p:style>
-        <p:txBody>
-          <a:bodyPr rtlCol="0" anchor="ctr"/>
-          <a:lstStyle/>
-          <a:p>
-            <a:pPr algn="ctr"/>
-          </a:p>
-        </p:txBody>
-      </p:sp>
-      <p:sp>
-        <p:nvSpPr>
-          <p:cNvPr id="8" name="TextBox 7"/>
+          <p:cNvPr id="22" name="TextBox 21"/>
           <p:cNvSpPr txBox="1"/>
           <p:nvPr/>
         </p:nvSpPr>
         <p:spPr>
           <a:xfrm>
-            <a:off x="768096" y="1865376"/>
-            <a:ext cx="3173882" cy="182880"/>
+            <a:off x="7836408" y="1865376"/>
+            <a:ext cx="3602736" cy="201168"/>
           </a:xfrm>
           <a:prstGeom prst="rect">
             <a:avLst/>
@@ -14156,159 +15135,33 @@
             <a:r>
               <a:rPr sz="850" b="1" spc="120">
                 <a:solidFill>
-                  <a:srgbClr val="7C8695"/>
+                  <a:srgbClr val="730014"/>
                 </a:solidFill>
                 <a:latin typeface="Arial"/>
               </a:rPr>
-              <a:t>PASS 1  ·  WRITE RAMP</a:t>
-            </a:r>
-          </a:p>
-        </p:txBody>
-      </p:sp>
-      <p:sp>
-        <p:nvSpPr>
-          <p:cNvPr id="9" name="TextBox 8"/>
-          <p:cNvSpPr txBox="1"/>
-          <p:nvPr/>
-        </p:nvSpPr>
-        <p:spPr>
-          <a:xfrm>
-            <a:off x="768096" y="2084831"/>
-            <a:ext cx="1371600" cy="457200"/>
-          </a:xfrm>
-          <a:prstGeom prst="rect">
-            <a:avLst/>
-          </a:prstGeom>
-          <a:noFill/>
-        </p:spPr>
-        <p:txBody>
-          <a:bodyPr wrap="square" lIns="0" rIns="0" tIns="0" bIns="0">
-            <a:spAutoFit/>
-          </a:bodyPr>
-          <a:lstStyle/>
-          <a:p>
-            <a:pPr algn="l">
-              <a:spcBef>
-                <a:spcPts val="0"/>
-              </a:spcBef>
-              <a:spcAft>
-                <a:spcPts val="0"/>
-              </a:spcAft>
-            </a:pPr>
-            <a:r>
-              <a:rPr sz="3000" b="1">
-                <a:solidFill>
-                  <a:srgbClr val="14181D"/>
-                </a:solidFill>
-                <a:latin typeface="Arial"/>
-              </a:rPr>
-              <a:t>234</a:t>
-            </a:r>
-          </a:p>
-        </p:txBody>
-      </p:sp>
-      <p:sp>
-        <p:nvSpPr>
-          <p:cNvPr id="10" name="TextBox 9"/>
-          <p:cNvSpPr txBox="1"/>
-          <p:nvPr/>
-        </p:nvSpPr>
-        <p:spPr>
-          <a:xfrm>
-            <a:off x="1783080" y="2286000"/>
-            <a:ext cx="1463040" cy="219456"/>
-          </a:xfrm>
-          <a:prstGeom prst="rect">
-            <a:avLst/>
-          </a:prstGeom>
-          <a:noFill/>
-        </p:spPr>
-        <p:txBody>
-          <a:bodyPr wrap="square" lIns="0" rIns="0" tIns="0" bIns="0">
-            <a:spAutoFit/>
-          </a:bodyPr>
-          <a:lstStyle/>
-          <a:p>
-            <a:pPr algn="l">
-              <a:spcBef>
-                <a:spcPts val="0"/>
-              </a:spcBef>
-              <a:spcAft>
-                <a:spcPts val="0"/>
-              </a:spcAft>
-            </a:pPr>
-            <a:r>
-              <a:rPr sz="1050" b="0">
-                <a:solidFill>
-                  <a:srgbClr val="7C8695"/>
-                </a:solidFill>
-                <a:latin typeface="Arial"/>
-              </a:rPr>
-              <a:t>requests/sec</a:t>
-            </a:r>
-          </a:p>
-        </p:txBody>
-      </p:sp>
-      <p:sp>
-        <p:nvSpPr>
-          <p:cNvPr id="11" name="TextBox 10"/>
-          <p:cNvSpPr txBox="1"/>
-          <p:nvPr/>
-        </p:nvSpPr>
-        <p:spPr>
-          <a:xfrm>
-            <a:off x="768096" y="2651760"/>
-            <a:ext cx="3173882" cy="219456"/>
-          </a:xfrm>
-          <a:prstGeom prst="rect">
-            <a:avLst/>
-          </a:prstGeom>
-          <a:noFill/>
-        </p:spPr>
-        <p:txBody>
-          <a:bodyPr wrap="square" lIns="0" rIns="0" tIns="0" bIns="0">
-            <a:spAutoFit/>
-          </a:bodyPr>
-          <a:lstStyle/>
-          <a:p>
-            <a:pPr algn="l">
-              <a:spcBef>
-                <a:spcPts val="0"/>
-              </a:spcBef>
-              <a:spcAft>
-                <a:spcPts val="0"/>
-              </a:spcAft>
-            </a:pPr>
-            <a:r>
-              <a:rPr sz="950" b="0">
-                <a:solidFill>
-                  <a:srgbClr val="39414C"/>
-                </a:solidFill>
-                <a:latin typeface="Arial"/>
-              </a:rPr>
-              <a:t>200 VUs  ·  p95 763 ms  ·  0% failed</a:t>
-            </a:r>
-          </a:p>
-        </p:txBody>
-      </p:sp>
-      <p:sp>
-        <p:nvSpPr>
-          <p:cNvPr id="12" name="Rounded Rectangle 11"/>
+              <a:t>TARGET SHAPE  ·  FROM THE ARCHITECTURE SLIDE</a:t>
+            </a:r>
+          </a:p>
+        </p:txBody>
+      </p:sp>
+      <p:sp>
+        <p:nvSpPr>
+          <p:cNvPr id="23" name="Rounded Rectangle 22"/>
           <p:cNvSpPr/>
           <p:nvPr/>
         </p:nvSpPr>
         <p:spPr>
           <a:xfrm>
-            <a:off x="4326026" y="1700784"/>
-            <a:ext cx="3539642" cy="1298448"/>
+            <a:off x="7863840" y="2157984"/>
+            <a:ext cx="3547872" cy="585216"/>
           </a:xfrm>
           <a:prstGeom prst="roundRect">
             <a:avLst>
-              <a:gd name="adj" fmla="val 4225"/>
+              <a:gd name="adj" fmla="val 9375"/>
             </a:avLst>
           </a:prstGeom>
           <a:solidFill>
-            <a:srgbClr val="F4F6F8"/>
+            <a:srgbClr val="FFFFFF"/>
           </a:solidFill>
           <a:ln w="9525">
             <a:solidFill>
@@ -14332,32 +15185,107 @@
           </a:fontRef>
         </p:style>
         <p:txBody>
-          <a:bodyPr rtlCol="0" anchor="ctr"/>
-          <a:lstStyle/>
-          <a:p>
-            <a:pPr algn="ctr"/>
-          </a:p>
-        </p:txBody>
-      </p:sp>
-      <p:sp>
-        <p:nvSpPr>
-          <p:cNvPr id="13" name="Rectangle 12"/>
+          <a:bodyPr rtlCol="0" anchor="ctr" wrap="square" lIns="73152" rIns="73152" tIns="0" bIns="0"/>
+          <a:lstStyle/>
+          <a:p>
+            <a:pPr algn="ctr">
+              <a:spcBef>
+                <a:spcPts val="0"/>
+              </a:spcBef>
+              <a:spcAft>
+                <a:spcPts val="0"/>
+              </a:spcAft>
+            </a:pPr>
+            <a:r>
+              <a:rPr sz="1050" b="1">
+                <a:solidFill>
+                  <a:srgbClr val="14181D"/>
+                </a:solidFill>
+                <a:latin typeface="Arial"/>
+              </a:rPr>
+              <a:t>Spring Boot API  ·  :8081</a:t>
+            </a:r>
+          </a:p>
+          <a:p>
+            <a:pPr algn="ctr">
+              <a:spcBef>
+                <a:spcPts val="200"/>
+              </a:spcBef>
+              <a:spcAft>
+                <a:spcPts val="0"/>
+              </a:spcAft>
+            </a:pPr>
+            <a:r>
+              <a:rPr sz="850" b="0">
+                <a:solidFill>
+                  <a:srgbClr val="7C8695"/>
+                </a:solidFill>
+                <a:latin typeface="Arial"/>
+              </a:rPr>
+              <a:t>accepts, persists, answers 201</a:t>
+            </a:r>
+          </a:p>
+        </p:txBody>
+      </p:sp>
+      <p:cxnSp>
+        <p:nvCxnSpPr>
+          <p:cNvPr id="24" name="Connector 23"/>
+          <p:cNvCxnSpPr/>
+          <p:nvPr/>
+        </p:nvCxnSpPr>
+        <p:spPr>
+          <a:xfrm>
+            <a:off x="9637776" y="2761488"/>
+            <a:ext cx="0" cy="182880"/>
+          </a:xfrm>
+          <a:prstGeom prst="line">
+            <a:avLst/>
+          </a:prstGeom>
+          <a:ln w="12700">
+            <a:solidFill>
+              <a:srgbClr val="7C8695"/>
+            </a:solidFill>
+            <a:tailEnd type="triangle" w="med" len="med"/>
+          </a:ln>
+        </p:spPr>
+        <p:style>
+          <a:lnRef idx="2">
+            <a:schemeClr val="accent1"/>
+          </a:lnRef>
+          <a:fillRef idx="0">
+            <a:schemeClr val="accent1"/>
+          </a:fillRef>
+          <a:effectRef idx="1">
+            <a:schemeClr val="accent1"/>
+          </a:effectRef>
+          <a:fontRef idx="minor">
+            <a:schemeClr val="tx1"/>
+          </a:fontRef>
+        </p:style>
+      </p:cxnSp>
+      <p:sp>
+        <p:nvSpPr>
+          <p:cNvPr id="25" name="Rounded Rectangle 24"/>
           <p:cNvSpPr/>
           <p:nvPr/>
         </p:nvSpPr>
         <p:spPr>
           <a:xfrm>
-            <a:off x="4326026" y="1700784"/>
-            <a:ext cx="3539642" cy="45720"/>
-          </a:xfrm>
-          <a:prstGeom prst="rect">
-            <a:avLst/>
+            <a:off x="7863840" y="2962656"/>
+            <a:ext cx="3547872" cy="585216"/>
+          </a:xfrm>
+          <a:prstGeom prst="roundRect">
+            <a:avLst>
+              <a:gd name="adj" fmla="val 9375"/>
+            </a:avLst>
           </a:prstGeom>
           <a:solidFill>
-            <a:srgbClr val="1B7A3D"/>
+            <a:srgbClr val="730014"/>
           </a:solidFill>
-          <a:ln>
-            <a:noFill/>
+          <a:ln w="9525">
+            <a:solidFill>
+              <a:srgbClr val="730014"/>
+            </a:solidFill>
           </a:ln>
           <a:effectLst/>
         </p:spPr>
@@ -14376,36 +15304,10 @@
           </a:fontRef>
         </p:style>
         <p:txBody>
-          <a:bodyPr rtlCol="0" anchor="ctr"/>
-          <a:lstStyle/>
-          <a:p>
-            <a:pPr algn="ctr"/>
-          </a:p>
-        </p:txBody>
-      </p:sp>
-      <p:sp>
-        <p:nvSpPr>
-          <p:cNvPr id="14" name="TextBox 13"/>
-          <p:cNvSpPr txBox="1"/>
-          <p:nvPr/>
-        </p:nvSpPr>
-        <p:spPr>
-          <a:xfrm>
-            <a:off x="4545482" y="1865376"/>
-            <a:ext cx="3173882" cy="182880"/>
-          </a:xfrm>
-          <a:prstGeom prst="rect">
-            <a:avLst/>
-          </a:prstGeom>
-          <a:noFill/>
-        </p:spPr>
-        <p:txBody>
-          <a:bodyPr wrap="square" lIns="0" rIns="0" tIns="0" bIns="0">
-            <a:spAutoFit/>
-          </a:bodyPr>
-          <a:lstStyle/>
-          <a:p>
-            <a:pPr algn="l">
+          <a:bodyPr rtlCol="0" anchor="ctr" wrap="square" lIns="73152" rIns="73152" tIns="0" bIns="0"/>
+          <a:lstStyle/>
+          <a:p>
+            <a:pPr algn="ctr">
               <a:spcBef>
                 <a:spcPts val="0"/>
               </a:spcBef>
@@ -14414,82 +15316,117 @@
               </a:spcAft>
             </a:pPr>
             <a:r>
-              <a:rPr sz="850" b="1" spc="120">
-                <a:solidFill>
-                  <a:srgbClr val="7C8695"/>
+              <a:rPr sz="1050" b="1">
+                <a:solidFill>
+                  <a:srgbClr val="FFFFFF"/>
                 </a:solidFill>
                 <a:latin typeface="Arial"/>
               </a:rPr>
-              <a:t>PASS 2  ·  MIXED 80/20</a:t>
-            </a:r>
-          </a:p>
-        </p:txBody>
-      </p:sp>
-      <p:sp>
-        <p:nvSpPr>
-          <p:cNvPr id="15" name="TextBox 14"/>
-          <p:cNvSpPr txBox="1"/>
-          <p:nvPr/>
-        </p:nvSpPr>
-        <p:spPr>
-          <a:xfrm>
-            <a:off x="4545482" y="2084831"/>
-            <a:ext cx="1371600" cy="457200"/>
-          </a:xfrm>
-          <a:prstGeom prst="rect">
-            <a:avLst/>
-          </a:prstGeom>
-          <a:noFill/>
-        </p:spPr>
-        <p:txBody>
-          <a:bodyPr wrap="square" lIns="0" rIns="0" tIns="0" bIns="0">
-            <a:spAutoFit/>
-          </a:bodyPr>
-          <a:lstStyle/>
-          <a:p>
-            <a:pPr algn="l">
+              <a:t>MESSAGE QUEUE</a:t>
+            </a:r>
+          </a:p>
+          <a:p>
+            <a:pPr algn="ctr">
               <a:spcBef>
-                <a:spcPts val="0"/>
+                <a:spcPts val="200"/>
               </a:spcBef>
               <a:spcAft>
                 <a:spcPts val="0"/>
               </a:spcAft>
             </a:pPr>
             <a:r>
-              <a:rPr sz="3000" b="1">
-                <a:solidFill>
-                  <a:srgbClr val="14181D"/>
+              <a:rPr sz="850" b="0">
+                <a:solidFill>
+                  <a:srgbClr val="F2D6DB"/>
                 </a:solidFill>
                 <a:latin typeface="Arial"/>
               </a:rPr>
-              <a:t>242</a:t>
-            </a:r>
-          </a:p>
-        </p:txBody>
-      </p:sp>
-      <p:sp>
-        <p:nvSpPr>
-          <p:cNvPr id="16" name="TextBox 15"/>
-          <p:cNvSpPr txBox="1"/>
-          <p:nvPr/>
-        </p:nvSpPr>
-        <p:spPr>
-          <a:xfrm>
-            <a:off x="5560466" y="2286000"/>
-            <a:ext cx="1463040" cy="219456"/>
-          </a:xfrm>
-          <a:prstGeom prst="rect">
-            <a:avLst/>
-          </a:prstGeom>
-          <a:noFill/>
-        </p:spPr>
-        <p:txBody>
-          <a:bodyPr wrap="square" lIns="0" rIns="0" tIns="0" bIns="0">
-            <a:spAutoFit/>
-          </a:bodyPr>
-          <a:lstStyle/>
-          <a:p>
-            <a:pPr algn="l">
+              <a:t>ingest decoupled from detection</a:t>
+            </a:r>
+          </a:p>
+        </p:txBody>
+      </p:sp>
+      <p:cxnSp>
+        <p:nvCxnSpPr>
+          <p:cNvPr id="26" name="Connector 25"/>
+          <p:cNvCxnSpPr/>
+          <p:nvPr/>
+        </p:nvCxnSpPr>
+        <p:spPr>
+          <a:xfrm>
+            <a:off x="9637776" y="3566160"/>
+            <a:ext cx="0" cy="182879"/>
+          </a:xfrm>
+          <a:prstGeom prst="line">
+            <a:avLst/>
+          </a:prstGeom>
+          <a:ln w="12700">
+            <a:solidFill>
+              <a:srgbClr val="7C8695"/>
+            </a:solidFill>
+            <a:tailEnd type="triangle" w="med" len="med"/>
+          </a:ln>
+        </p:spPr>
+        <p:style>
+          <a:lnRef idx="2">
+            <a:schemeClr val="accent1"/>
+          </a:lnRef>
+          <a:fillRef idx="0">
+            <a:schemeClr val="accent1"/>
+          </a:fillRef>
+          <a:effectRef idx="1">
+            <a:schemeClr val="accent1"/>
+          </a:effectRef>
+          <a:fontRef idx="minor">
+            <a:schemeClr val="tx1"/>
+          </a:fontRef>
+        </p:style>
+      </p:cxnSp>
+      <p:sp>
+        <p:nvSpPr>
+          <p:cNvPr id="27" name="Rounded Rectangle 26"/>
+          <p:cNvSpPr/>
+          <p:nvPr/>
+        </p:nvSpPr>
+        <p:spPr>
+          <a:xfrm>
+            <a:off x="7863840" y="3767328"/>
+            <a:ext cx="3547872" cy="585216"/>
+          </a:xfrm>
+          <a:prstGeom prst="roundRect">
+            <a:avLst>
+              <a:gd name="adj" fmla="val 9375"/>
+            </a:avLst>
+          </a:prstGeom>
+          <a:solidFill>
+            <a:srgbClr val="FFFFFF"/>
+          </a:solidFill>
+          <a:ln w="9525">
+            <a:solidFill>
+              <a:srgbClr val="C41E3A"/>
+            </a:solidFill>
+          </a:ln>
+          <a:effectLst/>
+        </p:spPr>
+        <p:style>
+          <a:lnRef idx="1">
+            <a:schemeClr val="accent1"/>
+          </a:lnRef>
+          <a:fillRef idx="3">
+            <a:schemeClr val="accent1"/>
+          </a:fillRef>
+          <a:effectRef idx="2">
+            <a:schemeClr val="accent1"/>
+          </a:effectRef>
+          <a:fontRef idx="minor">
+            <a:schemeClr val="lt1"/>
+          </a:fontRef>
+        </p:style>
+        <p:txBody>
+          <a:bodyPr rtlCol="0" anchor="ctr" wrap="square" lIns="73152" rIns="73152" tIns="0" bIns="0"/>
+          <a:lstStyle/>
+          <a:p>
+            <a:pPr algn="ctr">
               <a:spcBef>
                 <a:spcPts val="0"/>
               </a:spcBef>
@@ -14498,77 +15435,90 @@
               </a:spcAft>
             </a:pPr>
             <a:r>
-              <a:rPr sz="1050" b="0">
-                <a:solidFill>
-                  <a:srgbClr val="7C8695"/>
+              <a:rPr sz="1050" b="1">
+                <a:solidFill>
+                  <a:srgbClr val="C41E3A"/>
                 </a:solidFill>
                 <a:latin typeface="Arial"/>
               </a:rPr>
-              <a:t>requests/sec</a:t>
-            </a:r>
-          </a:p>
-        </p:txBody>
-      </p:sp>
-      <p:sp>
-        <p:nvSpPr>
-          <p:cNvPr id="17" name="TextBox 16"/>
-          <p:cNvSpPr txBox="1"/>
-          <p:nvPr/>
-        </p:nvSpPr>
-        <p:spPr>
-          <a:xfrm>
-            <a:off x="4545482" y="2651760"/>
-            <a:ext cx="3173882" cy="219456"/>
-          </a:xfrm>
-          <a:prstGeom prst="rect">
-            <a:avLst/>
-          </a:prstGeom>
-          <a:noFill/>
-        </p:spPr>
-        <p:txBody>
-          <a:bodyPr wrap="square" lIns="0" rIns="0" tIns="0" bIns="0">
-            <a:spAutoFit/>
-          </a:bodyPr>
-          <a:lstStyle/>
-          <a:p>
-            <a:pPr algn="l">
+              <a:t>Rule workers  ×  N</a:t>
+            </a:r>
+          </a:p>
+          <a:p>
+            <a:pPr algn="ctr">
               <a:spcBef>
-                <a:spcPts val="0"/>
+                <a:spcPts val="200"/>
               </a:spcBef>
               <a:spcAft>
                 <a:spcPts val="0"/>
               </a:spcAft>
             </a:pPr>
             <a:r>
-              <a:rPr sz="950" b="0">
-                <a:solidFill>
-                  <a:srgbClr val="39414C"/>
+              <a:rPr sz="850" b="0">
+                <a:solidFill>
+                  <a:srgbClr val="7C8695"/>
                 </a:solidFill>
                 <a:latin typeface="Arial"/>
               </a:rPr>
-              <a:t>150 VUs  ·  p95 623 ms  ·  0% failed</a:t>
-            </a:r>
-          </a:p>
-        </p:txBody>
-      </p:sp>
-      <p:sp>
-        <p:nvSpPr>
-          <p:cNvPr id="18" name="Rounded Rectangle 17"/>
+              <a:t>extracted RuleEngine, scaled horizontally</a:t>
+            </a:r>
+          </a:p>
+        </p:txBody>
+      </p:sp>
+      <p:cxnSp>
+        <p:nvCxnSpPr>
+          <p:cNvPr id="28" name="Connector 27"/>
+          <p:cNvCxnSpPr/>
+          <p:nvPr/>
+        </p:nvCxnSpPr>
+        <p:spPr>
+          <a:xfrm>
+            <a:off x="9637776" y="4370832"/>
+            <a:ext cx="0" cy="182880"/>
+          </a:xfrm>
+          <a:prstGeom prst="line">
+            <a:avLst/>
+          </a:prstGeom>
+          <a:ln w="12700">
+            <a:solidFill>
+              <a:srgbClr val="7C8695"/>
+            </a:solidFill>
+            <a:tailEnd type="triangle" w="med" len="med"/>
+          </a:ln>
+        </p:spPr>
+        <p:style>
+          <a:lnRef idx="2">
+            <a:schemeClr val="accent1"/>
+          </a:lnRef>
+          <a:fillRef idx="0">
+            <a:schemeClr val="accent1"/>
+          </a:fillRef>
+          <a:effectRef idx="1">
+            <a:schemeClr val="accent1"/>
+          </a:effectRef>
+          <a:fontRef idx="minor">
+            <a:schemeClr val="tx1"/>
+          </a:fontRef>
+        </p:style>
+      </p:cxnSp>
+      <p:sp>
+        <p:nvSpPr>
+          <p:cNvPr id="29" name="Rounded Rectangle 28"/>
           <p:cNvSpPr/>
           <p:nvPr/>
         </p:nvSpPr>
         <p:spPr>
           <a:xfrm>
-            <a:off x="8103412" y="1700784"/>
-            <a:ext cx="3539642" cy="1298448"/>
+            <a:off x="7863840" y="4572000"/>
+            <a:ext cx="3547872" cy="585216"/>
           </a:xfrm>
           <a:prstGeom prst="roundRect">
             <a:avLst>
-              <a:gd name="adj" fmla="val 4225"/>
+              <a:gd name="adj" fmla="val 9375"/>
             </a:avLst>
           </a:prstGeom>
           <a:solidFill>
-            <a:srgbClr val="F4F6F8"/>
+            <a:srgbClr val="FFFFFF"/>
           </a:solidFill>
           <a:ln w="9525">
             <a:solidFill>
@@ -14592,67 +15542,58 @@
           </a:fontRef>
         </p:style>
         <p:txBody>
-          <a:bodyPr rtlCol="0" anchor="ctr"/>
-          <a:lstStyle/>
-          <a:p>
-            <a:pPr algn="ctr"/>
-          </a:p>
-        </p:txBody>
-      </p:sp>
-      <p:sp>
-        <p:nvSpPr>
-          <p:cNvPr id="19" name="Rectangle 18"/>
-          <p:cNvSpPr/>
-          <p:nvPr/>
-        </p:nvSpPr>
-        <p:spPr>
-          <a:xfrm>
-            <a:off x="8103412" y="1700784"/>
-            <a:ext cx="3539642" cy="45720"/>
-          </a:xfrm>
-          <a:prstGeom prst="rect">
-            <a:avLst/>
-          </a:prstGeom>
-          <a:solidFill>
-            <a:srgbClr val="B0590A"/>
-          </a:solidFill>
-          <a:ln>
-            <a:noFill/>
-          </a:ln>
-          <a:effectLst/>
-        </p:spPr>
-        <p:style>
-          <a:lnRef idx="1">
-            <a:schemeClr val="accent1"/>
-          </a:lnRef>
-          <a:fillRef idx="3">
-            <a:schemeClr val="accent1"/>
-          </a:fillRef>
-          <a:effectRef idx="2">
-            <a:schemeClr val="accent1"/>
-          </a:effectRef>
-          <a:fontRef idx="minor">
-            <a:schemeClr val="lt1"/>
-          </a:fontRef>
-        </p:style>
-        <p:txBody>
-          <a:bodyPr rtlCol="0" anchor="ctr"/>
-          <a:lstStyle/>
-          <a:p>
-            <a:pPr algn="ctr"/>
-          </a:p>
-        </p:txBody>
-      </p:sp>
-      <p:sp>
-        <p:nvSpPr>
-          <p:cNvPr id="20" name="TextBox 19"/>
+          <a:bodyPr rtlCol="0" anchor="ctr" wrap="square" lIns="73152" rIns="73152" tIns="0" bIns="0"/>
+          <a:lstStyle/>
+          <a:p>
+            <a:pPr algn="ctr">
+              <a:spcBef>
+                <a:spcPts val="0"/>
+              </a:spcBef>
+              <a:spcAft>
+                <a:spcPts val="0"/>
+              </a:spcAft>
+            </a:pPr>
+            <a:r>
+              <a:rPr sz="1050" b="1">
+                <a:solidFill>
+                  <a:srgbClr val="14181D"/>
+                </a:solidFill>
+                <a:latin typeface="Arial"/>
+              </a:rPr>
+              <a:t>MySQL 8  ·  own VM</a:t>
+            </a:r>
+          </a:p>
+          <a:p>
+            <a:pPr algn="ctr">
+              <a:spcBef>
+                <a:spcPts val="200"/>
+              </a:spcBef>
+              <a:spcAft>
+                <a:spcPts val="0"/>
+              </a:spcAft>
+            </a:pPr>
+            <a:r>
+              <a:rPr sz="850" b="0">
+                <a:solidFill>
+                  <a:srgbClr val="7C8695"/>
+                </a:solidFill>
+                <a:latin typeface="Arial"/>
+              </a:rPr>
+              <a:t>co-location contention gone</a:t>
+            </a:r>
+          </a:p>
+        </p:txBody>
+      </p:sp>
+      <p:sp>
+        <p:nvSpPr>
+          <p:cNvPr id="30" name="TextBox 29"/>
           <p:cNvSpPr txBox="1"/>
           <p:nvPr/>
         </p:nvSpPr>
         <p:spPr>
           <a:xfrm>
-            <a:off x="8322868" y="1865376"/>
-            <a:ext cx="3173882" cy="182880"/>
+            <a:off x="7863840" y="5394959"/>
+            <a:ext cx="3547872" cy="658368"/>
           </a:xfrm>
           <a:prstGeom prst="rect">
             <a:avLst/>
@@ -14666,6 +15607,9 @@
           <a:lstStyle/>
           <a:p>
             <a:pPr algn="l">
+              <a:lnSpc>
+                <a:spcPct val="122000"/>
+              </a:lnSpc>
               <a:spcBef>
                 <a:spcPts val="0"/>
               </a:spcBef>
@@ -14674,437 +15618,13 @@
               </a:spcAft>
             </a:pPr>
             <a:r>
-              <a:rPr sz="850" b="1" spc="120">
+              <a:rPr sz="900" b="0">
                 <a:solidFill>
                   <a:srgbClr val="7C8695"/>
                 </a:solidFill>
                 <a:latin typeface="Arial"/>
               </a:rPr>
-              <a:t>PASS 3  ·  10-MINUTE SOAK</a:t>
-            </a:r>
-          </a:p>
-        </p:txBody>
-      </p:sp>
-      <p:sp>
-        <p:nvSpPr>
-          <p:cNvPr id="21" name="TextBox 20"/>
-          <p:cNvSpPr txBox="1"/>
-          <p:nvPr/>
-        </p:nvSpPr>
-        <p:spPr>
-          <a:xfrm>
-            <a:off x="8322868" y="2084831"/>
-            <a:ext cx="1371600" cy="457200"/>
-          </a:xfrm>
-          <a:prstGeom prst="rect">
-            <a:avLst/>
-          </a:prstGeom>
-          <a:noFill/>
-        </p:spPr>
-        <p:txBody>
-          <a:bodyPr wrap="square" lIns="0" rIns="0" tIns="0" bIns="0">
-            <a:spAutoFit/>
-          </a:bodyPr>
-          <a:lstStyle/>
-          <a:p>
-            <a:pPr algn="l">
-              <a:spcBef>
-                <a:spcPts val="0"/>
-              </a:spcBef>
-              <a:spcAft>
-                <a:spcPts val="0"/>
-              </a:spcAft>
-            </a:pPr>
-            <a:r>
-              <a:rPr sz="3000" b="1">
-                <a:solidFill>
-                  <a:srgbClr val="14181D"/>
-                </a:solidFill>
-                <a:latin typeface="Arial"/>
-              </a:rPr>
-              <a:t>214</a:t>
-            </a:r>
-          </a:p>
-        </p:txBody>
-      </p:sp>
-      <p:sp>
-        <p:nvSpPr>
-          <p:cNvPr id="22" name="TextBox 21"/>
-          <p:cNvSpPr txBox="1"/>
-          <p:nvPr/>
-        </p:nvSpPr>
-        <p:spPr>
-          <a:xfrm>
-            <a:off x="9337852" y="2286000"/>
-            <a:ext cx="1463040" cy="219456"/>
-          </a:xfrm>
-          <a:prstGeom prst="rect">
-            <a:avLst/>
-          </a:prstGeom>
-          <a:noFill/>
-        </p:spPr>
-        <p:txBody>
-          <a:bodyPr wrap="square" lIns="0" rIns="0" tIns="0" bIns="0">
-            <a:spAutoFit/>
-          </a:bodyPr>
-          <a:lstStyle/>
-          <a:p>
-            <a:pPr algn="l">
-              <a:spcBef>
-                <a:spcPts val="0"/>
-              </a:spcBef>
-              <a:spcAft>
-                <a:spcPts val="0"/>
-              </a:spcAft>
-            </a:pPr>
-            <a:r>
-              <a:rPr sz="1050" b="0">
-                <a:solidFill>
-                  <a:srgbClr val="7C8695"/>
-                </a:solidFill>
-                <a:latin typeface="Arial"/>
-              </a:rPr>
-              <a:t>requests/sec</a:t>
-            </a:r>
-          </a:p>
-        </p:txBody>
-      </p:sp>
-      <p:sp>
-        <p:nvSpPr>
-          <p:cNvPr id="23" name="TextBox 22"/>
-          <p:cNvSpPr txBox="1"/>
-          <p:nvPr/>
-        </p:nvSpPr>
-        <p:spPr>
-          <a:xfrm>
-            <a:off x="8322868" y="2651760"/>
-            <a:ext cx="3173882" cy="219456"/>
-          </a:xfrm>
-          <a:prstGeom prst="rect">
-            <a:avLst/>
-          </a:prstGeom>
-          <a:noFill/>
-        </p:spPr>
-        <p:txBody>
-          <a:bodyPr wrap="square" lIns="0" rIns="0" tIns="0" bIns="0">
-            <a:spAutoFit/>
-          </a:bodyPr>
-          <a:lstStyle/>
-          <a:p>
-            <a:pPr algn="l">
-              <a:spcBef>
-                <a:spcPts val="0"/>
-              </a:spcBef>
-              <a:spcAft>
-                <a:spcPts val="0"/>
-              </a:spcAft>
-            </a:pPr>
-            <a:r>
-              <a:rPr sz="950" b="0">
-                <a:solidFill>
-                  <a:srgbClr val="39414C"/>
-                </a:solidFill>
-                <a:latin typeface="Arial"/>
-              </a:rPr>
-              <a:t>140 VUs  ·  p95 1.13 s  ·  0.09% failed</a:t>
-            </a:r>
-          </a:p>
-        </p:txBody>
-      </p:sp>
-      <p:sp>
-        <p:nvSpPr>
-          <p:cNvPr id="24" name="TextBox 23"/>
-          <p:cNvSpPr txBox="1"/>
-          <p:nvPr/>
-        </p:nvSpPr>
-        <p:spPr>
-          <a:xfrm>
-            <a:off x="548640" y="3218688"/>
-            <a:ext cx="4023360" cy="201168"/>
-          </a:xfrm>
-          <a:prstGeom prst="rect">
-            <a:avLst/>
-          </a:prstGeom>
-          <a:noFill/>
-        </p:spPr>
-        <p:txBody>
-          <a:bodyPr wrap="square" lIns="0" rIns="0" tIns="0" bIns="0">
-            <a:spAutoFit/>
-          </a:bodyPr>
-          <a:lstStyle/>
-          <a:p>
-            <a:pPr algn="l">
-              <a:spcBef>
-                <a:spcPts val="0"/>
-              </a:spcBef>
-              <a:spcAft>
-                <a:spcPts val="0"/>
-              </a:spcAft>
-            </a:pPr>
-            <a:r>
-              <a:rPr sz="900" b="1" spc="130">
-                <a:solidFill>
-                  <a:srgbClr val="C41E3A"/>
-                </a:solidFill>
-                <a:latin typeface="Arial"/>
-              </a:rPr>
-              <a:t>p95 LATENCY BY PASS  (ms)</a:t>
-            </a:r>
-          </a:p>
-        </p:txBody>
-      </p:sp>
-      <p:sp>
-        <p:nvSpPr>
-          <p:cNvPr id="25" name="Rectangle 24"/>
-          <p:cNvSpPr/>
-          <p:nvPr/>
-        </p:nvSpPr>
-        <p:spPr>
-          <a:xfrm>
-            <a:off x="640080" y="4197050"/>
-            <a:ext cx="868680" cy="941877"/>
-          </a:xfrm>
-          <a:prstGeom prst="rect">
-            <a:avLst/>
-          </a:prstGeom>
-          <a:solidFill>
-            <a:srgbClr val="730014"/>
-          </a:solidFill>
-          <a:ln>
-            <a:noFill/>
-          </a:ln>
-          <a:effectLst/>
-        </p:spPr>
-        <p:style>
-          <a:lnRef idx="1">
-            <a:schemeClr val="accent1"/>
-          </a:lnRef>
-          <a:fillRef idx="3">
-            <a:schemeClr val="accent1"/>
-          </a:fillRef>
-          <a:effectRef idx="2">
-            <a:schemeClr val="accent1"/>
-          </a:effectRef>
-          <a:fontRef idx="minor">
-            <a:schemeClr val="lt1"/>
-          </a:fontRef>
-        </p:style>
-        <p:txBody>
-          <a:bodyPr rtlCol="0" anchor="ctr"/>
-          <a:lstStyle/>
-          <a:p>
-            <a:pPr algn="ctr"/>
-          </a:p>
-        </p:txBody>
-      </p:sp>
-      <p:sp>
-        <p:nvSpPr>
-          <p:cNvPr id="26" name="TextBox 25"/>
-          <p:cNvSpPr txBox="1"/>
-          <p:nvPr/>
-        </p:nvSpPr>
-        <p:spPr>
-          <a:xfrm>
-            <a:off x="457199" y="3959306"/>
-            <a:ext cx="1234440" cy="201168"/>
-          </a:xfrm>
-          <a:prstGeom prst="rect">
-            <a:avLst/>
-          </a:prstGeom>
-          <a:noFill/>
-        </p:spPr>
-        <p:txBody>
-          <a:bodyPr wrap="square" lIns="0" rIns="0" tIns="0" bIns="0">
-            <a:spAutoFit/>
-          </a:bodyPr>
-          <a:lstStyle/>
-          <a:p>
-            <a:pPr algn="ctr">
-              <a:spcBef>
-                <a:spcPts val="0"/>
-              </a:spcBef>
-              <a:spcAft>
-                <a:spcPts val="0"/>
-              </a:spcAft>
-            </a:pPr>
-            <a:r>
-              <a:rPr sz="1000" b="1">
-                <a:solidFill>
-                  <a:srgbClr val="14181D"/>
-                </a:solidFill>
-                <a:latin typeface="Arial"/>
-              </a:rPr>
-              <a:t>763</a:t>
-            </a:r>
-          </a:p>
-        </p:txBody>
-      </p:sp>
-      <p:sp>
-        <p:nvSpPr>
-          <p:cNvPr id="27" name="TextBox 26"/>
-          <p:cNvSpPr txBox="1"/>
-          <p:nvPr/>
-        </p:nvSpPr>
-        <p:spPr>
-          <a:xfrm>
-            <a:off x="457199" y="5202936"/>
-            <a:ext cx="1234440" cy="182880"/>
-          </a:xfrm>
-          <a:prstGeom prst="rect">
-            <a:avLst/>
-          </a:prstGeom>
-          <a:noFill/>
-        </p:spPr>
-        <p:txBody>
-          <a:bodyPr wrap="square" lIns="0" rIns="0" tIns="0" bIns="0">
-            <a:spAutoFit/>
-          </a:bodyPr>
-          <a:lstStyle/>
-          <a:p>
-            <a:pPr algn="ctr">
-              <a:spcBef>
-                <a:spcPts val="0"/>
-              </a:spcBef>
-              <a:spcAft>
-                <a:spcPts val="0"/>
-              </a:spcAft>
-            </a:pPr>
-            <a:r>
-              <a:rPr sz="900" b="0">
-                <a:solidFill>
-                  <a:srgbClr val="7C8695"/>
-                </a:solidFill>
-                <a:latin typeface="Arial"/>
-              </a:rPr>
-              <a:t>Pass 1</a:t>
-            </a:r>
-          </a:p>
-        </p:txBody>
-      </p:sp>
-      <p:sp>
-        <p:nvSpPr>
-          <p:cNvPr id="28" name="Rectangle 27"/>
-          <p:cNvSpPr/>
-          <p:nvPr/>
-        </p:nvSpPr>
-        <p:spPr>
-          <a:xfrm>
-            <a:off x="1938528" y="4369871"/>
-            <a:ext cx="868680" cy="769056"/>
-          </a:xfrm>
-          <a:prstGeom prst="rect">
-            <a:avLst/>
-          </a:prstGeom>
-          <a:solidFill>
-            <a:srgbClr val="730014"/>
-          </a:solidFill>
-          <a:ln>
-            <a:noFill/>
-          </a:ln>
-          <a:effectLst/>
-        </p:spPr>
-        <p:style>
-          <a:lnRef idx="1">
-            <a:schemeClr val="accent1"/>
-          </a:lnRef>
-          <a:fillRef idx="3">
-            <a:schemeClr val="accent1"/>
-          </a:fillRef>
-          <a:effectRef idx="2">
-            <a:schemeClr val="accent1"/>
-          </a:effectRef>
-          <a:fontRef idx="minor">
-            <a:schemeClr val="lt1"/>
-          </a:fontRef>
-        </p:style>
-        <p:txBody>
-          <a:bodyPr rtlCol="0" anchor="ctr"/>
-          <a:lstStyle/>
-          <a:p>
-            <a:pPr algn="ctr"/>
-          </a:p>
-        </p:txBody>
-      </p:sp>
-      <p:sp>
-        <p:nvSpPr>
-          <p:cNvPr id="29" name="TextBox 28"/>
-          <p:cNvSpPr txBox="1"/>
-          <p:nvPr/>
-        </p:nvSpPr>
-        <p:spPr>
-          <a:xfrm>
-            <a:off x="1755648" y="4132127"/>
-            <a:ext cx="1234440" cy="201168"/>
-          </a:xfrm>
-          <a:prstGeom prst="rect">
-            <a:avLst/>
-          </a:prstGeom>
-          <a:noFill/>
-        </p:spPr>
-        <p:txBody>
-          <a:bodyPr wrap="square" lIns="0" rIns="0" tIns="0" bIns="0">
-            <a:spAutoFit/>
-          </a:bodyPr>
-          <a:lstStyle/>
-          <a:p>
-            <a:pPr algn="ctr">
-              <a:spcBef>
-                <a:spcPts val="0"/>
-              </a:spcBef>
-              <a:spcAft>
-                <a:spcPts val="0"/>
-              </a:spcAft>
-            </a:pPr>
-            <a:r>
-              <a:rPr sz="1000" b="1">
-                <a:solidFill>
-                  <a:srgbClr val="14181D"/>
-                </a:solidFill>
-                <a:latin typeface="Arial"/>
-              </a:rPr>
-              <a:t>623</a:t>
-            </a:r>
-          </a:p>
-        </p:txBody>
-      </p:sp>
-      <p:sp>
-        <p:nvSpPr>
-          <p:cNvPr id="30" name="TextBox 29"/>
-          <p:cNvSpPr txBox="1"/>
-          <p:nvPr/>
-        </p:nvSpPr>
-        <p:spPr>
-          <a:xfrm>
-            <a:off x="1755648" y="5202936"/>
-            <a:ext cx="1234440" cy="182880"/>
-          </a:xfrm>
-          <a:prstGeom prst="rect">
-            <a:avLst/>
-          </a:prstGeom>
-          <a:noFill/>
-        </p:spPr>
-        <p:txBody>
-          <a:bodyPr wrap="square" lIns="0" rIns="0" tIns="0" bIns="0">
-            <a:spAutoFit/>
-          </a:bodyPr>
-          <a:lstStyle/>
-          <a:p>
-            <a:pPr algn="ctr">
-              <a:spcBef>
-                <a:spcPts val="0"/>
-              </a:spcBef>
-              <a:spcAft>
-                <a:spcPts val="0"/>
-              </a:spcAft>
-            </a:pPr>
-            <a:r>
-              <a:rPr sz="900" b="0">
-                <a:solidFill>
-                  <a:srgbClr val="7C8695"/>
-                </a:solidFill>
-                <a:latin typeface="Arial"/>
-              </a:rPr>
-              <a:t>Pass 2</a:t>
+              <a:t>Same Rule interface as today — extraction is the seam highlighted on the architecture slide, and the monolith keeps an internal alert-creation endpoint.</a:t>
             </a:r>
           </a:p>
         </p:txBody>
@@ -15117,136 +15637,8 @@
         </p:nvSpPr>
         <p:spPr>
           <a:xfrm>
-            <a:off x="3236976" y="3744010"/>
-            <a:ext cx="868680" cy="1394917"/>
-          </a:xfrm>
-          <a:prstGeom prst="rect">
-            <a:avLst/>
-          </a:prstGeom>
-          <a:solidFill>
-            <a:srgbClr val="B0590A"/>
-          </a:solidFill>
-          <a:ln>
-            <a:noFill/>
-          </a:ln>
-          <a:effectLst/>
-        </p:spPr>
-        <p:style>
-          <a:lnRef idx="1">
-            <a:schemeClr val="accent1"/>
-          </a:lnRef>
-          <a:fillRef idx="3">
-            <a:schemeClr val="accent1"/>
-          </a:fillRef>
-          <a:effectRef idx="2">
-            <a:schemeClr val="accent1"/>
-          </a:effectRef>
-          <a:fontRef idx="minor">
-            <a:schemeClr val="lt1"/>
-          </a:fontRef>
-        </p:style>
-        <p:txBody>
-          <a:bodyPr rtlCol="0" anchor="ctr"/>
-          <a:lstStyle/>
-          <a:p>
-            <a:pPr algn="ctr"/>
-          </a:p>
-        </p:txBody>
-      </p:sp>
-      <p:sp>
-        <p:nvSpPr>
-          <p:cNvPr id="32" name="TextBox 31"/>
-          <p:cNvSpPr txBox="1"/>
-          <p:nvPr/>
-        </p:nvSpPr>
-        <p:spPr>
-          <a:xfrm>
-            <a:off x="3054096" y="3506266"/>
-            <a:ext cx="1234440" cy="201168"/>
-          </a:xfrm>
-          <a:prstGeom prst="rect">
-            <a:avLst/>
-          </a:prstGeom>
-          <a:noFill/>
-        </p:spPr>
-        <p:txBody>
-          <a:bodyPr wrap="square" lIns="0" rIns="0" tIns="0" bIns="0">
-            <a:spAutoFit/>
-          </a:bodyPr>
-          <a:lstStyle/>
-          <a:p>
-            <a:pPr algn="ctr">
-              <a:spcBef>
-                <a:spcPts val="0"/>
-              </a:spcBef>
-              <a:spcAft>
-                <a:spcPts val="0"/>
-              </a:spcAft>
-            </a:pPr>
-            <a:r>
-              <a:rPr sz="1000" b="1">
-                <a:solidFill>
-                  <a:srgbClr val="14181D"/>
-                </a:solidFill>
-                <a:latin typeface="Arial"/>
-              </a:rPr>
-              <a:t>1,130</a:t>
-            </a:r>
-          </a:p>
-        </p:txBody>
-      </p:sp>
-      <p:sp>
-        <p:nvSpPr>
-          <p:cNvPr id="33" name="TextBox 32"/>
-          <p:cNvSpPr txBox="1"/>
-          <p:nvPr/>
-        </p:nvSpPr>
-        <p:spPr>
-          <a:xfrm>
-            <a:off x="3054096" y="5202936"/>
-            <a:ext cx="1234440" cy="182880"/>
-          </a:xfrm>
-          <a:prstGeom prst="rect">
-            <a:avLst/>
-          </a:prstGeom>
-          <a:noFill/>
-        </p:spPr>
-        <p:txBody>
-          <a:bodyPr wrap="square" lIns="0" rIns="0" tIns="0" bIns="0">
-            <a:spAutoFit/>
-          </a:bodyPr>
-          <a:lstStyle/>
-          <a:p>
-            <a:pPr algn="ctr">
-              <a:spcBef>
-                <a:spcPts val="0"/>
-              </a:spcBef>
-              <a:spcAft>
-                <a:spcPts val="0"/>
-              </a:spcAft>
-            </a:pPr>
-            <a:r>
-              <a:rPr sz="900" b="0">
-                <a:solidFill>
-                  <a:srgbClr val="7C8695"/>
-                </a:solidFill>
-                <a:latin typeface="Arial"/>
-              </a:rPr>
-              <a:t>Pass 3</a:t>
-            </a:r>
-          </a:p>
-        </p:txBody>
-      </p:sp>
-      <p:sp>
-        <p:nvSpPr>
-          <p:cNvPr id="34" name="Rectangle 33"/>
-          <p:cNvSpPr/>
-          <p:nvPr/>
-        </p:nvSpPr>
-        <p:spPr>
-          <a:xfrm>
-            <a:off x="548640" y="5138928"/>
-            <a:ext cx="3977639" cy="10972"/>
+            <a:off x="548640" y="6391656"/>
+            <a:ext cx="11094415" cy="10972"/>
           </a:xfrm>
           <a:prstGeom prst="rect">
             <a:avLst/>
@@ -15283,14 +15675,14 @@
       </p:sp>
       <p:sp>
         <p:nvSpPr>
-          <p:cNvPr id="35" name="TextBox 34"/>
+          <p:cNvPr id="32" name="TextBox 31"/>
           <p:cNvSpPr txBox="1"/>
           <p:nvPr/>
         </p:nvSpPr>
         <p:spPr>
           <a:xfrm>
-            <a:off x="4800600" y="3218688"/>
-            <a:ext cx="3749039" cy="201168"/>
+            <a:off x="548640" y="6473952"/>
+            <a:ext cx="7315200" cy="219456"/>
           </a:xfrm>
           <a:prstGeom prst="rect">
             <a:avLst/>
@@ -15312,1356 +15704,20 @@
               </a:spcAft>
             </a:pPr>
             <a:r>
-              <a:rPr sz="900" b="1" spc="130">
-                <a:solidFill>
-                  <a:srgbClr val="C41E3A"/>
+              <a:rPr sz="900" b="0">
+                <a:solidFill>
+                  <a:srgbClr val="7C8695"/>
                 </a:solidFill>
                 <a:latin typeface="Arial"/>
               </a:rPr>
-              <a:t>rule.evaluate MEAN  (ms)</a:t>
-            </a:r>
-          </a:p>
-        </p:txBody>
-      </p:sp>
-      <p:sp>
-        <p:nvSpPr>
-          <p:cNvPr id="36" name="Rectangle 35"/>
-          <p:cNvSpPr/>
-          <p:nvPr/>
-        </p:nvSpPr>
-        <p:spPr>
-          <a:xfrm>
-            <a:off x="4892040" y="4535815"/>
-            <a:ext cx="621792" cy="603112"/>
-          </a:xfrm>
-          <a:prstGeom prst="rect">
-            <a:avLst/>
-          </a:prstGeom>
-          <a:solidFill>
-            <a:srgbClr val="C41E3A"/>
-          </a:solidFill>
-          <a:ln>
-            <a:noFill/>
-          </a:ln>
-          <a:effectLst/>
-        </p:spPr>
-        <p:style>
-          <a:lnRef idx="1">
-            <a:schemeClr val="accent1"/>
-          </a:lnRef>
-          <a:fillRef idx="3">
-            <a:schemeClr val="accent1"/>
-          </a:fillRef>
-          <a:effectRef idx="2">
-            <a:schemeClr val="accent1"/>
-          </a:effectRef>
-          <a:fontRef idx="minor">
-            <a:schemeClr val="lt1"/>
-          </a:fontRef>
-        </p:style>
-        <p:txBody>
-          <a:bodyPr rtlCol="0" anchor="ctr"/>
-          <a:lstStyle/>
-          <a:p>
-            <a:pPr algn="ctr"/>
-          </a:p>
-        </p:txBody>
-      </p:sp>
-      <p:sp>
-        <p:nvSpPr>
-          <p:cNvPr id="37" name="TextBox 36"/>
-          <p:cNvSpPr txBox="1"/>
-          <p:nvPr/>
-        </p:nvSpPr>
-        <p:spPr>
-          <a:xfrm>
-            <a:off x="4745736" y="4298071"/>
-            <a:ext cx="914400" cy="201168"/>
-          </a:xfrm>
-          <a:prstGeom prst="rect">
-            <a:avLst/>
-          </a:prstGeom>
-          <a:noFill/>
-        </p:spPr>
-        <p:txBody>
-          <a:bodyPr wrap="square" lIns="0" rIns="0" tIns="0" bIns="0">
-            <a:spAutoFit/>
-          </a:bodyPr>
-          <a:lstStyle/>
-          <a:p>
-            <a:pPr algn="ctr">
-              <a:spcBef>
-                <a:spcPts val="0"/>
-              </a:spcBef>
-              <a:spcAft>
-                <a:spcPts val="0"/>
-              </a:spcAft>
-            </a:pPr>
-            <a:r>
-              <a:rPr sz="1000" b="1">
-                <a:solidFill>
-                  <a:srgbClr val="14181D"/>
-                </a:solidFill>
-                <a:latin typeface="Arial"/>
-              </a:rPr>
-              <a:t>57</a:t>
-            </a:r>
-          </a:p>
-        </p:txBody>
-      </p:sp>
-      <p:sp>
-        <p:nvSpPr>
-          <p:cNvPr id="38" name="TextBox 37"/>
-          <p:cNvSpPr txBox="1"/>
-          <p:nvPr/>
-        </p:nvSpPr>
-        <p:spPr>
-          <a:xfrm>
-            <a:off x="4745736" y="5202936"/>
-            <a:ext cx="914400" cy="182880"/>
-          </a:xfrm>
-          <a:prstGeom prst="rect">
-            <a:avLst/>
-          </a:prstGeom>
-          <a:noFill/>
-        </p:spPr>
-        <p:txBody>
-          <a:bodyPr wrap="square" lIns="0" rIns="0" tIns="0" bIns="0">
-            <a:spAutoFit/>
-          </a:bodyPr>
-          <a:lstStyle/>
-          <a:p>
-            <a:pPr algn="ctr">
-              <a:spcBef>
-                <a:spcPts val="0"/>
-              </a:spcBef>
-              <a:spcAft>
-                <a:spcPts val="0"/>
-              </a:spcAft>
-            </a:pPr>
-            <a:r>
-              <a:rPr sz="850" b="0">
-                <a:solidFill>
-                  <a:srgbClr val="7C8695"/>
-                </a:solidFill>
-                <a:latin typeface="Arial"/>
-              </a:rPr>
-              <a:t>after P1</a:t>
-            </a:r>
-          </a:p>
-        </p:txBody>
-      </p:sp>
-      <p:sp>
-        <p:nvSpPr>
-          <p:cNvPr id="39" name="Rectangle 38"/>
-          <p:cNvSpPr/>
-          <p:nvPr/>
-        </p:nvSpPr>
-        <p:spPr>
-          <a:xfrm>
-            <a:off x="5824727" y="4578139"/>
-            <a:ext cx="621792" cy="560788"/>
-          </a:xfrm>
-          <a:prstGeom prst="rect">
-            <a:avLst/>
-          </a:prstGeom>
-          <a:solidFill>
-            <a:srgbClr val="C41E3A"/>
-          </a:solidFill>
-          <a:ln>
-            <a:noFill/>
-          </a:ln>
-          <a:effectLst/>
-        </p:spPr>
-        <p:style>
-          <a:lnRef idx="1">
-            <a:schemeClr val="accent1"/>
-          </a:lnRef>
-          <a:fillRef idx="3">
-            <a:schemeClr val="accent1"/>
-          </a:fillRef>
-          <a:effectRef idx="2">
-            <a:schemeClr val="accent1"/>
-          </a:effectRef>
-          <a:fontRef idx="minor">
-            <a:schemeClr val="lt1"/>
-          </a:fontRef>
-        </p:style>
-        <p:txBody>
-          <a:bodyPr rtlCol="0" anchor="ctr"/>
-          <a:lstStyle/>
-          <a:p>
-            <a:pPr algn="ctr"/>
-          </a:p>
-        </p:txBody>
-      </p:sp>
-      <p:sp>
-        <p:nvSpPr>
-          <p:cNvPr id="40" name="TextBox 39"/>
-          <p:cNvSpPr txBox="1"/>
-          <p:nvPr/>
-        </p:nvSpPr>
-        <p:spPr>
-          <a:xfrm>
-            <a:off x="5678423" y="4340395"/>
-            <a:ext cx="914400" cy="201168"/>
-          </a:xfrm>
-          <a:prstGeom prst="rect">
-            <a:avLst/>
-          </a:prstGeom>
-          <a:noFill/>
-        </p:spPr>
-        <p:txBody>
-          <a:bodyPr wrap="square" lIns="0" rIns="0" tIns="0" bIns="0">
-            <a:spAutoFit/>
-          </a:bodyPr>
-          <a:lstStyle/>
-          <a:p>
-            <a:pPr algn="ctr">
-              <a:spcBef>
-                <a:spcPts val="0"/>
-              </a:spcBef>
-              <a:spcAft>
-                <a:spcPts val="0"/>
-              </a:spcAft>
-            </a:pPr>
-            <a:r>
-              <a:rPr sz="1000" b="1">
-                <a:solidFill>
-                  <a:srgbClr val="14181D"/>
-                </a:solidFill>
-                <a:latin typeface="Arial"/>
-              </a:rPr>
-              <a:t>53</a:t>
-            </a:r>
-          </a:p>
-        </p:txBody>
-      </p:sp>
-      <p:sp>
-        <p:nvSpPr>
-          <p:cNvPr id="41" name="TextBox 40"/>
-          <p:cNvSpPr txBox="1"/>
-          <p:nvPr/>
-        </p:nvSpPr>
-        <p:spPr>
-          <a:xfrm>
-            <a:off x="5678423" y="5202936"/>
-            <a:ext cx="914400" cy="182880"/>
-          </a:xfrm>
-          <a:prstGeom prst="rect">
-            <a:avLst/>
-          </a:prstGeom>
-          <a:noFill/>
-        </p:spPr>
-        <p:txBody>
-          <a:bodyPr wrap="square" lIns="0" rIns="0" tIns="0" bIns="0">
-            <a:spAutoFit/>
-          </a:bodyPr>
-          <a:lstStyle/>
-          <a:p>
-            <a:pPr algn="ctr">
-              <a:spcBef>
-                <a:spcPts val="0"/>
-              </a:spcBef>
-              <a:spcAft>
-                <a:spcPts val="0"/>
-              </a:spcAft>
-            </a:pPr>
-            <a:r>
-              <a:rPr sz="850" b="0">
-                <a:solidFill>
-                  <a:srgbClr val="7C8695"/>
-                </a:solidFill>
-                <a:latin typeface="Arial"/>
-              </a:rPr>
-              <a:t>after P2</a:t>
-            </a:r>
-          </a:p>
-        </p:txBody>
-      </p:sp>
-      <p:sp>
-        <p:nvSpPr>
-          <p:cNvPr id="42" name="Rectangle 41"/>
-          <p:cNvSpPr/>
-          <p:nvPr/>
-        </p:nvSpPr>
-        <p:spPr>
-          <a:xfrm>
-            <a:off x="6757416" y="4176064"/>
-            <a:ext cx="621792" cy="962863"/>
-          </a:xfrm>
-          <a:prstGeom prst="rect">
-            <a:avLst/>
-          </a:prstGeom>
-          <a:solidFill>
-            <a:srgbClr val="B0590A"/>
-          </a:solidFill>
-          <a:ln>
-            <a:noFill/>
-          </a:ln>
-          <a:effectLst/>
-        </p:spPr>
-        <p:style>
-          <a:lnRef idx="1">
-            <a:schemeClr val="accent1"/>
-          </a:lnRef>
-          <a:fillRef idx="3">
-            <a:schemeClr val="accent1"/>
-          </a:fillRef>
-          <a:effectRef idx="2">
-            <a:schemeClr val="accent1"/>
-          </a:effectRef>
-          <a:fontRef idx="minor">
-            <a:schemeClr val="lt1"/>
-          </a:fontRef>
-        </p:style>
-        <p:txBody>
-          <a:bodyPr rtlCol="0" anchor="ctr"/>
-          <a:lstStyle/>
-          <a:p>
-            <a:pPr algn="ctr"/>
-          </a:p>
-        </p:txBody>
-      </p:sp>
-      <p:sp>
-        <p:nvSpPr>
-          <p:cNvPr id="43" name="TextBox 42"/>
-          <p:cNvSpPr txBox="1"/>
-          <p:nvPr/>
-        </p:nvSpPr>
-        <p:spPr>
-          <a:xfrm>
-            <a:off x="6611112" y="3938320"/>
-            <a:ext cx="914400" cy="201168"/>
-          </a:xfrm>
-          <a:prstGeom prst="rect">
-            <a:avLst/>
-          </a:prstGeom>
-          <a:noFill/>
-        </p:spPr>
-        <p:txBody>
-          <a:bodyPr wrap="square" lIns="0" rIns="0" tIns="0" bIns="0">
-            <a:spAutoFit/>
-          </a:bodyPr>
-          <a:lstStyle/>
-          <a:p>
-            <a:pPr algn="ctr">
-              <a:spcBef>
-                <a:spcPts val="0"/>
-              </a:spcBef>
-              <a:spcAft>
-                <a:spcPts val="0"/>
-              </a:spcAft>
-            </a:pPr>
-            <a:r>
-              <a:rPr sz="1000" b="1">
-                <a:solidFill>
-                  <a:srgbClr val="14181D"/>
-                </a:solidFill>
-                <a:latin typeface="Arial"/>
-              </a:rPr>
-              <a:t>91</a:t>
-            </a:r>
-          </a:p>
-        </p:txBody>
-      </p:sp>
-      <p:sp>
-        <p:nvSpPr>
-          <p:cNvPr id="44" name="TextBox 43"/>
-          <p:cNvSpPr txBox="1"/>
-          <p:nvPr/>
-        </p:nvSpPr>
-        <p:spPr>
-          <a:xfrm>
-            <a:off x="6611112" y="5202936"/>
-            <a:ext cx="914400" cy="182880"/>
-          </a:xfrm>
-          <a:prstGeom prst="rect">
-            <a:avLst/>
-          </a:prstGeom>
-          <a:noFill/>
-        </p:spPr>
-        <p:txBody>
-          <a:bodyPr wrap="square" lIns="0" rIns="0" tIns="0" bIns="0">
-            <a:spAutoFit/>
-          </a:bodyPr>
-          <a:lstStyle/>
-          <a:p>
-            <a:pPr algn="ctr">
-              <a:spcBef>
-                <a:spcPts val="0"/>
-              </a:spcBef>
-              <a:spcAft>
-                <a:spcPts val="0"/>
-              </a:spcAft>
-            </a:pPr>
-            <a:r>
-              <a:rPr sz="850" b="0">
-                <a:solidFill>
-                  <a:srgbClr val="7C8695"/>
-                </a:solidFill>
-                <a:latin typeface="Arial"/>
-              </a:rPr>
-              <a:t>mid soak</a:t>
-            </a:r>
-          </a:p>
-        </p:txBody>
-      </p:sp>
-      <p:sp>
-        <p:nvSpPr>
-          <p:cNvPr id="45" name="Rectangle 44"/>
-          <p:cNvSpPr/>
-          <p:nvPr/>
-        </p:nvSpPr>
-        <p:spPr>
-          <a:xfrm>
-            <a:off x="7690104" y="3805732"/>
-            <a:ext cx="621792" cy="1333195"/>
-          </a:xfrm>
-          <a:prstGeom prst="rect">
-            <a:avLst/>
-          </a:prstGeom>
-          <a:solidFill>
-            <a:srgbClr val="B0590A"/>
-          </a:solidFill>
-          <a:ln>
-            <a:noFill/>
-          </a:ln>
-          <a:effectLst/>
-        </p:spPr>
-        <p:style>
-          <a:lnRef idx="1">
-            <a:schemeClr val="accent1"/>
-          </a:lnRef>
-          <a:fillRef idx="3">
-            <a:schemeClr val="accent1"/>
-          </a:fillRef>
-          <a:effectRef idx="2">
-            <a:schemeClr val="accent1"/>
-          </a:effectRef>
-          <a:fontRef idx="minor">
-            <a:schemeClr val="lt1"/>
-          </a:fontRef>
-        </p:style>
-        <p:txBody>
-          <a:bodyPr rtlCol="0" anchor="ctr"/>
-          <a:lstStyle/>
-          <a:p>
-            <a:pPr algn="ctr"/>
-          </a:p>
-        </p:txBody>
-      </p:sp>
-      <p:sp>
-        <p:nvSpPr>
-          <p:cNvPr id="46" name="TextBox 45"/>
-          <p:cNvSpPr txBox="1"/>
-          <p:nvPr/>
-        </p:nvSpPr>
-        <p:spPr>
-          <a:xfrm>
-            <a:off x="7543800" y="3567988"/>
-            <a:ext cx="914400" cy="201168"/>
-          </a:xfrm>
-          <a:prstGeom prst="rect">
-            <a:avLst/>
-          </a:prstGeom>
-          <a:noFill/>
-        </p:spPr>
-        <p:txBody>
-          <a:bodyPr wrap="square" lIns="0" rIns="0" tIns="0" bIns="0">
-            <a:spAutoFit/>
-          </a:bodyPr>
-          <a:lstStyle/>
-          <a:p>
-            <a:pPr algn="ctr">
-              <a:spcBef>
-                <a:spcPts val="0"/>
-              </a:spcBef>
-              <a:spcAft>
-                <a:spcPts val="0"/>
-              </a:spcAft>
-            </a:pPr>
-            <a:r>
-              <a:rPr sz="1000" b="1">
-                <a:solidFill>
-                  <a:srgbClr val="14181D"/>
-                </a:solidFill>
-                <a:latin typeface="Arial"/>
-              </a:rPr>
-              <a:t>126</a:t>
-            </a:r>
-          </a:p>
-        </p:txBody>
-      </p:sp>
-      <p:sp>
-        <p:nvSpPr>
-          <p:cNvPr id="47" name="TextBox 46"/>
-          <p:cNvSpPr txBox="1"/>
-          <p:nvPr/>
-        </p:nvSpPr>
-        <p:spPr>
-          <a:xfrm>
-            <a:off x="7543800" y="5202936"/>
-            <a:ext cx="914400" cy="182880"/>
-          </a:xfrm>
-          <a:prstGeom prst="rect">
-            <a:avLst/>
-          </a:prstGeom>
-          <a:noFill/>
-        </p:spPr>
-        <p:txBody>
-          <a:bodyPr wrap="square" lIns="0" rIns="0" tIns="0" bIns="0">
-            <a:spAutoFit/>
-          </a:bodyPr>
-          <a:lstStyle/>
-          <a:p>
-            <a:pPr algn="ctr">
-              <a:spcBef>
-                <a:spcPts val="0"/>
-              </a:spcBef>
-              <a:spcAft>
-                <a:spcPts val="0"/>
-              </a:spcAft>
-            </a:pPr>
-            <a:r>
-              <a:rPr sz="850" b="0">
-                <a:solidFill>
-                  <a:srgbClr val="7C8695"/>
-                </a:solidFill>
-                <a:latin typeface="Arial"/>
-              </a:rPr>
-              <a:t>end soak</a:t>
-            </a:r>
-          </a:p>
-        </p:txBody>
-      </p:sp>
-      <p:sp>
-        <p:nvSpPr>
-          <p:cNvPr id="48" name="Rectangle 47"/>
-          <p:cNvSpPr/>
-          <p:nvPr/>
-        </p:nvSpPr>
-        <p:spPr>
-          <a:xfrm>
-            <a:off x="4800600" y="5138928"/>
-            <a:ext cx="3703320" cy="10972"/>
-          </a:xfrm>
-          <a:prstGeom prst="rect">
-            <a:avLst/>
-          </a:prstGeom>
-          <a:solidFill>
-            <a:srgbClr val="D9DEE4"/>
-          </a:solidFill>
-          <a:ln>
-            <a:noFill/>
-          </a:ln>
-          <a:effectLst/>
-        </p:spPr>
-        <p:style>
-          <a:lnRef idx="1">
-            <a:schemeClr val="accent1"/>
-          </a:lnRef>
-          <a:fillRef idx="3">
-            <a:schemeClr val="accent1"/>
-          </a:fillRef>
-          <a:effectRef idx="2">
-            <a:schemeClr val="accent1"/>
-          </a:effectRef>
-          <a:fontRef idx="minor">
-            <a:schemeClr val="lt1"/>
-          </a:fontRef>
-        </p:style>
-        <p:txBody>
-          <a:bodyPr rtlCol="0" anchor="ctr"/>
-          <a:lstStyle/>
-          <a:p>
-            <a:pPr algn="ctr"/>
-          </a:p>
-        </p:txBody>
-      </p:sp>
-      <p:sp>
-        <p:nvSpPr>
-          <p:cNvPr id="49" name="TextBox 48"/>
-          <p:cNvSpPr txBox="1"/>
-          <p:nvPr/>
-        </p:nvSpPr>
-        <p:spPr>
-          <a:xfrm>
-            <a:off x="548640" y="5522976"/>
-            <a:ext cx="7955279" cy="566928"/>
-          </a:xfrm>
-          <a:prstGeom prst="rect">
-            <a:avLst/>
-          </a:prstGeom>
-          <a:noFill/>
-        </p:spPr>
-        <p:txBody>
-          <a:bodyPr wrap="square" lIns="0" rIns="0" tIns="0" bIns="0">
-            <a:spAutoFit/>
-          </a:bodyPr>
-          <a:lstStyle/>
-          <a:p>
-            <a:pPr algn="l">
-              <a:lnSpc>
-                <a:spcPct val="124000"/>
-              </a:lnSpc>
-              <a:spcBef>
-                <a:spcPts val="0"/>
-              </a:spcBef>
-              <a:spcAft>
-                <a:spcPts val="0"/>
-              </a:spcAft>
-            </a:pPr>
-            <a:r>
-              <a:rPr sz="1050" b="0">
-                <a:solidFill>
-                  <a:srgbClr val="39414C"/>
-                </a:solidFill>
-                <a:latin typeface="Arial"/>
-              </a:rPr>
-              <a:t>On the short passes p95 sat at 600–800 ms while rule evaluation averaged 53–57 ms — so the latency was never in the rule engine. Under soak both curves climbed together, which is what CPU contention looks like, not a missing index.</a:t>
-            </a:r>
-          </a:p>
-        </p:txBody>
-      </p:sp>
-      <p:sp>
-        <p:nvSpPr>
-          <p:cNvPr id="50" name="Rounded Rectangle 49"/>
-          <p:cNvSpPr/>
-          <p:nvPr/>
-        </p:nvSpPr>
-        <p:spPr>
-          <a:xfrm>
-            <a:off x="8732520" y="3145536"/>
-            <a:ext cx="2907792" cy="2999232"/>
-          </a:xfrm>
-          <a:prstGeom prst="roundRect">
-            <a:avLst>
-              <a:gd name="adj" fmla="val 1886"/>
-            </a:avLst>
-          </a:prstGeom>
-          <a:solidFill>
-            <a:srgbClr val="F4F6F8"/>
-          </a:solidFill>
-          <a:ln w="9525">
-            <a:solidFill>
-              <a:srgbClr val="D9DEE4"/>
-            </a:solidFill>
-          </a:ln>
-          <a:effectLst/>
-        </p:spPr>
-        <p:style>
-          <a:lnRef idx="1">
-            <a:schemeClr val="accent1"/>
-          </a:lnRef>
-          <a:fillRef idx="3">
-            <a:schemeClr val="accent1"/>
-          </a:fillRef>
-          <a:effectRef idx="2">
-            <a:schemeClr val="accent1"/>
-          </a:effectRef>
-          <a:fontRef idx="minor">
-            <a:schemeClr val="lt1"/>
-          </a:fontRef>
-        </p:style>
-        <p:txBody>
-          <a:bodyPr rtlCol="0" anchor="ctr"/>
-          <a:lstStyle/>
-          <a:p>
-            <a:pPr algn="ctr"/>
-          </a:p>
-        </p:txBody>
-      </p:sp>
-      <p:sp>
-        <p:nvSpPr>
-          <p:cNvPr id="51" name="Rectangle 50"/>
-          <p:cNvSpPr/>
-          <p:nvPr/>
-        </p:nvSpPr>
-        <p:spPr>
-          <a:xfrm>
-            <a:off x="8732520" y="3145536"/>
-            <a:ext cx="2907792" cy="45720"/>
-          </a:xfrm>
-          <a:prstGeom prst="rect">
-            <a:avLst/>
-          </a:prstGeom>
-          <a:solidFill>
-            <a:srgbClr val="730014"/>
-          </a:solidFill>
-          <a:ln>
-            <a:noFill/>
-          </a:ln>
-          <a:effectLst/>
-        </p:spPr>
-        <p:style>
-          <a:lnRef idx="1">
-            <a:schemeClr val="accent1"/>
-          </a:lnRef>
-          <a:fillRef idx="3">
-            <a:schemeClr val="accent1"/>
-          </a:fillRef>
-          <a:effectRef idx="2">
-            <a:schemeClr val="accent1"/>
-          </a:effectRef>
-          <a:fontRef idx="minor">
-            <a:schemeClr val="lt1"/>
-          </a:fontRef>
-        </p:style>
-        <p:txBody>
-          <a:bodyPr rtlCol="0" anchor="ctr"/>
-          <a:lstStyle/>
-          <a:p>
-            <a:pPr algn="ctr"/>
-          </a:p>
-        </p:txBody>
-      </p:sp>
-      <p:sp>
-        <p:nvSpPr>
-          <p:cNvPr id="52" name="TextBox 51"/>
-          <p:cNvSpPr txBox="1"/>
-          <p:nvPr/>
-        </p:nvSpPr>
-        <p:spPr>
-          <a:xfrm>
-            <a:off x="8933688" y="3310128"/>
-            <a:ext cx="2560320" cy="201168"/>
-          </a:xfrm>
-          <a:prstGeom prst="rect">
-            <a:avLst/>
-          </a:prstGeom>
-          <a:noFill/>
-        </p:spPr>
-        <p:txBody>
-          <a:bodyPr wrap="square" lIns="0" rIns="0" tIns="0" bIns="0">
-            <a:spAutoFit/>
-          </a:bodyPr>
-          <a:lstStyle/>
-          <a:p>
-            <a:pPr algn="l">
-              <a:spcBef>
-                <a:spcPts val="0"/>
-              </a:spcBef>
-              <a:spcAft>
-                <a:spcPts val="0"/>
-              </a:spcAft>
-            </a:pPr>
-            <a:r>
-              <a:rPr sz="900" b="1" spc="140">
-                <a:solidFill>
-                  <a:srgbClr val="730014"/>
-                </a:solidFill>
-                <a:latin typeface="Arial"/>
-              </a:rPr>
-              <a:t>THE BLOCKER</a:t>
-            </a:r>
-          </a:p>
-        </p:txBody>
-      </p:sp>
-      <p:sp>
-        <p:nvSpPr>
-          <p:cNvPr id="53" name="TextBox 52"/>
-          <p:cNvSpPr txBox="1"/>
-          <p:nvPr/>
-        </p:nvSpPr>
-        <p:spPr>
-          <a:xfrm>
-            <a:off x="8933688" y="3529584"/>
-            <a:ext cx="2560320" cy="402336"/>
-          </a:xfrm>
-          <a:prstGeom prst="rect">
-            <a:avLst/>
-          </a:prstGeom>
-          <a:noFill/>
-        </p:spPr>
-        <p:txBody>
-          <a:bodyPr wrap="square" lIns="0" rIns="0" tIns="0" bIns="0">
-            <a:spAutoFit/>
-          </a:bodyPr>
-          <a:lstStyle/>
-          <a:p>
-            <a:pPr algn="l">
-              <a:lnSpc>
-                <a:spcPct val="116000"/>
-              </a:lnSpc>
-              <a:spcBef>
-                <a:spcPts val="0"/>
-              </a:spcBef>
-              <a:spcAft>
-                <a:spcPts val="0"/>
-              </a:spcAft>
-            </a:pPr>
-            <a:r>
-              <a:rPr sz="1250" b="1">
-                <a:solidFill>
-                  <a:srgbClr val="14181D"/>
-                </a:solidFill>
-                <a:latin typeface="Arial"/>
-              </a:rPr>
-              <a:t>Moving MySQL to its own VM</a:t>
-            </a:r>
-          </a:p>
-        </p:txBody>
-      </p:sp>
-      <p:sp>
-        <p:nvSpPr>
-          <p:cNvPr id="54" name="TextBox 53"/>
-          <p:cNvSpPr txBox="1"/>
-          <p:nvPr/>
-        </p:nvSpPr>
-        <p:spPr>
-          <a:xfrm>
-            <a:off x="8933688" y="3968496"/>
-            <a:ext cx="2578608" cy="310896"/>
-          </a:xfrm>
-          <a:prstGeom prst="rect">
-            <a:avLst/>
-          </a:prstGeom>
-          <a:noFill/>
-        </p:spPr>
-        <p:txBody>
-          <a:bodyPr wrap="square" lIns="0" rIns="0" tIns="0" bIns="0">
-            <a:spAutoFit/>
-          </a:bodyPr>
-          <a:lstStyle/>
-          <a:p>
-            <a:pPr algn="l">
-              <a:lnSpc>
-                <a:spcPct val="120000"/>
-              </a:lnSpc>
-              <a:spcBef>
-                <a:spcPts val="0"/>
-              </a:spcBef>
-              <a:spcAft>
-                <a:spcPts val="0"/>
-              </a:spcAft>
-            </a:pPr>
-            <a:r>
-              <a:rPr sz="950" b="0">
-                <a:solidFill>
-                  <a:srgbClr val="7C8695"/>
-                </a:solidFill>
-                <a:latin typeface="Arial"/>
-              </a:rPr>
-              <a:t>The soak said co-location was the cost. The fix would not connect:</a:t>
-            </a:r>
-          </a:p>
-        </p:txBody>
-      </p:sp>
-      <p:sp>
-        <p:nvSpPr>
-          <p:cNvPr id="55" name="TextBox 54"/>
-          <p:cNvSpPr txBox="1"/>
-          <p:nvPr/>
-        </p:nvSpPr>
-        <p:spPr>
-          <a:xfrm>
-            <a:off x="8933688" y="4443984"/>
-            <a:ext cx="2103120" cy="182880"/>
-          </a:xfrm>
-          <a:prstGeom prst="rect">
-            <a:avLst/>
-          </a:prstGeom>
-          <a:noFill/>
-        </p:spPr>
-        <p:txBody>
-          <a:bodyPr wrap="square" lIns="0" rIns="0" tIns="0" bIns="0">
-            <a:spAutoFit/>
-          </a:bodyPr>
-          <a:lstStyle/>
-          <a:p>
-            <a:pPr algn="l">
-              <a:spcBef>
-                <a:spcPts val="0"/>
-              </a:spcBef>
-              <a:spcAft>
-                <a:spcPts val="0"/>
-              </a:spcAft>
-            </a:pPr>
-            <a:r>
-              <a:rPr sz="900" b="0">
-                <a:solidFill>
-                  <a:srgbClr val="39414C"/>
-                </a:solidFill>
-                <a:latin typeface="Arial"/>
-              </a:rPr>
-              <a:t>Windows → Linux</a:t>
-            </a:r>
-          </a:p>
-        </p:txBody>
-      </p:sp>
-      <p:sp>
-        <p:nvSpPr>
-          <p:cNvPr id="56" name="TextBox 55"/>
-          <p:cNvSpPr txBox="1"/>
-          <p:nvPr/>
-        </p:nvSpPr>
-        <p:spPr>
-          <a:xfrm>
-            <a:off x="10927080" y="4443984"/>
-            <a:ext cx="548640" cy="182880"/>
-          </a:xfrm>
-          <a:prstGeom prst="rect">
-            <a:avLst/>
-          </a:prstGeom>
-          <a:noFill/>
-        </p:spPr>
-        <p:txBody>
-          <a:bodyPr wrap="square" lIns="0" rIns="0" tIns="0" bIns="0">
-            <a:spAutoFit/>
-          </a:bodyPr>
-          <a:lstStyle/>
-          <a:p>
-            <a:pPr algn="r">
-              <a:spcBef>
-                <a:spcPts val="0"/>
-              </a:spcBef>
-              <a:spcAft>
-                <a:spcPts val="0"/>
-              </a:spcAft>
-            </a:pPr>
-            <a:r>
-              <a:rPr sz="900" b="1">
-                <a:solidFill>
-                  <a:srgbClr val="1B7A3D"/>
-                </a:solidFill>
-                <a:latin typeface="Arial"/>
-              </a:rPr>
-              <a:t>works</a:t>
-            </a:r>
-          </a:p>
-        </p:txBody>
-      </p:sp>
-      <p:sp>
-        <p:nvSpPr>
-          <p:cNvPr id="57" name="TextBox 56"/>
-          <p:cNvSpPr txBox="1"/>
-          <p:nvPr/>
-        </p:nvSpPr>
-        <p:spPr>
-          <a:xfrm>
-            <a:off x="8933688" y="4681728"/>
-            <a:ext cx="2103120" cy="182880"/>
-          </a:xfrm>
-          <a:prstGeom prst="rect">
-            <a:avLst/>
-          </a:prstGeom>
-          <a:noFill/>
-        </p:spPr>
-        <p:txBody>
-          <a:bodyPr wrap="square" lIns="0" rIns="0" tIns="0" bIns="0">
-            <a:spAutoFit/>
-          </a:bodyPr>
-          <a:lstStyle/>
-          <a:p>
-            <a:pPr algn="l">
-              <a:spcBef>
-                <a:spcPts val="0"/>
-              </a:spcBef>
-              <a:spcAft>
-                <a:spcPts val="0"/>
-              </a:spcAft>
-            </a:pPr>
-            <a:r>
-              <a:rPr sz="900" b="0">
-                <a:solidFill>
-                  <a:srgbClr val="39414C"/>
-                </a:solidFill>
-                <a:latin typeface="Arial"/>
-              </a:rPr>
-              <a:t>Linux A → Linux B</a:t>
-            </a:r>
-          </a:p>
-        </p:txBody>
-      </p:sp>
-      <p:sp>
-        <p:nvSpPr>
-          <p:cNvPr id="58" name="TextBox 57"/>
-          <p:cNvSpPr txBox="1"/>
-          <p:nvPr/>
-        </p:nvSpPr>
-        <p:spPr>
-          <a:xfrm>
-            <a:off x="10927080" y="4681728"/>
-            <a:ext cx="548640" cy="182880"/>
-          </a:xfrm>
-          <a:prstGeom prst="rect">
-            <a:avLst/>
-          </a:prstGeom>
-          <a:noFill/>
-        </p:spPr>
-        <p:txBody>
-          <a:bodyPr wrap="square" lIns="0" rIns="0" tIns="0" bIns="0">
-            <a:spAutoFit/>
-          </a:bodyPr>
-          <a:lstStyle/>
-          <a:p>
-            <a:pPr algn="r">
-              <a:spcBef>
-                <a:spcPts val="0"/>
-              </a:spcBef>
-              <a:spcAft>
-                <a:spcPts val="0"/>
-              </a:spcAft>
-            </a:pPr>
-            <a:r>
-              <a:rPr sz="900" b="1">
-                <a:solidFill>
-                  <a:srgbClr val="C41E3A"/>
-                </a:solidFill>
-                <a:latin typeface="Arial"/>
-              </a:rPr>
-              <a:t>fails</a:t>
-            </a:r>
-          </a:p>
-        </p:txBody>
-      </p:sp>
-      <p:sp>
-        <p:nvSpPr>
-          <p:cNvPr id="59" name="TextBox 58"/>
-          <p:cNvSpPr txBox="1"/>
-          <p:nvPr/>
-        </p:nvSpPr>
-        <p:spPr>
-          <a:xfrm>
-            <a:off x="8933688" y="4919472"/>
-            <a:ext cx="2103120" cy="182880"/>
-          </a:xfrm>
-          <a:prstGeom prst="rect">
-            <a:avLst/>
-          </a:prstGeom>
-          <a:noFill/>
-        </p:spPr>
-        <p:txBody>
-          <a:bodyPr wrap="square" lIns="0" rIns="0" tIns="0" bIns="0">
-            <a:spAutoFit/>
-          </a:bodyPr>
-          <a:lstStyle/>
-          <a:p>
-            <a:pPr algn="l">
-              <a:spcBef>
-                <a:spcPts val="0"/>
-              </a:spcBef>
-              <a:spcAft>
-                <a:spcPts val="0"/>
-              </a:spcAft>
-            </a:pPr>
-            <a:r>
-              <a:rPr sz="900" b="0">
-                <a:solidFill>
-                  <a:srgbClr val="39414C"/>
-                </a:solidFill>
-                <a:latin typeface="Arial"/>
-              </a:rPr>
-              <a:t>nc listener ← Windows</a:t>
-            </a:r>
-          </a:p>
-        </p:txBody>
-      </p:sp>
-      <p:sp>
-        <p:nvSpPr>
-          <p:cNvPr id="60" name="TextBox 59"/>
-          <p:cNvSpPr txBox="1"/>
-          <p:nvPr/>
-        </p:nvSpPr>
-        <p:spPr>
-          <a:xfrm>
-            <a:off x="10927080" y="4919472"/>
-            <a:ext cx="548640" cy="182880"/>
-          </a:xfrm>
-          <a:prstGeom prst="rect">
-            <a:avLst/>
-          </a:prstGeom>
-          <a:noFill/>
-        </p:spPr>
-        <p:txBody>
-          <a:bodyPr wrap="square" lIns="0" rIns="0" tIns="0" bIns="0">
-            <a:spAutoFit/>
-          </a:bodyPr>
-          <a:lstStyle/>
-          <a:p>
-            <a:pPr algn="r">
-              <a:spcBef>
-                <a:spcPts val="0"/>
-              </a:spcBef>
-              <a:spcAft>
-                <a:spcPts val="0"/>
-              </a:spcAft>
-            </a:pPr>
-            <a:r>
-              <a:rPr sz="900" b="1">
-                <a:solidFill>
-                  <a:srgbClr val="1B7A3D"/>
-                </a:solidFill>
-                <a:latin typeface="Arial"/>
-              </a:rPr>
-              <a:t>works</a:t>
-            </a:r>
-          </a:p>
-        </p:txBody>
-      </p:sp>
-      <p:sp>
-        <p:nvSpPr>
-          <p:cNvPr id="61" name="TextBox 60"/>
-          <p:cNvSpPr txBox="1"/>
-          <p:nvPr/>
-        </p:nvSpPr>
-        <p:spPr>
-          <a:xfrm>
-            <a:off x="8933688" y="5157216"/>
-            <a:ext cx="2103120" cy="182880"/>
-          </a:xfrm>
-          <a:prstGeom prst="rect">
-            <a:avLst/>
-          </a:prstGeom>
-          <a:noFill/>
-        </p:spPr>
-        <p:txBody>
-          <a:bodyPr wrap="square" lIns="0" rIns="0" tIns="0" bIns="0">
-            <a:spAutoFit/>
-          </a:bodyPr>
-          <a:lstStyle/>
-          <a:p>
-            <a:pPr algn="l">
-              <a:spcBef>
-                <a:spcPts val="0"/>
-              </a:spcBef>
-              <a:spcAft>
-                <a:spcPts val="0"/>
-              </a:spcAft>
-            </a:pPr>
-            <a:r>
-              <a:rPr sz="900" b="0">
-                <a:solidFill>
-                  <a:srgbClr val="39414C"/>
-                </a:solidFill>
-                <a:latin typeface="Arial"/>
-              </a:rPr>
-              <a:t>nc listener ← Linux A</a:t>
-            </a:r>
-          </a:p>
-        </p:txBody>
-      </p:sp>
-      <p:sp>
-        <p:nvSpPr>
-          <p:cNvPr id="62" name="TextBox 61"/>
-          <p:cNvSpPr txBox="1"/>
-          <p:nvPr/>
-        </p:nvSpPr>
-        <p:spPr>
-          <a:xfrm>
-            <a:off x="10927080" y="5157216"/>
-            <a:ext cx="548640" cy="182880"/>
-          </a:xfrm>
-          <a:prstGeom prst="rect">
-            <a:avLst/>
-          </a:prstGeom>
-          <a:noFill/>
-        </p:spPr>
-        <p:txBody>
-          <a:bodyPr wrap="square" lIns="0" rIns="0" tIns="0" bIns="0">
-            <a:spAutoFit/>
-          </a:bodyPr>
-          <a:lstStyle/>
-          <a:p>
-            <a:pPr algn="r">
-              <a:spcBef>
-                <a:spcPts val="0"/>
-              </a:spcBef>
-              <a:spcAft>
-                <a:spcPts val="0"/>
-              </a:spcAft>
-            </a:pPr>
-            <a:r>
-              <a:rPr sz="900" b="1">
-                <a:solidFill>
-                  <a:srgbClr val="C41E3A"/>
-                </a:solidFill>
-                <a:latin typeface="Arial"/>
-              </a:rPr>
-              <a:t>fails</a:t>
-            </a:r>
-          </a:p>
-        </p:txBody>
-      </p:sp>
-      <p:sp>
-        <p:nvSpPr>
-          <p:cNvPr id="63" name="Rectangle 62"/>
-          <p:cNvSpPr/>
-          <p:nvPr/>
-        </p:nvSpPr>
-        <p:spPr>
-          <a:xfrm>
-            <a:off x="8933688" y="5431536"/>
-            <a:ext cx="2542032" cy="10972"/>
-          </a:xfrm>
-          <a:prstGeom prst="rect">
-            <a:avLst/>
-          </a:prstGeom>
-          <a:solidFill>
-            <a:srgbClr val="D9DEE4"/>
-          </a:solidFill>
-          <a:ln>
-            <a:noFill/>
-          </a:ln>
-          <a:effectLst/>
-        </p:spPr>
-        <p:style>
-          <a:lnRef idx="1">
-            <a:schemeClr val="accent1"/>
-          </a:lnRef>
-          <a:fillRef idx="3">
-            <a:schemeClr val="accent1"/>
-          </a:fillRef>
-          <a:effectRef idx="2">
-            <a:schemeClr val="accent1"/>
-          </a:effectRef>
-          <a:fontRef idx="minor">
-            <a:schemeClr val="lt1"/>
-          </a:fontRef>
-        </p:style>
-        <p:txBody>
-          <a:bodyPr rtlCol="0" anchor="ctr"/>
-          <a:lstStyle/>
-          <a:p>
-            <a:pPr algn="ctr"/>
-          </a:p>
-        </p:txBody>
-      </p:sp>
-      <p:sp>
-        <p:nvSpPr>
-          <p:cNvPr id="64" name="TextBox 63"/>
-          <p:cNvSpPr txBox="1"/>
-          <p:nvPr/>
-        </p:nvSpPr>
-        <p:spPr>
-          <a:xfrm>
-            <a:off x="8933688" y="5559551"/>
-            <a:ext cx="2578608" cy="457200"/>
-          </a:xfrm>
-          <a:prstGeom prst="rect">
-            <a:avLst/>
-          </a:prstGeom>
-          <a:noFill/>
-        </p:spPr>
-        <p:txBody>
-          <a:bodyPr wrap="square" lIns="0" rIns="0" tIns="0" bIns="0">
-            <a:spAutoFit/>
-          </a:bodyPr>
-          <a:lstStyle/>
-          <a:p>
-            <a:pPr algn="l">
-              <a:lnSpc>
-                <a:spcPct val="120000"/>
-              </a:lnSpc>
-              <a:spcBef>
-                <a:spcPts val="0"/>
-              </a:spcBef>
-              <a:spcAft>
-                <a:spcPts val="0"/>
-              </a:spcAft>
-            </a:pPr>
-            <a:r>
-              <a:rPr sz="900" b="0">
-                <a:solidFill>
-                  <a:srgbClr val="7C8695"/>
-                </a:solidFill>
-                <a:latin typeface="Arial"/>
-              </a:rPr>
-              <a:t>Plain nc fails the same way, so this is a security-group or routing rule — not Spring, not Docker.</a:t>
-            </a:r>
-          </a:p>
-        </p:txBody>
-      </p:sp>
-      <p:sp>
-        <p:nvSpPr>
-          <p:cNvPr id="65" name="Rectangle 64"/>
-          <p:cNvSpPr/>
-          <p:nvPr/>
-        </p:nvSpPr>
-        <p:spPr>
-          <a:xfrm>
-            <a:off x="548640" y="6391656"/>
-            <a:ext cx="11094415" cy="10972"/>
-          </a:xfrm>
-          <a:prstGeom prst="rect">
-            <a:avLst/>
-          </a:prstGeom>
-          <a:solidFill>
-            <a:srgbClr val="D9DEE4"/>
-          </a:solidFill>
-          <a:ln>
-            <a:noFill/>
-          </a:ln>
-          <a:effectLst/>
-        </p:spPr>
-        <p:style>
-          <a:lnRef idx="1">
-            <a:schemeClr val="accent1"/>
-          </a:lnRef>
-          <a:fillRef idx="3">
-            <a:schemeClr val="accent1"/>
-          </a:fillRef>
-          <a:effectRef idx="2">
-            <a:schemeClr val="accent1"/>
-          </a:effectRef>
-          <a:fontRef idx="minor">
-            <a:schemeClr val="lt1"/>
-          </a:fontRef>
-        </p:style>
-        <p:txBody>
-          <a:bodyPr rtlCol="0" anchor="ctr"/>
-          <a:lstStyle/>
-          <a:p>
-            <a:pPr algn="ctr"/>
-          </a:p>
-        </p:txBody>
-      </p:sp>
-      <p:sp>
-        <p:nvSpPr>
-          <p:cNvPr id="66" name="TextBox 65"/>
-          <p:cNvSpPr txBox="1"/>
-          <p:nvPr/>
-        </p:nvSpPr>
-        <p:spPr>
-          <a:xfrm>
-            <a:off x="548640" y="6473952"/>
-            <a:ext cx="7315200" cy="219456"/>
-          </a:xfrm>
-          <a:prstGeom prst="rect">
-            <a:avLst/>
-          </a:prstGeom>
-          <a:noFill/>
-        </p:spPr>
-        <p:txBody>
-          <a:bodyPr wrap="square" lIns="0" rIns="0" tIns="0" bIns="0">
-            <a:spAutoFit/>
-          </a:bodyPr>
-          <a:lstStyle/>
-          <a:p>
-            <a:pPr algn="l">
-              <a:spcBef>
-                <a:spcPts val="0"/>
-              </a:spcBef>
-              <a:spcAft>
-                <a:spcPts val="0"/>
-              </a:spcAft>
-            </a:pPr>
-            <a:r>
-              <a:rPr sz="900" b="0">
-                <a:solidFill>
-                  <a:srgbClr val="7C8695"/>
-                </a:solidFill>
-                <a:latin typeface="Arial"/>
-              </a:rPr>
-              <a:t>Agilish  ·  Transaction Monitoring &amp; Alerts</a:t>
-            </a:r>
-          </a:p>
-        </p:txBody>
-      </p:sp>
-      <p:sp>
-        <p:nvSpPr>
-          <p:cNvPr id="67" name="TextBox 66"/>
+              <a:t>AGILE-ish  ·  Transaction Monitoring &amp; Alerts</a:t>
+            </a:r>
+          </a:p>
+        </p:txBody>
+      </p:sp>
+      <p:sp>
+        <p:nvSpPr>
+          <p:cNvPr id="33" name="TextBox 32"/>
           <p:cNvSpPr txBox="1"/>
           <p:nvPr/>
         </p:nvSpPr>
@@ -19098,7 +18154,7 @@
         </p:nvSpPr>
         <p:spPr>
           <a:xfrm>
-            <a:off x="548640" y="2423160"/>
+            <a:off x="548640" y="2450591"/>
             <a:ext cx="50292" cy="182880"/>
           </a:xfrm>
           <a:prstGeom prst="rect">
@@ -19142,7 +18198,7 @@
         </p:nvSpPr>
         <p:spPr>
           <a:xfrm>
-            <a:off x="749808" y="2377440"/>
+            <a:off x="749808" y="2404872"/>
             <a:ext cx="6675120" cy="219456"/>
           </a:xfrm>
           <a:prstGeom prst="rect">
@@ -19184,7 +18240,7 @@
         </p:nvSpPr>
         <p:spPr>
           <a:xfrm>
-            <a:off x="749808" y="2633472"/>
+            <a:off x="749808" y="2660904"/>
             <a:ext cx="6629400" cy="512064"/>
           </a:xfrm>
           <a:prstGeom prst="rect">
@@ -19229,7 +18285,7 @@
         </p:nvSpPr>
         <p:spPr>
           <a:xfrm>
-            <a:off x="548640" y="3355848"/>
+            <a:off x="548640" y="3410711"/>
             <a:ext cx="50292" cy="182880"/>
           </a:xfrm>
           <a:prstGeom prst="rect">
@@ -19273,7 +18329,7 @@
         </p:nvSpPr>
         <p:spPr>
           <a:xfrm>
-            <a:off x="749808" y="3310128"/>
+            <a:off x="749808" y="3364991"/>
             <a:ext cx="6675120" cy="219456"/>
           </a:xfrm>
           <a:prstGeom prst="rect">
@@ -19315,7 +18371,7 @@
         </p:nvSpPr>
         <p:spPr>
           <a:xfrm>
-            <a:off x="749808" y="3566160"/>
+            <a:off x="749808" y="3621024"/>
             <a:ext cx="6629400" cy="512064"/>
           </a:xfrm>
           <a:prstGeom prst="rect">
@@ -19360,7 +18416,7 @@
         </p:nvSpPr>
         <p:spPr>
           <a:xfrm>
-            <a:off x="548640" y="4288536"/>
+            <a:off x="548640" y="4370831"/>
             <a:ext cx="50292" cy="182880"/>
           </a:xfrm>
           <a:prstGeom prst="rect">
@@ -19404,7 +18460,7 @@
         </p:nvSpPr>
         <p:spPr>
           <a:xfrm>
-            <a:off x="749808" y="4242816"/>
+            <a:off x="749808" y="4325112"/>
             <a:ext cx="6675120" cy="219456"/>
           </a:xfrm>
           <a:prstGeom prst="rect">
@@ -19446,7 +18502,7 @@
         </p:nvSpPr>
         <p:spPr>
           <a:xfrm>
-            <a:off x="749808" y="4498848"/>
+            <a:off x="749808" y="4581144"/>
             <a:ext cx="6629400" cy="512064"/>
           </a:xfrm>
           <a:prstGeom prst="rect">
@@ -19491,7 +18547,461 @@
         </p:nvSpPr>
         <p:spPr>
           <a:xfrm>
-            <a:off x="548640" y="5138928"/>
+            <a:off x="548640" y="5330951"/>
+            <a:ext cx="50292" cy="182880"/>
+          </a:xfrm>
+          <a:prstGeom prst="rect">
+            <a:avLst/>
+          </a:prstGeom>
+          <a:solidFill>
+            <a:srgbClr val="C41E3A"/>
+          </a:solidFill>
+          <a:ln>
+            <a:noFill/>
+          </a:ln>
+          <a:effectLst/>
+        </p:spPr>
+        <p:style>
+          <a:lnRef idx="1">
+            <a:schemeClr val="accent1"/>
+          </a:lnRef>
+          <a:fillRef idx="3">
+            <a:schemeClr val="accent1"/>
+          </a:fillRef>
+          <a:effectRef idx="2">
+            <a:schemeClr val="accent1"/>
+          </a:effectRef>
+          <a:fontRef idx="minor">
+            <a:schemeClr val="lt1"/>
+          </a:fontRef>
+        </p:style>
+        <p:txBody>
+          <a:bodyPr rtlCol="0" anchor="ctr"/>
+          <a:lstStyle/>
+          <a:p>
+            <a:pPr algn="ctr"/>
+          </a:p>
+        </p:txBody>
+      </p:sp>
+      <p:sp>
+        <p:nvSpPr>
+          <p:cNvPr id="64" name="TextBox 63"/>
+          <p:cNvSpPr txBox="1"/>
+          <p:nvPr/>
+        </p:nvSpPr>
+        <p:spPr>
+          <a:xfrm>
+            <a:off x="749808" y="5285231"/>
+            <a:ext cx="6675120" cy="219456"/>
+          </a:xfrm>
+          <a:prstGeom prst="rect">
+            <a:avLst/>
+          </a:prstGeom>
+          <a:noFill/>
+        </p:spPr>
+        <p:txBody>
+          <a:bodyPr wrap="square" lIns="0" rIns="0" tIns="0" bIns="0">
+            <a:spAutoFit/>
+          </a:bodyPr>
+          <a:lstStyle/>
+          <a:p>
+            <a:pPr algn="l">
+              <a:spcBef>
+                <a:spcPts val="0"/>
+              </a:spcBef>
+              <a:spcAft>
+                <a:spcPts val="0"/>
+              </a:spcAft>
+            </a:pPr>
+            <a:r>
+              <a:rPr sz="1250" b="1">
+                <a:solidFill>
+                  <a:srgbClr val="14181D"/>
+                </a:solidFill>
+                <a:latin typeface="Arial"/>
+              </a:rPr>
+              <a:t>Test-first on the risky parts</a:t>
+            </a:r>
+          </a:p>
+        </p:txBody>
+      </p:sp>
+      <p:sp>
+        <p:nvSpPr>
+          <p:cNvPr id="65" name="TextBox 64"/>
+          <p:cNvSpPr txBox="1"/>
+          <p:nvPr/>
+        </p:nvSpPr>
+        <p:spPr>
+          <a:xfrm>
+            <a:off x="749808" y="5541264"/>
+            <a:ext cx="6629400" cy="512064"/>
+          </a:xfrm>
+          <a:prstGeom prst="rect">
+            <a:avLst/>
+          </a:prstGeom>
+          <a:noFill/>
+        </p:spPr>
+        <p:txBody>
+          <a:bodyPr wrap="square" lIns="0" rIns="0" tIns="0" bIns="0">
+            <a:spAutoFit/>
+          </a:bodyPr>
+          <a:lstStyle/>
+          <a:p>
+            <a:pPr algn="l">
+              <a:lnSpc>
+                <a:spcPct val="124000"/>
+              </a:lnSpc>
+              <a:spcBef>
+                <a:spcPts val="0"/>
+              </a:spcBef>
+              <a:spcAft>
+                <a:spcPts val="0"/>
+              </a:spcAft>
+            </a:pPr>
+            <a:r>
+              <a:rPr sz="1050" b="0">
+                <a:solidFill>
+                  <a:srgbClr val="7C8695"/>
+                </a:solidFill>
+                <a:latin typeface="Arial"/>
+              </a:rPr>
+              <a:t>A failing test before every rule and every illegal lifecycle transition — 89 unit tests across 17 classes, contract published at /swagger-ui.html.</a:t>
+            </a:r>
+          </a:p>
+        </p:txBody>
+      </p:sp>
+      <p:sp>
+        <p:nvSpPr>
+          <p:cNvPr id="66" name="TextBox 65"/>
+          <p:cNvSpPr txBox="1"/>
+          <p:nvPr/>
+        </p:nvSpPr>
+        <p:spPr>
+          <a:xfrm>
+            <a:off x="8183879" y="2148840"/>
+            <a:ext cx="3657600" cy="640080"/>
+          </a:xfrm>
+          <a:prstGeom prst="rect">
+            <a:avLst/>
+          </a:prstGeom>
+          <a:noFill/>
+        </p:spPr>
+        <p:txBody>
+          <a:bodyPr wrap="square" lIns="0" rIns="0" tIns="0" bIns="0">
+            <a:spAutoFit/>
+          </a:bodyPr>
+          <a:lstStyle/>
+          <a:p>
+            <a:pPr algn="l">
+              <a:spcBef>
+                <a:spcPts val="0"/>
+              </a:spcBef>
+              <a:spcAft>
+                <a:spcPts val="0"/>
+              </a:spcAft>
+            </a:pPr>
+            <a:r>
+              <a:rPr sz="3800" b="1">
+                <a:solidFill>
+                  <a:srgbClr val="FFFFFF"/>
+                </a:solidFill>
+                <a:latin typeface="Arial"/>
+              </a:rPr>
+              <a:t>THANK YOU</a:t>
+            </a:r>
+          </a:p>
+        </p:txBody>
+      </p:sp>
+      <p:sp>
+        <p:nvSpPr>
+          <p:cNvPr id="67" name="Rectangle 66"/>
+          <p:cNvSpPr/>
+          <p:nvPr/>
+        </p:nvSpPr>
+        <p:spPr>
+          <a:xfrm>
+            <a:off x="8183879" y="2889504"/>
+            <a:ext cx="1371600" cy="27432"/>
+          </a:xfrm>
+          <a:prstGeom prst="rect">
+            <a:avLst/>
+          </a:prstGeom>
+          <a:solidFill>
+            <a:srgbClr val="FFFFFF"/>
+          </a:solidFill>
+          <a:ln>
+            <a:noFill/>
+          </a:ln>
+          <a:effectLst/>
+        </p:spPr>
+        <p:style>
+          <a:lnRef idx="1">
+            <a:schemeClr val="accent1"/>
+          </a:lnRef>
+          <a:fillRef idx="3">
+            <a:schemeClr val="accent1"/>
+          </a:fillRef>
+          <a:effectRef idx="2">
+            <a:schemeClr val="accent1"/>
+          </a:effectRef>
+          <a:fontRef idx="minor">
+            <a:schemeClr val="lt1"/>
+          </a:fontRef>
+        </p:style>
+        <p:txBody>
+          <a:bodyPr rtlCol="0" anchor="ctr"/>
+          <a:lstStyle/>
+          <a:p>
+            <a:pPr algn="ctr"/>
+          </a:p>
+        </p:txBody>
+      </p:sp>
+      <p:sp>
+        <p:nvSpPr>
+          <p:cNvPr id="68" name="TextBox 67"/>
+          <p:cNvSpPr txBox="1"/>
+          <p:nvPr/>
+        </p:nvSpPr>
+        <p:spPr>
+          <a:xfrm>
+            <a:off x="8183879" y="3127248"/>
+            <a:ext cx="3611880" cy="603504"/>
+          </a:xfrm>
+          <a:prstGeom prst="rect">
+            <a:avLst/>
+          </a:prstGeom>
+          <a:noFill/>
+        </p:spPr>
+        <p:txBody>
+          <a:bodyPr wrap="square" lIns="0" rIns="0" tIns="0" bIns="0">
+            <a:spAutoFit/>
+          </a:bodyPr>
+          <a:lstStyle/>
+          <a:p>
+            <a:pPr algn="l">
+              <a:lnSpc>
+                <a:spcPct val="130000"/>
+              </a:lnSpc>
+              <a:spcBef>
+                <a:spcPts val="0"/>
+              </a:spcBef>
+              <a:spcAft>
+                <a:spcPts val="0"/>
+              </a:spcAft>
+            </a:pPr>
+            <a:r>
+              <a:rPr sz="1200" b="0">
+                <a:solidFill>
+                  <a:srgbClr val="F2D6DB"/>
+                </a:solidFill>
+                <a:latin typeface="Arial"/>
+              </a:rPr>
+              <a:t>Happy to go deeper on the architecture, the k6 numbers, or the firewall finding.</a:t>
+            </a:r>
+          </a:p>
+        </p:txBody>
+      </p:sp>
+      <p:sp>
+        <p:nvSpPr>
+          <p:cNvPr id="69" name="TextBox 68"/>
+          <p:cNvSpPr txBox="1"/>
+          <p:nvPr/>
+        </p:nvSpPr>
+        <p:spPr>
+          <a:xfrm>
+            <a:off x="8183879" y="4206240"/>
+            <a:ext cx="3566160" cy="201168"/>
+          </a:xfrm>
+          <a:prstGeom prst="rect">
+            <a:avLst/>
+          </a:prstGeom>
+          <a:noFill/>
+        </p:spPr>
+        <p:txBody>
+          <a:bodyPr wrap="square" lIns="0" rIns="0" tIns="0" bIns="0">
+            <a:spAutoFit/>
+          </a:bodyPr>
+          <a:lstStyle/>
+          <a:p>
+            <a:pPr algn="l">
+              <a:spcBef>
+                <a:spcPts val="0"/>
+              </a:spcBef>
+              <a:spcAft>
+                <a:spcPts val="0"/>
+              </a:spcAft>
+            </a:pPr>
+            <a:r>
+              <a:rPr sz="900" b="1" spc="140">
+                <a:solidFill>
+                  <a:srgbClr val="D892A0"/>
+                </a:solidFill>
+                <a:latin typeface="Arial"/>
+              </a:rPr>
+              <a:t>TEAM</a:t>
+            </a:r>
+          </a:p>
+        </p:txBody>
+      </p:sp>
+      <p:sp>
+        <p:nvSpPr>
+          <p:cNvPr id="70" name="TextBox 69"/>
+          <p:cNvSpPr txBox="1"/>
+          <p:nvPr/>
+        </p:nvSpPr>
+        <p:spPr>
+          <a:xfrm>
+            <a:off x="8183879" y="4425696"/>
+            <a:ext cx="3566160" cy="402336"/>
+          </a:xfrm>
+          <a:prstGeom prst="rect">
+            <a:avLst/>
+          </a:prstGeom>
+          <a:noFill/>
+        </p:spPr>
+        <p:txBody>
+          <a:bodyPr wrap="square" lIns="0" rIns="0" tIns="0" bIns="0">
+            <a:spAutoFit/>
+          </a:bodyPr>
+          <a:lstStyle/>
+          <a:p>
+            <a:pPr algn="l">
+              <a:spcBef>
+                <a:spcPts val="0"/>
+              </a:spcBef>
+              <a:spcAft>
+                <a:spcPts val="0"/>
+              </a:spcAft>
+            </a:pPr>
+            <a:r>
+              <a:rPr sz="2500" b="1">
+                <a:solidFill>
+                  <a:srgbClr val="FFFFFF"/>
+                </a:solidFill>
+                <a:latin typeface="Arial"/>
+              </a:rPr>
+              <a:t>AGILE-ish</a:t>
+            </a:r>
+          </a:p>
+        </p:txBody>
+      </p:sp>
+      <p:sp>
+        <p:nvSpPr>
+          <p:cNvPr id="71" name="TextBox 70"/>
+          <p:cNvSpPr txBox="1"/>
+          <p:nvPr/>
+        </p:nvSpPr>
+        <p:spPr>
+          <a:xfrm>
+            <a:off x="8183879" y="4901184"/>
+            <a:ext cx="3566160" cy="219456"/>
+          </a:xfrm>
+          <a:prstGeom prst="rect">
+            <a:avLst/>
+          </a:prstGeom>
+          <a:noFill/>
+        </p:spPr>
+        <p:txBody>
+          <a:bodyPr wrap="square" lIns="0" rIns="0" tIns="0" bIns="0">
+            <a:spAutoFit/>
+          </a:bodyPr>
+          <a:lstStyle/>
+          <a:p>
+            <a:pPr algn="l">
+              <a:spcBef>
+                <a:spcPts val="0"/>
+              </a:spcBef>
+              <a:spcAft>
+                <a:spcPts val="0"/>
+              </a:spcAft>
+            </a:pPr>
+            <a:r>
+              <a:rPr sz="1200" b="0">
+                <a:solidFill>
+                  <a:srgbClr val="FFFFFF"/>
+                </a:solidFill>
+                <a:latin typeface="Arial"/>
+              </a:rPr>
+              <a:t>Shreya  ·  Sathwik  ·  Rameez</a:t>
+            </a:r>
+          </a:p>
+        </p:txBody>
+      </p:sp>
+      <p:sp>
+        <p:nvSpPr>
+          <p:cNvPr id="72" name="TextBox 71"/>
+          <p:cNvSpPr txBox="1"/>
+          <p:nvPr/>
+        </p:nvSpPr>
+        <p:spPr>
+          <a:xfrm>
+            <a:off x="8183879" y="5285232"/>
+            <a:ext cx="3566160" cy="219456"/>
+          </a:xfrm>
+          <a:prstGeom prst="rect">
+            <a:avLst/>
+          </a:prstGeom>
+          <a:noFill/>
+        </p:spPr>
+        <p:txBody>
+          <a:bodyPr wrap="square" lIns="0" rIns="0" tIns="0" bIns="0">
+            <a:spAutoFit/>
+          </a:bodyPr>
+          <a:lstStyle/>
+          <a:p>
+            <a:pPr algn="l">
+              <a:spcBef>
+                <a:spcPts val="0"/>
+              </a:spcBef>
+              <a:spcAft>
+                <a:spcPts val="0"/>
+              </a:spcAft>
+            </a:pPr>
+            <a:r>
+              <a:rPr sz="1000" b="0">
+                <a:solidFill>
+                  <a:srgbClr val="D892A0"/>
+                </a:solidFill>
+                <a:latin typeface="Arial"/>
+              </a:rPr>
+              <a:t>room107_Agileish  ·  branch dev</a:t>
+            </a:r>
+          </a:p>
+        </p:txBody>
+      </p:sp>
+      <p:pic>
+        <p:nvPicPr>
+          <p:cNvPr id="73" name="Picture 72" descr="hsbc.png"/>
+          <p:cNvPicPr>
+            <a:picLocks noChangeAspect="1"/>
+          </p:cNvPicPr>
+          <p:nvPr/>
+        </p:nvPicPr>
+        <p:blipFill>
+          <a:blip r:embed="rId2"/>
+          <a:stretch>
+            <a:fillRect/>
+          </a:stretch>
+        </p:blipFill>
+        <p:spPr>
+          <a:xfrm>
+            <a:off x="8183879" y="6108192"/>
+            <a:ext cx="1040384" cy="365760"/>
+          </a:xfrm>
+          <a:prstGeom prst="rect">
+            <a:avLst/>
+          </a:prstGeom>
+        </p:spPr>
+      </p:pic>
+      <p:sp>
+        <p:nvSpPr>
+          <p:cNvPr id="74" name="Rectangle 73"/>
+          <p:cNvSpPr/>
+          <p:nvPr/>
+        </p:nvSpPr>
+        <p:spPr>
+          <a:xfrm>
+            <a:off x="548640" y="6391656"/>
             <a:ext cx="6876288" cy="10972"/>
           </a:xfrm>
           <a:prstGeom prst="rect">
@@ -19529,14 +19039,14 @@
       </p:sp>
       <p:sp>
         <p:nvSpPr>
-          <p:cNvPr id="64" name="TextBox 63"/>
+          <p:cNvPr id="75" name="TextBox 74"/>
           <p:cNvSpPr txBox="1"/>
           <p:nvPr/>
         </p:nvSpPr>
         <p:spPr>
           <a:xfrm>
-            <a:off x="548640" y="5266944"/>
-            <a:ext cx="6766560" cy="219456"/>
+            <a:off x="548640" y="6473952"/>
+            <a:ext cx="5486400" cy="219456"/>
           </a:xfrm>
           <a:prstGeom prst="rect">
             <a:avLst/>
@@ -19558,480 +19068,13 @@
               </a:spcAft>
             </a:pPr>
             <a:r>
-              <a:rPr sz="950" b="1" spc="160">
-                <a:solidFill>
-                  <a:srgbClr val="C41E3A"/>
+              <a:rPr sz="900" b="0">
+                <a:solidFill>
+                  <a:srgbClr val="7C8695"/>
                 </a:solidFill>
                 <a:latin typeface="Arial"/>
               </a:rPr>
-              <a:t>WHAT WE DO NEXT</a:t>
-            </a:r>
-          </a:p>
-        </p:txBody>
-      </p:sp>
-      <p:sp>
-        <p:nvSpPr>
-          <p:cNvPr id="65" name="TextBox 64"/>
-          <p:cNvSpPr txBox="1"/>
-          <p:nvPr/>
-        </p:nvSpPr>
-        <p:spPr>
-          <a:xfrm>
-            <a:off x="548640" y="5522976"/>
-            <a:ext cx="274320" cy="201168"/>
-          </a:xfrm>
-          <a:prstGeom prst="rect">
-            <a:avLst/>
-          </a:prstGeom>
-          <a:noFill/>
-        </p:spPr>
-        <p:txBody>
-          <a:bodyPr wrap="square" lIns="0" rIns="0" tIns="0" bIns="0">
-            <a:spAutoFit/>
-          </a:bodyPr>
-          <a:lstStyle/>
-          <a:p>
-            <a:pPr algn="l">
-              <a:spcBef>
-                <a:spcPts val="0"/>
-              </a:spcBef>
-              <a:spcAft>
-                <a:spcPts val="0"/>
-              </a:spcAft>
-            </a:pPr>
-            <a:r>
-              <a:rPr sz="1050" b="1">
-                <a:solidFill>
-                  <a:srgbClr val="C41E3A"/>
-                </a:solidFill>
-                <a:latin typeface="Arial"/>
-              </a:rPr>
-              <a:t>1</a:t>
-            </a:r>
-          </a:p>
-        </p:txBody>
-      </p:sp>
-      <p:sp>
-        <p:nvSpPr>
-          <p:cNvPr id="66" name="TextBox 65"/>
-          <p:cNvSpPr txBox="1"/>
-          <p:nvPr/>
-        </p:nvSpPr>
-        <p:spPr>
-          <a:xfrm>
-            <a:off x="804672" y="5522976"/>
-            <a:ext cx="6583680" cy="201168"/>
-          </a:xfrm>
-          <a:prstGeom prst="rect">
-            <a:avLst/>
-          </a:prstGeom>
-          <a:noFill/>
-        </p:spPr>
-        <p:txBody>
-          <a:bodyPr wrap="square" lIns="0" rIns="0" tIns="0" bIns="0">
-            <a:spAutoFit/>
-          </a:bodyPr>
-          <a:lstStyle/>
-          <a:p>
-            <a:pPr algn="l">
-              <a:spcBef>
-                <a:spcPts val="0"/>
-              </a:spcBef>
-              <a:spcAft>
-                <a:spcPts val="0"/>
-              </a:spcAft>
-            </a:pPr>
-            <a:r>
-              <a:rPr sz="1050" b="0">
-                <a:solidFill>
-                  <a:srgbClr val="39414C"/>
-                </a:solidFill>
-                <a:latin typeface="Arial"/>
-              </a:rPr>
-              <a:t>Unblock Linux-to-Linux networking, then move MySQL onto its own host.</a:t>
-            </a:r>
-          </a:p>
-        </p:txBody>
-      </p:sp>
-      <p:sp>
-        <p:nvSpPr>
-          <p:cNvPr id="67" name="TextBox 66"/>
-          <p:cNvSpPr txBox="1"/>
-          <p:nvPr/>
-        </p:nvSpPr>
-        <p:spPr>
-          <a:xfrm>
-            <a:off x="548640" y="5788152"/>
-            <a:ext cx="274320" cy="201168"/>
-          </a:xfrm>
-          <a:prstGeom prst="rect">
-            <a:avLst/>
-          </a:prstGeom>
-          <a:noFill/>
-        </p:spPr>
-        <p:txBody>
-          <a:bodyPr wrap="square" lIns="0" rIns="0" tIns="0" bIns="0">
-            <a:spAutoFit/>
-          </a:bodyPr>
-          <a:lstStyle/>
-          <a:p>
-            <a:pPr algn="l">
-              <a:spcBef>
-                <a:spcPts val="0"/>
-              </a:spcBef>
-              <a:spcAft>
-                <a:spcPts val="0"/>
-              </a:spcAft>
-            </a:pPr>
-            <a:r>
-              <a:rPr sz="1050" b="1">
-                <a:solidFill>
-                  <a:srgbClr val="C41E3A"/>
-                </a:solidFill>
-                <a:latin typeface="Arial"/>
-              </a:rPr>
-              <a:t>2</a:t>
-            </a:r>
-          </a:p>
-        </p:txBody>
-      </p:sp>
-      <p:sp>
-        <p:nvSpPr>
-          <p:cNvPr id="68" name="TextBox 67"/>
-          <p:cNvSpPr txBox="1"/>
-          <p:nvPr/>
-        </p:nvSpPr>
-        <p:spPr>
-          <a:xfrm>
-            <a:off x="804672" y="5788152"/>
-            <a:ext cx="6583680" cy="201168"/>
-          </a:xfrm>
-          <a:prstGeom prst="rect">
-            <a:avLst/>
-          </a:prstGeom>
-          <a:noFill/>
-        </p:spPr>
-        <p:txBody>
-          <a:bodyPr wrap="square" lIns="0" rIns="0" tIns="0" bIns="0">
-            <a:spAutoFit/>
-          </a:bodyPr>
-          <a:lstStyle/>
-          <a:p>
-            <a:pPr algn="l">
-              <a:spcBef>
-                <a:spcPts val="0"/>
-              </a:spcBef>
-              <a:spcAft>
-                <a:spcPts val="0"/>
-              </a:spcAft>
-            </a:pPr>
-            <a:r>
-              <a:rPr sz="1050" b="0">
-                <a:solidFill>
-                  <a:srgbClr val="39414C"/>
-                </a:solidFill>
-                <a:latin typeface="Arial"/>
-              </a:rPr>
-              <a:t>Put a queue between ingest and evaluation and scale the rule workers.</a:t>
-            </a:r>
-          </a:p>
-        </p:txBody>
-      </p:sp>
-      <p:sp>
-        <p:nvSpPr>
-          <p:cNvPr id="69" name="TextBox 68"/>
-          <p:cNvSpPr txBox="1"/>
-          <p:nvPr/>
-        </p:nvSpPr>
-        <p:spPr>
-          <a:xfrm>
-            <a:off x="548640" y="6053328"/>
-            <a:ext cx="274320" cy="201168"/>
-          </a:xfrm>
-          <a:prstGeom prst="rect">
-            <a:avLst/>
-          </a:prstGeom>
-          <a:noFill/>
-        </p:spPr>
-        <p:txBody>
-          <a:bodyPr wrap="square" lIns="0" rIns="0" tIns="0" bIns="0">
-            <a:spAutoFit/>
-          </a:bodyPr>
-          <a:lstStyle/>
-          <a:p>
-            <a:pPr algn="l">
-              <a:spcBef>
-                <a:spcPts val="0"/>
-              </a:spcBef>
-              <a:spcAft>
-                <a:spcPts val="0"/>
-              </a:spcAft>
-            </a:pPr>
-            <a:r>
-              <a:rPr sz="1050" b="1">
-                <a:solidFill>
-                  <a:srgbClr val="C41E3A"/>
-                </a:solidFill>
-                <a:latin typeface="Arial"/>
-              </a:rPr>
-              <a:t>3</a:t>
-            </a:r>
-          </a:p>
-        </p:txBody>
-      </p:sp>
-      <p:sp>
-        <p:nvSpPr>
-          <p:cNvPr id="70" name="TextBox 69"/>
-          <p:cNvSpPr txBox="1"/>
-          <p:nvPr/>
-        </p:nvSpPr>
-        <p:spPr>
-          <a:xfrm>
-            <a:off x="804672" y="6053328"/>
-            <a:ext cx="6583680" cy="201168"/>
-          </a:xfrm>
-          <a:prstGeom prst="rect">
-            <a:avLst/>
-          </a:prstGeom>
-          <a:noFill/>
-        </p:spPr>
-        <p:txBody>
-          <a:bodyPr wrap="square" lIns="0" rIns="0" tIns="0" bIns="0">
-            <a:spAutoFit/>
-          </a:bodyPr>
-          <a:lstStyle/>
-          <a:p>
-            <a:pPr algn="l">
-              <a:spcBef>
-                <a:spcPts val="0"/>
-              </a:spcBef>
-              <a:spcAft>
-                <a:spcPts val="0"/>
-              </a:spcAft>
-            </a:pPr>
-            <a:r>
-              <a:rPr sz="1050" b="0">
-                <a:solidFill>
-                  <a:srgbClr val="39414C"/>
-                </a:solidFill>
-                <a:latin typeface="Arial"/>
-              </a:rPr>
-              <a:t>Re-run the 140 VU soak and publish the before-and-after side by side.</a:t>
-            </a:r>
-          </a:p>
-        </p:txBody>
-      </p:sp>
-      <p:sp>
-        <p:nvSpPr>
-          <p:cNvPr id="71" name="TextBox 70"/>
-          <p:cNvSpPr txBox="1"/>
-          <p:nvPr/>
-        </p:nvSpPr>
-        <p:spPr>
-          <a:xfrm>
-            <a:off x="8183879" y="2148840"/>
-            <a:ext cx="3657600" cy="640080"/>
-          </a:xfrm>
-          <a:prstGeom prst="rect">
-            <a:avLst/>
-          </a:prstGeom>
-          <a:noFill/>
-        </p:spPr>
-        <p:txBody>
-          <a:bodyPr wrap="square" lIns="0" rIns="0" tIns="0" bIns="0">
-            <a:spAutoFit/>
-          </a:bodyPr>
-          <a:lstStyle/>
-          <a:p>
-            <a:pPr algn="l">
-              <a:spcBef>
-                <a:spcPts val="0"/>
-              </a:spcBef>
-              <a:spcAft>
-                <a:spcPts val="0"/>
-              </a:spcAft>
-            </a:pPr>
-            <a:r>
-              <a:rPr sz="3800" b="1">
-                <a:solidFill>
-                  <a:srgbClr val="FFFFFF"/>
-                </a:solidFill>
-                <a:latin typeface="Arial"/>
-              </a:rPr>
-              <a:t>THANK YOU</a:t>
-            </a:r>
-          </a:p>
-        </p:txBody>
-      </p:sp>
-      <p:sp>
-        <p:nvSpPr>
-          <p:cNvPr id="72" name="Rectangle 71"/>
-          <p:cNvSpPr/>
-          <p:nvPr/>
-        </p:nvSpPr>
-        <p:spPr>
-          <a:xfrm>
-            <a:off x="8183879" y="2889504"/>
-            <a:ext cx="1371600" cy="27432"/>
-          </a:xfrm>
-          <a:prstGeom prst="rect">
-            <a:avLst/>
-          </a:prstGeom>
-          <a:solidFill>
-            <a:srgbClr val="FFFFFF"/>
-          </a:solidFill>
-          <a:ln>
-            <a:noFill/>
-          </a:ln>
-          <a:effectLst/>
-        </p:spPr>
-        <p:style>
-          <a:lnRef idx="1">
-            <a:schemeClr val="accent1"/>
-          </a:lnRef>
-          <a:fillRef idx="3">
-            <a:schemeClr val="accent1"/>
-          </a:fillRef>
-          <a:effectRef idx="2">
-            <a:schemeClr val="accent1"/>
-          </a:effectRef>
-          <a:fontRef idx="minor">
-            <a:schemeClr val="lt1"/>
-          </a:fontRef>
-        </p:style>
-        <p:txBody>
-          <a:bodyPr rtlCol="0" anchor="ctr"/>
-          <a:lstStyle/>
-          <a:p>
-            <a:pPr algn="ctr"/>
-          </a:p>
-        </p:txBody>
-      </p:sp>
-      <p:sp>
-        <p:nvSpPr>
-          <p:cNvPr id="73" name="TextBox 72"/>
-          <p:cNvSpPr txBox="1"/>
-          <p:nvPr/>
-        </p:nvSpPr>
-        <p:spPr>
-          <a:xfrm>
-            <a:off x="8183879" y="3127248"/>
-            <a:ext cx="3611880" cy="603504"/>
-          </a:xfrm>
-          <a:prstGeom prst="rect">
-            <a:avLst/>
-          </a:prstGeom>
-          <a:noFill/>
-        </p:spPr>
-        <p:txBody>
-          <a:bodyPr wrap="square" lIns="0" rIns="0" tIns="0" bIns="0">
-            <a:spAutoFit/>
-          </a:bodyPr>
-          <a:lstStyle/>
-          <a:p>
-            <a:pPr algn="l">
-              <a:lnSpc>
-                <a:spcPct val="130000"/>
-              </a:lnSpc>
-              <a:spcBef>
-                <a:spcPts val="0"/>
-              </a:spcBef>
-              <a:spcAft>
-                <a:spcPts val="0"/>
-              </a:spcAft>
-            </a:pPr>
-            <a:r>
-              <a:rPr sz="1200" b="0">
-                <a:solidFill>
-                  <a:srgbClr val="F2D6DB"/>
-                </a:solidFill>
-                <a:latin typeface="Arial"/>
-              </a:rPr>
-              <a:t>Happy to go deeper on the architecture, the k6 numbers, or the firewall finding.</a:t>
-            </a:r>
-          </a:p>
-        </p:txBody>
-      </p:sp>
-      <p:sp>
-        <p:nvSpPr>
-          <p:cNvPr id="74" name="TextBox 73"/>
-          <p:cNvSpPr txBox="1"/>
-          <p:nvPr/>
-        </p:nvSpPr>
-        <p:spPr>
-          <a:xfrm>
-            <a:off x="8183879" y="4206240"/>
-            <a:ext cx="3566160" cy="201168"/>
-          </a:xfrm>
-          <a:prstGeom prst="rect">
-            <a:avLst/>
-          </a:prstGeom>
-          <a:noFill/>
-        </p:spPr>
-        <p:txBody>
-          <a:bodyPr wrap="square" lIns="0" rIns="0" tIns="0" bIns="0">
-            <a:spAutoFit/>
-          </a:bodyPr>
-          <a:lstStyle/>
-          <a:p>
-            <a:pPr algn="l">
-              <a:spcBef>
-                <a:spcPts val="0"/>
-              </a:spcBef>
-              <a:spcAft>
-                <a:spcPts val="0"/>
-              </a:spcAft>
-            </a:pPr>
-            <a:r>
-              <a:rPr sz="900" b="1" spc="140">
-                <a:solidFill>
-                  <a:srgbClr val="D892A0"/>
-                </a:solidFill>
-                <a:latin typeface="Arial"/>
-              </a:rPr>
-              <a:t>TEAM</a:t>
-            </a:r>
-          </a:p>
-        </p:txBody>
-      </p:sp>
-      <p:sp>
-        <p:nvSpPr>
-          <p:cNvPr id="75" name="TextBox 74"/>
-          <p:cNvSpPr txBox="1"/>
-          <p:nvPr/>
-        </p:nvSpPr>
-        <p:spPr>
-          <a:xfrm>
-            <a:off x="8183879" y="4425696"/>
-            <a:ext cx="3566160" cy="402336"/>
-          </a:xfrm>
-          <a:prstGeom prst="rect">
-            <a:avLst/>
-          </a:prstGeom>
-          <a:noFill/>
-        </p:spPr>
-        <p:txBody>
-          <a:bodyPr wrap="square" lIns="0" rIns="0" tIns="0" bIns="0">
-            <a:spAutoFit/>
-          </a:bodyPr>
-          <a:lstStyle/>
-          <a:p>
-            <a:pPr algn="l">
-              <a:spcBef>
-                <a:spcPts val="0"/>
-              </a:spcBef>
-              <a:spcAft>
-                <a:spcPts val="0"/>
-              </a:spcAft>
-            </a:pPr>
-            <a:r>
-              <a:rPr sz="2500" b="1">
-                <a:solidFill>
-                  <a:srgbClr val="FFFFFF"/>
-                </a:solidFill>
-                <a:latin typeface="Arial"/>
-              </a:rPr>
-              <a:t>Agilish</a:t>
+              <a:t>AGILE-ish  ·  Transaction Monitoring &amp; Alerts</a:t>
             </a:r>
           </a:p>
         </p:txBody>
@@ -20039,200 +19082,6 @@
       <p:sp>
         <p:nvSpPr>
           <p:cNvPr id="76" name="TextBox 75"/>
-          <p:cNvSpPr txBox="1"/>
-          <p:nvPr/>
-        </p:nvSpPr>
-        <p:spPr>
-          <a:xfrm>
-            <a:off x="8183879" y="4901184"/>
-            <a:ext cx="3566160" cy="219456"/>
-          </a:xfrm>
-          <a:prstGeom prst="rect">
-            <a:avLst/>
-          </a:prstGeom>
-          <a:noFill/>
-        </p:spPr>
-        <p:txBody>
-          <a:bodyPr wrap="square" lIns="0" rIns="0" tIns="0" bIns="0">
-            <a:spAutoFit/>
-          </a:bodyPr>
-          <a:lstStyle/>
-          <a:p>
-            <a:pPr algn="l">
-              <a:spcBef>
-                <a:spcPts val="0"/>
-              </a:spcBef>
-              <a:spcAft>
-                <a:spcPts val="0"/>
-              </a:spcAft>
-            </a:pPr>
-            <a:r>
-              <a:rPr sz="1200" b="0">
-                <a:solidFill>
-                  <a:srgbClr val="FFFFFF"/>
-                </a:solidFill>
-                <a:latin typeface="Arial"/>
-              </a:rPr>
-              <a:t>shreya  ·  sathwik  ·  Rameez</a:t>
-            </a:r>
-          </a:p>
-        </p:txBody>
-      </p:sp>
-      <p:sp>
-        <p:nvSpPr>
-          <p:cNvPr id="77" name="TextBox 76"/>
-          <p:cNvSpPr txBox="1"/>
-          <p:nvPr/>
-        </p:nvSpPr>
-        <p:spPr>
-          <a:xfrm>
-            <a:off x="8183879" y="5285232"/>
-            <a:ext cx="3566160" cy="219456"/>
-          </a:xfrm>
-          <a:prstGeom prst="rect">
-            <a:avLst/>
-          </a:prstGeom>
-          <a:noFill/>
-        </p:spPr>
-        <p:txBody>
-          <a:bodyPr wrap="square" lIns="0" rIns="0" tIns="0" bIns="0">
-            <a:spAutoFit/>
-          </a:bodyPr>
-          <a:lstStyle/>
-          <a:p>
-            <a:pPr algn="l">
-              <a:spcBef>
-                <a:spcPts val="0"/>
-              </a:spcBef>
-              <a:spcAft>
-                <a:spcPts val="0"/>
-              </a:spcAft>
-            </a:pPr>
-            <a:r>
-              <a:rPr sz="1000" b="0">
-                <a:solidFill>
-                  <a:srgbClr val="D892A0"/>
-                </a:solidFill>
-                <a:latin typeface="Arial"/>
-              </a:rPr>
-              <a:t>room107_Agileish  ·  branch dev</a:t>
-            </a:r>
-          </a:p>
-        </p:txBody>
-      </p:sp>
-      <p:pic>
-        <p:nvPicPr>
-          <p:cNvPr id="78" name="Picture 77" descr="hsbc.png"/>
-          <p:cNvPicPr>
-            <a:picLocks noChangeAspect="1"/>
-          </p:cNvPicPr>
-          <p:nvPr/>
-        </p:nvPicPr>
-        <p:blipFill>
-          <a:blip r:embed="rId2"/>
-          <a:stretch>
-            <a:fillRect/>
-          </a:stretch>
-        </p:blipFill>
-        <p:spPr>
-          <a:xfrm>
-            <a:off x="8183879" y="6108192"/>
-            <a:ext cx="1040384" cy="365760"/>
-          </a:xfrm>
-          <a:prstGeom prst="rect">
-            <a:avLst/>
-          </a:prstGeom>
-        </p:spPr>
-      </p:pic>
-      <p:sp>
-        <p:nvSpPr>
-          <p:cNvPr id="79" name="Rectangle 78"/>
-          <p:cNvSpPr/>
-          <p:nvPr/>
-        </p:nvSpPr>
-        <p:spPr>
-          <a:xfrm>
-            <a:off x="548640" y="6391656"/>
-            <a:ext cx="6876288" cy="10972"/>
-          </a:xfrm>
-          <a:prstGeom prst="rect">
-            <a:avLst/>
-          </a:prstGeom>
-          <a:solidFill>
-            <a:srgbClr val="D9DEE4"/>
-          </a:solidFill>
-          <a:ln>
-            <a:noFill/>
-          </a:ln>
-          <a:effectLst/>
-        </p:spPr>
-        <p:style>
-          <a:lnRef idx="1">
-            <a:schemeClr val="accent1"/>
-          </a:lnRef>
-          <a:fillRef idx="3">
-            <a:schemeClr val="accent1"/>
-          </a:fillRef>
-          <a:effectRef idx="2">
-            <a:schemeClr val="accent1"/>
-          </a:effectRef>
-          <a:fontRef idx="minor">
-            <a:schemeClr val="lt1"/>
-          </a:fontRef>
-        </p:style>
-        <p:txBody>
-          <a:bodyPr rtlCol="0" anchor="ctr"/>
-          <a:lstStyle/>
-          <a:p>
-            <a:pPr algn="ctr"/>
-          </a:p>
-        </p:txBody>
-      </p:sp>
-      <p:sp>
-        <p:nvSpPr>
-          <p:cNvPr id="80" name="TextBox 79"/>
-          <p:cNvSpPr txBox="1"/>
-          <p:nvPr/>
-        </p:nvSpPr>
-        <p:spPr>
-          <a:xfrm>
-            <a:off x="548640" y="6473952"/>
-            <a:ext cx="5486400" cy="219456"/>
-          </a:xfrm>
-          <a:prstGeom prst="rect">
-            <a:avLst/>
-          </a:prstGeom>
-          <a:noFill/>
-        </p:spPr>
-        <p:txBody>
-          <a:bodyPr wrap="square" lIns="0" rIns="0" tIns="0" bIns="0">
-            <a:spAutoFit/>
-          </a:bodyPr>
-          <a:lstStyle/>
-          <a:p>
-            <a:pPr algn="l">
-              <a:spcBef>
-                <a:spcPts val="0"/>
-              </a:spcBef>
-              <a:spcAft>
-                <a:spcPts val="0"/>
-              </a:spcAft>
-            </a:pPr>
-            <a:r>
-              <a:rPr sz="900" b="0">
-                <a:solidFill>
-                  <a:srgbClr val="7C8695"/>
-                </a:solidFill>
-                <a:latin typeface="Arial"/>
-              </a:rPr>
-              <a:t>Agilish  ·  Transaction Monitoring &amp; Alerts</a:t>
-            </a:r>
-          </a:p>
-        </p:txBody>
-      </p:sp>
-      <p:sp>
-        <p:nvSpPr>
-          <p:cNvPr id="81" name="TextBox 80"/>
           <p:cNvSpPr txBox="1"/>
           <p:nvPr/>
         </p:nvSpPr>
